--- a/exports/pptx/lessons/middle-module-06-moon-phases-tithi/day-06-panchanga.pptx
+++ b/exports/pptx/lessons/middle-module-06-moon-phases-tithi/day-06-panchanga.pptx
@@ -17,9 +17,19 @@
     <p:sldId id="265" r:id="rId11"/>
     <p:sldId id="266" r:id="rId12"/>
     <p:sldId id="267" r:id="rId13"/>
+    <p:sldId id="268" r:id="rId14"/>
+    <p:sldId id="269" r:id="rId15"/>
+    <p:sldId id="270" r:id="rId16"/>
+    <p:sldId id="271" r:id="rId17"/>
+    <p:sldId id="272" r:id="rId18"/>
+    <p:sldId id="273" r:id="rId19"/>
+    <p:sldId id="274" r:id="rId20"/>
+    <p:sldId id="275" r:id="rId21"/>
+    <p:sldId id="276" r:id="rId22"/>
+    <p:sldId id="277" r:id="rId23"/>
   </p:sldIdLst>
   <p:notesMasterIdLst>
-    <p:notesMasterId r:id="rId14"/>
+    <p:notesMasterId r:id="rId24"/>
   </p:notesMasterIdLst>
   <p:sldSz cx="9144000" cy="5143500"/>
   <p:notesSz cx="5143500" cy="9144000"/>
@@ -819,6 +829,622 @@
 </p:notes>
 </file>
 
+<file path=ppt/notesSlides/notesSlide13.xml><?xml version="1.0" encoding="utf-8"?>
+<p:notes xmlns:a="http://schemas.openxmlformats.org/drawingml/2006/main" xmlns:r="http://schemas.openxmlformats.org/officeDocument/2006/relationships" xmlns:p="http://schemas.openxmlformats.org/presentationml/2006/main">
+  <p:cSld>
+    <p:spTree>
+      <p:nvGrpSpPr>
+        <p:cNvPr id="1" name=""/>
+        <p:cNvGrpSpPr/>
+        <p:nvPr/>
+      </p:nvGrpSpPr>
+      <p:grpSpPr>
+        <a:xfrm>
+          <a:off x="0" y="0"/>
+          <a:ext cx="0" cy="0"/>
+          <a:chOff x="0" y="0"/>
+          <a:chExt cx="0" cy="0"/>
+        </a:xfrm>
+      </p:grpSpPr>
+      <p:sp>
+        <p:nvSpPr>
+          <p:cNvPr id="2" name="Slide Image Placeholder 1"/>
+          <p:cNvSpPr>
+            <a:spLocks noGrp="1" noRot="1" noChangeAspect="1"/>
+          </p:cNvSpPr>
+          <p:nvPr>
+            <p:ph type="sldImg"/>
+          </p:nvPr>
+        </p:nvSpPr>
+        <p:spPr/>
+      </p:sp>
+      <p:sp>
+        <p:nvSpPr>
+          <p:cNvPr id="3" name="Notes Placeholder 2"/>
+          <p:cNvSpPr>
+            <a:spLocks noGrp="1"/>
+          </p:cNvSpPr>
+          <p:nvPr>
+            <p:ph type="body" idx="1"/>
+          </p:nvPr>
+        </p:nvSpPr>
+        <p:spPr/>
+        <p:txBody>
+          <a:bodyPr/>
+          <a:lstStyle/>
+          <a:p>
+            <a:r>
+              <a:rPr lang="en-US" dirty="0"/>
+              <a:t/>
+            </a:r>
+            <a:endParaRPr lang="en-US" dirty="0"/>
+          </a:p>
+        </p:txBody>
+      </p:sp>
+      <p:sp>
+        <p:nvSpPr>
+          <p:cNvPr id="4" name="Slide Number Placeholder 3"/>
+          <p:cNvSpPr>
+            <a:spLocks noGrp="1"/>
+          </p:cNvSpPr>
+          <p:nvPr>
+            <p:ph type="sldNum" sz="quarter" idx="10"/>
+          </p:nvPr>
+        </p:nvSpPr>
+        <p:spPr/>
+        <p:txBody>
+          <a:bodyPr/>
+          <a:lstStyle/>
+          <a:p>
+            <a:fld id="{F7021451-1387-4CA6-816F-3879F97B5CBC}" type="slidenum">
+              <a:rPr lang="en-US"/>
+              <a:t>13</a:t>
+            </a:fld>
+            <a:endParaRPr lang="en-US"/>
+          </a:p>
+        </p:txBody>
+      </p:sp>
+    </p:spTree>
+    <p:extLst>
+      <p:ext uri="{BB962C8B-B14F-4D97-AF65-F5344CB8AC3E}">
+        <p14:creationId xmlns:p14="http://schemas.microsoft.com/office/powerpoint/2010/main" val="1024086991"/>
+      </p:ext>
+    </p:extLst>
+  </p:cSld>
+  <p:clrMapOvr>
+    <a:masterClrMapping/>
+  </p:clrMapOvr>
+</p:notes>
+</file>
+
+<file path=ppt/notesSlides/notesSlide14.xml><?xml version="1.0" encoding="utf-8"?>
+<p:notes xmlns:a="http://schemas.openxmlformats.org/drawingml/2006/main" xmlns:r="http://schemas.openxmlformats.org/officeDocument/2006/relationships" xmlns:p="http://schemas.openxmlformats.org/presentationml/2006/main">
+  <p:cSld>
+    <p:spTree>
+      <p:nvGrpSpPr>
+        <p:cNvPr id="1" name=""/>
+        <p:cNvGrpSpPr/>
+        <p:nvPr/>
+      </p:nvGrpSpPr>
+      <p:grpSpPr>
+        <a:xfrm>
+          <a:off x="0" y="0"/>
+          <a:ext cx="0" cy="0"/>
+          <a:chOff x="0" y="0"/>
+          <a:chExt cx="0" cy="0"/>
+        </a:xfrm>
+      </p:grpSpPr>
+      <p:sp>
+        <p:nvSpPr>
+          <p:cNvPr id="2" name="Slide Image Placeholder 1"/>
+          <p:cNvSpPr>
+            <a:spLocks noGrp="1" noRot="1" noChangeAspect="1"/>
+          </p:cNvSpPr>
+          <p:nvPr>
+            <p:ph type="sldImg"/>
+          </p:nvPr>
+        </p:nvSpPr>
+        <p:spPr/>
+      </p:sp>
+      <p:sp>
+        <p:nvSpPr>
+          <p:cNvPr id="3" name="Notes Placeholder 2"/>
+          <p:cNvSpPr>
+            <a:spLocks noGrp="1"/>
+          </p:cNvSpPr>
+          <p:nvPr>
+            <p:ph type="body" idx="1"/>
+          </p:nvPr>
+        </p:nvSpPr>
+        <p:spPr/>
+        <p:txBody>
+          <a:bodyPr/>
+          <a:lstStyle/>
+          <a:p>
+            <a:r>
+              <a:rPr lang="en-US" dirty="0"/>
+              <a:t/>
+            </a:r>
+            <a:endParaRPr lang="en-US" dirty="0"/>
+          </a:p>
+        </p:txBody>
+      </p:sp>
+      <p:sp>
+        <p:nvSpPr>
+          <p:cNvPr id="4" name="Slide Number Placeholder 3"/>
+          <p:cNvSpPr>
+            <a:spLocks noGrp="1"/>
+          </p:cNvSpPr>
+          <p:nvPr>
+            <p:ph type="sldNum" sz="quarter" idx="10"/>
+          </p:nvPr>
+        </p:nvSpPr>
+        <p:spPr/>
+        <p:txBody>
+          <a:bodyPr/>
+          <a:lstStyle/>
+          <a:p>
+            <a:fld id="{F7021451-1387-4CA6-816F-3879F97B5CBC}" type="slidenum">
+              <a:rPr lang="en-US"/>
+              <a:t>14</a:t>
+            </a:fld>
+            <a:endParaRPr lang="en-US"/>
+          </a:p>
+        </p:txBody>
+      </p:sp>
+    </p:spTree>
+    <p:extLst>
+      <p:ext uri="{BB962C8B-B14F-4D97-AF65-F5344CB8AC3E}">
+        <p14:creationId xmlns:p14="http://schemas.microsoft.com/office/powerpoint/2010/main" val="1024086991"/>
+      </p:ext>
+    </p:extLst>
+  </p:cSld>
+  <p:clrMapOvr>
+    <a:masterClrMapping/>
+  </p:clrMapOvr>
+</p:notes>
+</file>
+
+<file path=ppt/notesSlides/notesSlide15.xml><?xml version="1.0" encoding="utf-8"?>
+<p:notes xmlns:a="http://schemas.openxmlformats.org/drawingml/2006/main" xmlns:r="http://schemas.openxmlformats.org/officeDocument/2006/relationships" xmlns:p="http://schemas.openxmlformats.org/presentationml/2006/main">
+  <p:cSld>
+    <p:spTree>
+      <p:nvGrpSpPr>
+        <p:cNvPr id="1" name=""/>
+        <p:cNvGrpSpPr/>
+        <p:nvPr/>
+      </p:nvGrpSpPr>
+      <p:grpSpPr>
+        <a:xfrm>
+          <a:off x="0" y="0"/>
+          <a:ext cx="0" cy="0"/>
+          <a:chOff x="0" y="0"/>
+          <a:chExt cx="0" cy="0"/>
+        </a:xfrm>
+      </p:grpSpPr>
+      <p:sp>
+        <p:nvSpPr>
+          <p:cNvPr id="2" name="Slide Image Placeholder 1"/>
+          <p:cNvSpPr>
+            <a:spLocks noGrp="1" noRot="1" noChangeAspect="1"/>
+          </p:cNvSpPr>
+          <p:nvPr>
+            <p:ph type="sldImg"/>
+          </p:nvPr>
+        </p:nvSpPr>
+        <p:spPr/>
+      </p:sp>
+      <p:sp>
+        <p:nvSpPr>
+          <p:cNvPr id="3" name="Notes Placeholder 2"/>
+          <p:cNvSpPr>
+            <a:spLocks noGrp="1"/>
+          </p:cNvSpPr>
+          <p:nvPr>
+            <p:ph type="body" idx="1"/>
+          </p:nvPr>
+        </p:nvSpPr>
+        <p:spPr/>
+        <p:txBody>
+          <a:bodyPr/>
+          <a:lstStyle/>
+          <a:p>
+            <a:r>
+              <a:rPr lang="en-US" dirty="0"/>
+              <a:t/>
+            </a:r>
+            <a:endParaRPr lang="en-US" dirty="0"/>
+          </a:p>
+        </p:txBody>
+      </p:sp>
+      <p:sp>
+        <p:nvSpPr>
+          <p:cNvPr id="4" name="Slide Number Placeholder 3"/>
+          <p:cNvSpPr>
+            <a:spLocks noGrp="1"/>
+          </p:cNvSpPr>
+          <p:nvPr>
+            <p:ph type="sldNum" sz="quarter" idx="10"/>
+          </p:nvPr>
+        </p:nvSpPr>
+        <p:spPr/>
+        <p:txBody>
+          <a:bodyPr/>
+          <a:lstStyle/>
+          <a:p>
+            <a:fld id="{F7021451-1387-4CA6-816F-3879F97B5CBC}" type="slidenum">
+              <a:rPr lang="en-US"/>
+              <a:t>15</a:t>
+            </a:fld>
+            <a:endParaRPr lang="en-US"/>
+          </a:p>
+        </p:txBody>
+      </p:sp>
+    </p:spTree>
+    <p:extLst>
+      <p:ext uri="{BB962C8B-B14F-4D97-AF65-F5344CB8AC3E}">
+        <p14:creationId xmlns:p14="http://schemas.microsoft.com/office/powerpoint/2010/main" val="1024086991"/>
+      </p:ext>
+    </p:extLst>
+  </p:cSld>
+  <p:clrMapOvr>
+    <a:masterClrMapping/>
+  </p:clrMapOvr>
+</p:notes>
+</file>
+
+<file path=ppt/notesSlides/notesSlide16.xml><?xml version="1.0" encoding="utf-8"?>
+<p:notes xmlns:a="http://schemas.openxmlformats.org/drawingml/2006/main" xmlns:r="http://schemas.openxmlformats.org/officeDocument/2006/relationships" xmlns:p="http://schemas.openxmlformats.org/presentationml/2006/main">
+  <p:cSld>
+    <p:spTree>
+      <p:nvGrpSpPr>
+        <p:cNvPr id="1" name=""/>
+        <p:cNvGrpSpPr/>
+        <p:nvPr/>
+      </p:nvGrpSpPr>
+      <p:grpSpPr>
+        <a:xfrm>
+          <a:off x="0" y="0"/>
+          <a:ext cx="0" cy="0"/>
+          <a:chOff x="0" y="0"/>
+          <a:chExt cx="0" cy="0"/>
+        </a:xfrm>
+      </p:grpSpPr>
+      <p:sp>
+        <p:nvSpPr>
+          <p:cNvPr id="2" name="Slide Image Placeholder 1"/>
+          <p:cNvSpPr>
+            <a:spLocks noGrp="1" noRot="1" noChangeAspect="1"/>
+          </p:cNvSpPr>
+          <p:nvPr>
+            <p:ph type="sldImg"/>
+          </p:nvPr>
+        </p:nvSpPr>
+        <p:spPr/>
+      </p:sp>
+      <p:sp>
+        <p:nvSpPr>
+          <p:cNvPr id="3" name="Notes Placeholder 2"/>
+          <p:cNvSpPr>
+            <a:spLocks noGrp="1"/>
+          </p:cNvSpPr>
+          <p:nvPr>
+            <p:ph type="body" idx="1"/>
+          </p:nvPr>
+        </p:nvSpPr>
+        <p:spPr/>
+        <p:txBody>
+          <a:bodyPr/>
+          <a:lstStyle/>
+          <a:p>
+            <a:r>
+              <a:rPr lang="en-US" dirty="0"/>
+              <a:t/>
+            </a:r>
+            <a:endParaRPr lang="en-US" dirty="0"/>
+          </a:p>
+        </p:txBody>
+      </p:sp>
+      <p:sp>
+        <p:nvSpPr>
+          <p:cNvPr id="4" name="Slide Number Placeholder 3"/>
+          <p:cNvSpPr>
+            <a:spLocks noGrp="1"/>
+          </p:cNvSpPr>
+          <p:nvPr>
+            <p:ph type="sldNum" sz="quarter" idx="10"/>
+          </p:nvPr>
+        </p:nvSpPr>
+        <p:spPr/>
+        <p:txBody>
+          <a:bodyPr/>
+          <a:lstStyle/>
+          <a:p>
+            <a:fld id="{F7021451-1387-4CA6-816F-3879F97B5CBC}" type="slidenum">
+              <a:rPr lang="en-US"/>
+              <a:t>16</a:t>
+            </a:fld>
+            <a:endParaRPr lang="en-US"/>
+          </a:p>
+        </p:txBody>
+      </p:sp>
+    </p:spTree>
+    <p:extLst>
+      <p:ext uri="{BB962C8B-B14F-4D97-AF65-F5344CB8AC3E}">
+        <p14:creationId xmlns:p14="http://schemas.microsoft.com/office/powerpoint/2010/main" val="1024086991"/>
+      </p:ext>
+    </p:extLst>
+  </p:cSld>
+  <p:clrMapOvr>
+    <a:masterClrMapping/>
+  </p:clrMapOvr>
+</p:notes>
+</file>
+
+<file path=ppt/notesSlides/notesSlide17.xml><?xml version="1.0" encoding="utf-8"?>
+<p:notes xmlns:a="http://schemas.openxmlformats.org/drawingml/2006/main" xmlns:r="http://schemas.openxmlformats.org/officeDocument/2006/relationships" xmlns:p="http://schemas.openxmlformats.org/presentationml/2006/main">
+  <p:cSld>
+    <p:spTree>
+      <p:nvGrpSpPr>
+        <p:cNvPr id="1" name=""/>
+        <p:cNvGrpSpPr/>
+        <p:nvPr/>
+      </p:nvGrpSpPr>
+      <p:grpSpPr>
+        <a:xfrm>
+          <a:off x="0" y="0"/>
+          <a:ext cx="0" cy="0"/>
+          <a:chOff x="0" y="0"/>
+          <a:chExt cx="0" cy="0"/>
+        </a:xfrm>
+      </p:grpSpPr>
+      <p:sp>
+        <p:nvSpPr>
+          <p:cNvPr id="2" name="Slide Image Placeholder 1"/>
+          <p:cNvSpPr>
+            <a:spLocks noGrp="1" noRot="1" noChangeAspect="1"/>
+          </p:cNvSpPr>
+          <p:nvPr>
+            <p:ph type="sldImg"/>
+          </p:nvPr>
+        </p:nvSpPr>
+        <p:spPr/>
+      </p:sp>
+      <p:sp>
+        <p:nvSpPr>
+          <p:cNvPr id="3" name="Notes Placeholder 2"/>
+          <p:cNvSpPr>
+            <a:spLocks noGrp="1"/>
+          </p:cNvSpPr>
+          <p:nvPr>
+            <p:ph type="body" idx="1"/>
+          </p:nvPr>
+        </p:nvSpPr>
+        <p:spPr/>
+        <p:txBody>
+          <a:bodyPr/>
+          <a:lstStyle/>
+          <a:p>
+            <a:r>
+              <a:rPr lang="en-US" dirty="0"/>
+              <a:t/>
+            </a:r>
+            <a:endParaRPr lang="en-US" dirty="0"/>
+          </a:p>
+        </p:txBody>
+      </p:sp>
+      <p:sp>
+        <p:nvSpPr>
+          <p:cNvPr id="4" name="Slide Number Placeholder 3"/>
+          <p:cNvSpPr>
+            <a:spLocks noGrp="1"/>
+          </p:cNvSpPr>
+          <p:nvPr>
+            <p:ph type="sldNum" sz="quarter" idx="10"/>
+          </p:nvPr>
+        </p:nvSpPr>
+        <p:spPr/>
+        <p:txBody>
+          <a:bodyPr/>
+          <a:lstStyle/>
+          <a:p>
+            <a:fld id="{F7021451-1387-4CA6-816F-3879F97B5CBC}" type="slidenum">
+              <a:rPr lang="en-US"/>
+              <a:t>17</a:t>
+            </a:fld>
+            <a:endParaRPr lang="en-US"/>
+          </a:p>
+        </p:txBody>
+      </p:sp>
+    </p:spTree>
+    <p:extLst>
+      <p:ext uri="{BB962C8B-B14F-4D97-AF65-F5344CB8AC3E}">
+        <p14:creationId xmlns:p14="http://schemas.microsoft.com/office/powerpoint/2010/main" val="1024086991"/>
+      </p:ext>
+    </p:extLst>
+  </p:cSld>
+  <p:clrMapOvr>
+    <a:masterClrMapping/>
+  </p:clrMapOvr>
+</p:notes>
+</file>
+
+<file path=ppt/notesSlides/notesSlide18.xml><?xml version="1.0" encoding="utf-8"?>
+<p:notes xmlns:a="http://schemas.openxmlformats.org/drawingml/2006/main" xmlns:r="http://schemas.openxmlformats.org/officeDocument/2006/relationships" xmlns:p="http://schemas.openxmlformats.org/presentationml/2006/main">
+  <p:cSld>
+    <p:spTree>
+      <p:nvGrpSpPr>
+        <p:cNvPr id="1" name=""/>
+        <p:cNvGrpSpPr/>
+        <p:nvPr/>
+      </p:nvGrpSpPr>
+      <p:grpSpPr>
+        <a:xfrm>
+          <a:off x="0" y="0"/>
+          <a:ext cx="0" cy="0"/>
+          <a:chOff x="0" y="0"/>
+          <a:chExt cx="0" cy="0"/>
+        </a:xfrm>
+      </p:grpSpPr>
+      <p:sp>
+        <p:nvSpPr>
+          <p:cNvPr id="2" name="Slide Image Placeholder 1"/>
+          <p:cNvSpPr>
+            <a:spLocks noGrp="1" noRot="1" noChangeAspect="1"/>
+          </p:cNvSpPr>
+          <p:nvPr>
+            <p:ph type="sldImg"/>
+          </p:nvPr>
+        </p:nvSpPr>
+        <p:spPr/>
+      </p:sp>
+      <p:sp>
+        <p:nvSpPr>
+          <p:cNvPr id="3" name="Notes Placeholder 2"/>
+          <p:cNvSpPr>
+            <a:spLocks noGrp="1"/>
+          </p:cNvSpPr>
+          <p:nvPr>
+            <p:ph type="body" idx="1"/>
+          </p:nvPr>
+        </p:nvSpPr>
+        <p:spPr/>
+        <p:txBody>
+          <a:bodyPr/>
+          <a:lstStyle/>
+          <a:p>
+            <a:r>
+              <a:rPr lang="en-US" dirty="0"/>
+              <a:t/>
+            </a:r>
+            <a:endParaRPr lang="en-US" dirty="0"/>
+          </a:p>
+        </p:txBody>
+      </p:sp>
+      <p:sp>
+        <p:nvSpPr>
+          <p:cNvPr id="4" name="Slide Number Placeholder 3"/>
+          <p:cNvSpPr>
+            <a:spLocks noGrp="1"/>
+          </p:cNvSpPr>
+          <p:nvPr>
+            <p:ph type="sldNum" sz="quarter" idx="10"/>
+          </p:nvPr>
+        </p:nvSpPr>
+        <p:spPr/>
+        <p:txBody>
+          <a:bodyPr/>
+          <a:lstStyle/>
+          <a:p>
+            <a:fld id="{F7021451-1387-4CA6-816F-3879F97B5CBC}" type="slidenum">
+              <a:rPr lang="en-US"/>
+              <a:t>18</a:t>
+            </a:fld>
+            <a:endParaRPr lang="en-US"/>
+          </a:p>
+        </p:txBody>
+      </p:sp>
+    </p:spTree>
+    <p:extLst>
+      <p:ext uri="{BB962C8B-B14F-4D97-AF65-F5344CB8AC3E}">
+        <p14:creationId xmlns:p14="http://schemas.microsoft.com/office/powerpoint/2010/main" val="1024086991"/>
+      </p:ext>
+    </p:extLst>
+  </p:cSld>
+  <p:clrMapOvr>
+    <a:masterClrMapping/>
+  </p:clrMapOvr>
+</p:notes>
+</file>
+
+<file path=ppt/notesSlides/notesSlide19.xml><?xml version="1.0" encoding="utf-8"?>
+<p:notes xmlns:a="http://schemas.openxmlformats.org/drawingml/2006/main" xmlns:r="http://schemas.openxmlformats.org/officeDocument/2006/relationships" xmlns:p="http://schemas.openxmlformats.org/presentationml/2006/main">
+  <p:cSld>
+    <p:spTree>
+      <p:nvGrpSpPr>
+        <p:cNvPr id="1" name=""/>
+        <p:cNvGrpSpPr/>
+        <p:nvPr/>
+      </p:nvGrpSpPr>
+      <p:grpSpPr>
+        <a:xfrm>
+          <a:off x="0" y="0"/>
+          <a:ext cx="0" cy="0"/>
+          <a:chOff x="0" y="0"/>
+          <a:chExt cx="0" cy="0"/>
+        </a:xfrm>
+      </p:grpSpPr>
+      <p:sp>
+        <p:nvSpPr>
+          <p:cNvPr id="2" name="Slide Image Placeholder 1"/>
+          <p:cNvSpPr>
+            <a:spLocks noGrp="1" noRot="1" noChangeAspect="1"/>
+          </p:cNvSpPr>
+          <p:nvPr>
+            <p:ph type="sldImg"/>
+          </p:nvPr>
+        </p:nvSpPr>
+        <p:spPr/>
+      </p:sp>
+      <p:sp>
+        <p:nvSpPr>
+          <p:cNvPr id="3" name="Notes Placeholder 2"/>
+          <p:cNvSpPr>
+            <a:spLocks noGrp="1"/>
+          </p:cNvSpPr>
+          <p:nvPr>
+            <p:ph type="body" idx="1"/>
+          </p:nvPr>
+        </p:nvSpPr>
+        <p:spPr/>
+        <p:txBody>
+          <a:bodyPr/>
+          <a:lstStyle/>
+          <a:p>
+            <a:r>
+              <a:rPr lang="en-US" dirty="0"/>
+              <a:t/>
+            </a:r>
+            <a:endParaRPr lang="en-US" dirty="0"/>
+          </a:p>
+        </p:txBody>
+      </p:sp>
+      <p:sp>
+        <p:nvSpPr>
+          <p:cNvPr id="4" name="Slide Number Placeholder 3"/>
+          <p:cNvSpPr>
+            <a:spLocks noGrp="1"/>
+          </p:cNvSpPr>
+          <p:nvPr>
+            <p:ph type="sldNum" sz="quarter" idx="10"/>
+          </p:nvPr>
+        </p:nvSpPr>
+        <p:spPr/>
+        <p:txBody>
+          <a:bodyPr/>
+          <a:lstStyle/>
+          <a:p>
+            <a:fld id="{F7021451-1387-4CA6-816F-3879F97B5CBC}" type="slidenum">
+              <a:rPr lang="en-US"/>
+              <a:t>19</a:t>
+            </a:fld>
+            <a:endParaRPr lang="en-US"/>
+          </a:p>
+        </p:txBody>
+      </p:sp>
+    </p:spTree>
+    <p:extLst>
+      <p:ext uri="{BB962C8B-B14F-4D97-AF65-F5344CB8AC3E}">
+        <p14:creationId xmlns:p14="http://schemas.microsoft.com/office/powerpoint/2010/main" val="1024086991"/>
+      </p:ext>
+    </p:extLst>
+  </p:cSld>
+  <p:clrMapOvr>
+    <a:masterClrMapping/>
+  </p:clrMapOvr>
+</p:notes>
+</file>
+
 <file path=ppt/notesSlides/notesSlide2.xml><?xml version="1.0" encoding="utf-8"?>
 <p:notes xmlns:a="http://schemas.openxmlformats.org/drawingml/2006/main" xmlns:r="http://schemas.openxmlformats.org/officeDocument/2006/relationships" xmlns:p="http://schemas.openxmlformats.org/presentationml/2006/main">
   <p:cSld>
@@ -889,6 +1515,270 @@
             <a:fld id="{F7021451-1387-4CA6-816F-3879F97B5CBC}" type="slidenum">
               <a:rPr lang="en-US"/>
               <a:t>2</a:t>
+            </a:fld>
+            <a:endParaRPr lang="en-US"/>
+          </a:p>
+        </p:txBody>
+      </p:sp>
+    </p:spTree>
+    <p:extLst>
+      <p:ext uri="{BB962C8B-B14F-4D97-AF65-F5344CB8AC3E}">
+        <p14:creationId xmlns:p14="http://schemas.microsoft.com/office/powerpoint/2010/main" val="1024086991"/>
+      </p:ext>
+    </p:extLst>
+  </p:cSld>
+  <p:clrMapOvr>
+    <a:masterClrMapping/>
+  </p:clrMapOvr>
+</p:notes>
+</file>
+
+<file path=ppt/notesSlides/notesSlide20.xml><?xml version="1.0" encoding="utf-8"?>
+<p:notes xmlns:a="http://schemas.openxmlformats.org/drawingml/2006/main" xmlns:r="http://schemas.openxmlformats.org/officeDocument/2006/relationships" xmlns:p="http://schemas.openxmlformats.org/presentationml/2006/main">
+  <p:cSld>
+    <p:spTree>
+      <p:nvGrpSpPr>
+        <p:cNvPr id="1" name=""/>
+        <p:cNvGrpSpPr/>
+        <p:nvPr/>
+      </p:nvGrpSpPr>
+      <p:grpSpPr>
+        <a:xfrm>
+          <a:off x="0" y="0"/>
+          <a:ext cx="0" cy="0"/>
+          <a:chOff x="0" y="0"/>
+          <a:chExt cx="0" cy="0"/>
+        </a:xfrm>
+      </p:grpSpPr>
+      <p:sp>
+        <p:nvSpPr>
+          <p:cNvPr id="2" name="Slide Image Placeholder 1"/>
+          <p:cNvSpPr>
+            <a:spLocks noGrp="1" noRot="1" noChangeAspect="1"/>
+          </p:cNvSpPr>
+          <p:nvPr>
+            <p:ph type="sldImg"/>
+          </p:nvPr>
+        </p:nvSpPr>
+        <p:spPr/>
+      </p:sp>
+      <p:sp>
+        <p:nvSpPr>
+          <p:cNvPr id="3" name="Notes Placeholder 2"/>
+          <p:cNvSpPr>
+            <a:spLocks noGrp="1"/>
+          </p:cNvSpPr>
+          <p:nvPr>
+            <p:ph type="body" idx="1"/>
+          </p:nvPr>
+        </p:nvSpPr>
+        <p:spPr/>
+        <p:txBody>
+          <a:bodyPr/>
+          <a:lstStyle/>
+          <a:p>
+            <a:r>
+              <a:rPr lang="en-US" dirty="0"/>
+              <a:t/>
+            </a:r>
+            <a:endParaRPr lang="en-US" dirty="0"/>
+          </a:p>
+        </p:txBody>
+      </p:sp>
+      <p:sp>
+        <p:nvSpPr>
+          <p:cNvPr id="4" name="Slide Number Placeholder 3"/>
+          <p:cNvSpPr>
+            <a:spLocks noGrp="1"/>
+          </p:cNvSpPr>
+          <p:nvPr>
+            <p:ph type="sldNum" sz="quarter" idx="10"/>
+          </p:nvPr>
+        </p:nvSpPr>
+        <p:spPr/>
+        <p:txBody>
+          <a:bodyPr/>
+          <a:lstStyle/>
+          <a:p>
+            <a:fld id="{F7021451-1387-4CA6-816F-3879F97B5CBC}" type="slidenum">
+              <a:rPr lang="en-US"/>
+              <a:t>20</a:t>
+            </a:fld>
+            <a:endParaRPr lang="en-US"/>
+          </a:p>
+        </p:txBody>
+      </p:sp>
+    </p:spTree>
+    <p:extLst>
+      <p:ext uri="{BB962C8B-B14F-4D97-AF65-F5344CB8AC3E}">
+        <p14:creationId xmlns:p14="http://schemas.microsoft.com/office/powerpoint/2010/main" val="1024086991"/>
+      </p:ext>
+    </p:extLst>
+  </p:cSld>
+  <p:clrMapOvr>
+    <a:masterClrMapping/>
+  </p:clrMapOvr>
+</p:notes>
+</file>
+
+<file path=ppt/notesSlides/notesSlide21.xml><?xml version="1.0" encoding="utf-8"?>
+<p:notes xmlns:a="http://schemas.openxmlformats.org/drawingml/2006/main" xmlns:r="http://schemas.openxmlformats.org/officeDocument/2006/relationships" xmlns:p="http://schemas.openxmlformats.org/presentationml/2006/main">
+  <p:cSld>
+    <p:spTree>
+      <p:nvGrpSpPr>
+        <p:cNvPr id="1" name=""/>
+        <p:cNvGrpSpPr/>
+        <p:nvPr/>
+      </p:nvGrpSpPr>
+      <p:grpSpPr>
+        <a:xfrm>
+          <a:off x="0" y="0"/>
+          <a:ext cx="0" cy="0"/>
+          <a:chOff x="0" y="0"/>
+          <a:chExt cx="0" cy="0"/>
+        </a:xfrm>
+      </p:grpSpPr>
+      <p:sp>
+        <p:nvSpPr>
+          <p:cNvPr id="2" name="Slide Image Placeholder 1"/>
+          <p:cNvSpPr>
+            <a:spLocks noGrp="1" noRot="1" noChangeAspect="1"/>
+          </p:cNvSpPr>
+          <p:nvPr>
+            <p:ph type="sldImg"/>
+          </p:nvPr>
+        </p:nvSpPr>
+        <p:spPr/>
+      </p:sp>
+      <p:sp>
+        <p:nvSpPr>
+          <p:cNvPr id="3" name="Notes Placeholder 2"/>
+          <p:cNvSpPr>
+            <a:spLocks noGrp="1"/>
+          </p:cNvSpPr>
+          <p:nvPr>
+            <p:ph type="body" idx="1"/>
+          </p:nvPr>
+        </p:nvSpPr>
+        <p:spPr/>
+        <p:txBody>
+          <a:bodyPr/>
+          <a:lstStyle/>
+          <a:p>
+            <a:r>
+              <a:rPr lang="en-US" dirty="0"/>
+              <a:t/>
+            </a:r>
+            <a:endParaRPr lang="en-US" dirty="0"/>
+          </a:p>
+        </p:txBody>
+      </p:sp>
+      <p:sp>
+        <p:nvSpPr>
+          <p:cNvPr id="4" name="Slide Number Placeholder 3"/>
+          <p:cNvSpPr>
+            <a:spLocks noGrp="1"/>
+          </p:cNvSpPr>
+          <p:nvPr>
+            <p:ph type="sldNum" sz="quarter" idx="10"/>
+          </p:nvPr>
+        </p:nvSpPr>
+        <p:spPr/>
+        <p:txBody>
+          <a:bodyPr/>
+          <a:lstStyle/>
+          <a:p>
+            <a:fld id="{F7021451-1387-4CA6-816F-3879F97B5CBC}" type="slidenum">
+              <a:rPr lang="en-US"/>
+              <a:t>21</a:t>
+            </a:fld>
+            <a:endParaRPr lang="en-US"/>
+          </a:p>
+        </p:txBody>
+      </p:sp>
+    </p:spTree>
+    <p:extLst>
+      <p:ext uri="{BB962C8B-B14F-4D97-AF65-F5344CB8AC3E}">
+        <p14:creationId xmlns:p14="http://schemas.microsoft.com/office/powerpoint/2010/main" val="1024086991"/>
+      </p:ext>
+    </p:extLst>
+  </p:cSld>
+  <p:clrMapOvr>
+    <a:masterClrMapping/>
+  </p:clrMapOvr>
+</p:notes>
+</file>
+
+<file path=ppt/notesSlides/notesSlide22.xml><?xml version="1.0" encoding="utf-8"?>
+<p:notes xmlns:a="http://schemas.openxmlformats.org/drawingml/2006/main" xmlns:r="http://schemas.openxmlformats.org/officeDocument/2006/relationships" xmlns:p="http://schemas.openxmlformats.org/presentationml/2006/main">
+  <p:cSld>
+    <p:spTree>
+      <p:nvGrpSpPr>
+        <p:cNvPr id="1" name=""/>
+        <p:cNvGrpSpPr/>
+        <p:nvPr/>
+      </p:nvGrpSpPr>
+      <p:grpSpPr>
+        <a:xfrm>
+          <a:off x="0" y="0"/>
+          <a:ext cx="0" cy="0"/>
+          <a:chOff x="0" y="0"/>
+          <a:chExt cx="0" cy="0"/>
+        </a:xfrm>
+      </p:grpSpPr>
+      <p:sp>
+        <p:nvSpPr>
+          <p:cNvPr id="2" name="Slide Image Placeholder 1"/>
+          <p:cNvSpPr>
+            <a:spLocks noGrp="1" noRot="1" noChangeAspect="1"/>
+          </p:cNvSpPr>
+          <p:nvPr>
+            <p:ph type="sldImg"/>
+          </p:nvPr>
+        </p:nvSpPr>
+        <p:spPr/>
+      </p:sp>
+      <p:sp>
+        <p:nvSpPr>
+          <p:cNvPr id="3" name="Notes Placeholder 2"/>
+          <p:cNvSpPr>
+            <a:spLocks noGrp="1"/>
+          </p:cNvSpPr>
+          <p:nvPr>
+            <p:ph type="body" idx="1"/>
+          </p:nvPr>
+        </p:nvSpPr>
+        <p:spPr/>
+        <p:txBody>
+          <a:bodyPr/>
+          <a:lstStyle/>
+          <a:p>
+            <a:r>
+              <a:rPr lang="en-US" dirty="0"/>
+              <a:t/>
+            </a:r>
+            <a:endParaRPr lang="en-US" dirty="0"/>
+          </a:p>
+        </p:txBody>
+      </p:sp>
+      <p:sp>
+        <p:nvSpPr>
+          <p:cNvPr id="4" name="Slide Number Placeholder 3"/>
+          <p:cNvSpPr>
+            <a:spLocks noGrp="1"/>
+          </p:cNvSpPr>
+          <p:nvPr>
+            <p:ph type="sldNum" sz="quarter" idx="10"/>
+          </p:nvPr>
+        </p:nvSpPr>
+        <p:spPr/>
+        <p:txBody>
+          <a:bodyPr/>
+          <a:lstStyle/>
+          <a:p>
+            <a:fld id="{F7021451-1387-4CA6-816F-3879F97B5CBC}" type="slidenum">
+              <a:rPr lang="en-US"/>
+              <a:t>22</a:t>
             </a:fld>
             <a:endParaRPr lang="en-US"/>
           </a:p>
@@ -2100,194 +2990,6 @@
         </p:nvSpPr>
         <p:spPr>
           <a:xfrm>
-            <a:off x="406301" y="1223963"/>
-            <a:ext cx="8498026" cy="274290"/>
-          </a:xfrm>
-          <a:prstGeom prst="rect">
-            <a:avLst/>
-          </a:prstGeom>
-          <a:noFill/>
-          <a:ln/>
-        </p:spPr>
-        <p:txBody>
-          <a:bodyPr wrap="square" lIns="0" tIns="0" rIns="0" bIns="0" rtlCol="0" anchor="t"/>
-          <a:lstStyle/>
-          <a:p>
-            <a:pPr algn="l" indent="0" marL="0">
-              <a:lnSpc>
-                <a:spcPts val="2160"/>
-              </a:lnSpc>
-              <a:spcBef>
-                <a:spcPts val="600"/>
-              </a:spcBef>
-              <a:spcAft>
-                <a:spcPts val="800"/>
-              </a:spcAft>
-              <a:buNone/>
-            </a:pPr>
-            <a:r>
-              <a:rPr lang="en-US" sz="1800" b="1" dirty="0">
-                <a:solidFill>
-                  <a:srgbClr val="FE4447"/>
-                </a:solidFill>
-                <a:latin typeface="Georgia" pitchFamily="34" charset="0"/>
-                <a:ea typeface="Georgia" pitchFamily="34" charset="-122"/>
-                <a:cs typeface="Georgia" pitchFamily="34" charset="-120"/>
-              </a:rPr>
-              <a:t>Learning objective</a:t>
-            </a:r>
-            <a:endParaRPr lang="en-US" sz="1800" dirty="0"/>
-          </a:p>
-        </p:txBody>
-      </p:sp>
-      <p:sp>
-        <p:nvSpPr>
-          <p:cNvPr id="6" name="Text 4"/>
-          <p:cNvSpPr/>
-          <p:nvPr/>
-        </p:nvSpPr>
-        <p:spPr>
-          <a:xfrm>
-            <a:off x="406301" y="1637854"/>
-            <a:ext cx="8498026" cy="426541"/>
-          </a:xfrm>
-          <a:prstGeom prst="rect">
-            <a:avLst/>
-          </a:prstGeom>
-          <a:noFill/>
-          <a:ln/>
-        </p:spPr>
-        <p:txBody>
-          <a:bodyPr wrap="square" lIns="0" tIns="0" rIns="0" bIns="0" rtlCol="0" anchor="t"/>
-          <a:lstStyle/>
-          <a:p>
-            <a:pPr algn="l" indent="0" marL="0">
-              <a:lnSpc>
-                <a:spcPts val="1680"/>
-              </a:lnSpc>
-              <a:spcBef>
-                <a:spcPts val="300"/>
-              </a:spcBef>
-              <a:spcAft>
-                <a:spcPts val="300"/>
-              </a:spcAft>
-              <a:buNone/>
-            </a:pPr>
-            <a:r>
-              <a:rPr lang="en-US" sz="1200" dirty="0">
-                <a:solidFill>
-                  <a:srgbClr val="1C2833"/>
-                </a:solidFill>
-                <a:latin typeface="Arial" pitchFamily="34" charset="0"/>
-                <a:ea typeface="Arial" pitchFamily="34" charset="-122"/>
-                <a:cs typeface="Arial" pitchFamily="34" charset="-120"/>
-              </a:rPr>
-              <a:t>Students will name the five limbs (</a:t>
-            </a:r>
-            <a:pPr algn="l" indent="0" marL="0">
-              <a:lnSpc>
-                <a:spcPts val="1680"/>
-              </a:lnSpc>
-              <a:spcBef>
-                <a:spcPts val="300"/>
-              </a:spcBef>
-              <a:spcAft>
-                <a:spcPts val="300"/>
-              </a:spcAft>
-              <a:buNone/>
-            </a:pPr>
-            <a:r>
-              <a:rPr lang="en-US" sz="1200" i="1" dirty="0">
-                <a:solidFill>
-                  <a:srgbClr val="1C2833"/>
-                </a:solidFill>
-                <a:latin typeface="Arial" pitchFamily="34" charset="0"/>
-                <a:ea typeface="Arial" pitchFamily="34" charset="-122"/>
-                <a:cs typeface="Arial" pitchFamily="34" charset="-120"/>
-              </a:rPr>
-              <a:t>aṅga</a:t>
-            </a:r>
-            <a:pPr algn="l" indent="0" marL="0">
-              <a:lnSpc>
-                <a:spcPts val="1680"/>
-              </a:lnSpc>
-              <a:spcBef>
-                <a:spcPts val="300"/>
-              </a:spcBef>
-              <a:spcAft>
-                <a:spcPts val="300"/>
-              </a:spcAft>
-              <a:buNone/>
-            </a:pPr>
-            <a:r>
-              <a:rPr lang="en-US" sz="1200" dirty="0">
-                <a:solidFill>
-                  <a:srgbClr val="1C2833"/>
-                </a:solidFill>
-                <a:latin typeface="Arial" pitchFamily="34" charset="0"/>
-                <a:ea typeface="Arial" pitchFamily="34" charset="-122"/>
-                <a:cs typeface="Arial" pitchFamily="34" charset="-120"/>
-              </a:rPr>
-              <a:t>) of the </a:t>
-            </a:r>
-            <a:pPr algn="l" indent="0" marL="0">
-              <a:lnSpc>
-                <a:spcPts val="1680"/>
-              </a:lnSpc>
-              <a:spcBef>
-                <a:spcPts val="300"/>
-              </a:spcBef>
-              <a:spcAft>
-                <a:spcPts val="300"/>
-              </a:spcAft>
-              <a:buNone/>
-            </a:pPr>
-            <a:r>
-              <a:rPr lang="en-US" sz="1200" i="1" dirty="0">
-                <a:solidFill>
-                  <a:srgbClr val="1C2833"/>
-                </a:solidFill>
-                <a:latin typeface="Arial" pitchFamily="34" charset="0"/>
-                <a:ea typeface="Arial" pitchFamily="34" charset="-122"/>
-                <a:cs typeface="Arial" pitchFamily="34" charset="-120"/>
-              </a:rPr>
-              <a:t>pañcāṅga</a:t>
-            </a:r>
-            <a:pPr algn="l" indent="0" marL="0">
-              <a:lnSpc>
-                <a:spcPts val="1680"/>
-              </a:lnSpc>
-              <a:spcBef>
-                <a:spcPts val="300"/>
-              </a:spcBef>
-              <a:spcAft>
-                <a:spcPts val="300"/>
-              </a:spcAft>
-              <a:buNone/>
-            </a:pPr>
-            <a:r>
-              <a:rPr lang="en-US" sz="1200" dirty="0">
-                <a:solidFill>
-                  <a:srgbClr val="1C2833"/>
-                </a:solidFill>
-                <a:latin typeface="Arial" pitchFamily="34" charset="0"/>
-                <a:ea typeface="Arial" pitchFamily="34" charset="-122"/>
-                <a:cs typeface="Arial" pitchFamily="34" charset="-120"/>
-              </a:rPr>
-              <a:t> — tithi, vāra, nakṣatra, yoga, karaṇa — and explain in one sentence each what each limb tracks.</a:t>
-            </a:r>
-            <a:endParaRPr lang="en-US" sz="1200" dirty="0"/>
-          </a:p>
-        </p:txBody>
-      </p:sp>
-      <p:sp>
-        <p:nvSpPr>
-          <p:cNvPr id="7" name="Text 5"/>
-          <p:cNvSpPr/>
-          <p:nvPr/>
-        </p:nvSpPr>
-        <p:spPr>
-          <a:xfrm>
             <a:off x="406301" y="4434929"/>
             <a:ext cx="8498026" cy="213271"/>
           </a:xfrm>
@@ -2432,7 +3134,7 @@
                 <a:ea typeface="Georgia" pitchFamily="34" charset="-122"/>
                 <a:cs typeface="Georgia" pitchFamily="34" charset="-120"/>
               </a:rPr>
-              <a:t>Differentiation</a:t>
+              <a:t>Core (25 min) (cont.)</a:t>
             </a:r>
             <a:endParaRPr lang="en-US" sz="1800" dirty="0"/>
           </a:p>
@@ -2446,8 +3148,8 @@
         </p:nvSpPr>
         <p:spPr>
           <a:xfrm>
-            <a:off x="634901" y="883593"/>
-            <a:ext cx="8102798" cy="1142702"/>
+            <a:off x="406301" y="870942"/>
+            <a:ext cx="8498026" cy="853083"/>
           </a:xfrm>
           <a:prstGeom prst="rect">
             <a:avLst/>
@@ -2459,15 +3161,17 @@
           <a:bodyPr wrap="square" lIns="0" tIns="0" rIns="0" bIns="0" rtlCol="0" anchor="t"/>
           <a:lstStyle/>
           <a:p>
-            <a:pPr algn="l" marL="342900" indent="-342900">
-              <a:lnSpc>
-                <a:spcPts val="1620"/>
-              </a:lnSpc>
-              <a:spcAft>
-                <a:spcPts val="300"/>
-              </a:spcAft>
-              <a:buSzPct val="100000"/>
-              <a:buChar char="•"/>
+            <a:pPr algn="l" indent="0" marL="0">
+              <a:lnSpc>
+                <a:spcPts val="1680"/>
+              </a:lnSpc>
+              <a:spcBef>
+                <a:spcPts val="300"/>
+              </a:spcBef>
+              <a:spcAft>
+                <a:spcPts val="300"/>
+              </a:spcAft>
+              <a:buNone/>
             </a:pPr>
             <a:r>
               <a:rPr lang="en-US" sz="1200" b="1" dirty="0">
@@ -2478,12 +3182,15 @@
                 <a:ea typeface="Arial" pitchFamily="34" charset="-122"/>
                 <a:cs typeface="Arial" pitchFamily="34" charset="-120"/>
               </a:rPr>
-              <a:t>One tier up:</a:t>
-            </a:r>
-            <a:pPr algn="l" indent="0" marL="0">
-              <a:lnSpc>
-                <a:spcPts val="1620"/>
-              </a:lnSpc>
+              <a:t>Nakṣatra — lunar mansion (27).</a:t>
+            </a:r>
+            <a:pPr algn="l" indent="0" marL="0">
+              <a:lnSpc>
+                <a:spcPts val="1680"/>
+              </a:lnSpc>
+              <a:spcBef>
+                <a:spcPts val="300"/>
+              </a:spcBef>
               <a:spcAft>
                 <a:spcPts val="300"/>
               </a:spcAft>
@@ -2498,12 +3205,15 @@
                 <a:ea typeface="Arial" pitchFamily="34" charset="-122"/>
                 <a:cs typeface="Arial" pitchFamily="34" charset="-120"/>
               </a:rPr>
-              <a:t> Compute the yoga number for today. You need the Sun's ecliptic longitude and the Moon's ecliptic longitude (from any astronomy app). Add them, divide by 13°20', take the integer part + 1 — that's the yoga number. Compare with what the </a:t>
-            </a:r>
-            <a:pPr algn="l" indent="0" marL="0">
-              <a:lnSpc>
-                <a:spcPts val="1620"/>
-              </a:lnSpc>
+              <a:t> The Moon takes about 27.3 days to circle the sky and return to the same star background (the </a:t>
+            </a:r>
+            <a:pPr algn="l" indent="0" marL="0">
+              <a:lnSpc>
+                <a:spcPts val="1680"/>
+              </a:lnSpc>
+              <a:spcBef>
+                <a:spcPts val="300"/>
+              </a:spcBef>
               <a:spcAft>
                 <a:spcPts val="300"/>
               </a:spcAft>
@@ -2518,12 +3228,61 @@
                 <a:ea typeface="Arial" pitchFamily="34" charset="-122"/>
                 <a:cs typeface="Arial" pitchFamily="34" charset="-120"/>
               </a:rPr>
+              <a:t>sidereal</a:t>
+            </a:r>
+            <a:pPr algn="l" indent="0" marL="0">
+              <a:lnSpc>
+                <a:spcPts val="1680"/>
+              </a:lnSpc>
+              <a:spcBef>
+                <a:spcPts val="300"/>
+              </a:spcBef>
+              <a:spcAft>
+                <a:spcPts val="300"/>
+              </a:spcAft>
+              <a:buNone/>
+            </a:pPr>
+            <a:r>
+              <a:rPr lang="en-US" sz="1200" dirty="0">
+                <a:solidFill>
+                  <a:srgbClr val="1C2833"/>
+                </a:solidFill>
+                <a:latin typeface="Arial" pitchFamily="34" charset="0"/>
+                <a:ea typeface="Arial" pitchFamily="34" charset="-122"/>
+                <a:cs typeface="Arial" pitchFamily="34" charset="-120"/>
+              </a:rPr>
+              <a:t> month). Indian astronomers divided the Moon's path into 27 segments, each ~13°20' wide, named after the star pattern in that segment (Aśvinī, Bharaṇī, Kṛttikā, Rohiṇī, ... Revatī). The </a:t>
+            </a:r>
+            <a:pPr algn="l" indent="0" marL="0">
+              <a:lnSpc>
+                <a:spcPts val="1680"/>
+              </a:lnSpc>
+              <a:spcBef>
+                <a:spcPts val="300"/>
+              </a:spcBef>
+              <a:spcAft>
+                <a:spcPts val="300"/>
+              </a:spcAft>
+              <a:buNone/>
+            </a:pPr>
+            <a:r>
+              <a:rPr lang="en-US" sz="1200" i="1" dirty="0">
+                <a:solidFill>
+                  <a:srgbClr val="1C2833"/>
+                </a:solidFill>
+                <a:latin typeface="Arial" pitchFamily="34" charset="0"/>
+                <a:ea typeface="Arial" pitchFamily="34" charset="-122"/>
+                <a:cs typeface="Arial" pitchFamily="34" charset="-120"/>
+              </a:rPr>
               <a:t>pañcāṅga</a:t>
             </a:r>
             <a:pPr algn="l" indent="0" marL="0">
               <a:lnSpc>
-                <a:spcPts val="1620"/>
-              </a:lnSpc>
+                <a:spcPts val="1680"/>
+              </a:lnSpc>
+              <a:spcBef>
+                <a:spcPts val="300"/>
+              </a:spcBef>
               <a:spcAft>
                 <a:spcPts val="300"/>
               </a:spcAft>
@@ -2538,171 +3297,7 @@
                 <a:ea typeface="Arial" pitchFamily="34" charset="-122"/>
                 <a:cs typeface="Arial" pitchFamily="34" charset="-120"/>
               </a:rPr>
-              <a:t> says.</a:t>
-            </a:r>
-            <a:endParaRPr lang="en-US" sz="1200" dirty="0"/>
-          </a:p>
-          <a:p>
-            <a:pPr algn="l" marL="342900" indent="-342900">
-              <a:lnSpc>
-                <a:spcPts val="1620"/>
-              </a:lnSpc>
-              <a:spcAft>
-                <a:spcPts val="300"/>
-              </a:spcAft>
-              <a:buSzPct val="100000"/>
-              <a:buChar char="•"/>
-            </a:pPr>
-            <a:r>
-              <a:rPr lang="en-US" sz="1200" b="1" dirty="0">
-                <a:solidFill>
-                  <a:srgbClr val="1C2833"/>
-                </a:solidFill>
-                <a:latin typeface="Arial" pitchFamily="34" charset="0"/>
-                <a:ea typeface="Arial" pitchFamily="34" charset="-122"/>
-                <a:cs typeface="Arial" pitchFamily="34" charset="-120"/>
-              </a:rPr>
-              <a:t>One tier down:</a:t>
-            </a:r>
-            <a:pPr algn="l" indent="0" marL="0">
-              <a:lnSpc>
-                <a:spcPts val="1620"/>
-              </a:lnSpc>
-              <a:spcAft>
-                <a:spcPts val="300"/>
-              </a:spcAft>
-              <a:buNone/>
-            </a:pPr>
-            <a:r>
-              <a:rPr lang="en-US" sz="1200" dirty="0">
-                <a:solidFill>
-                  <a:srgbClr val="1C2833"/>
-                </a:solidFill>
-                <a:latin typeface="Arial" pitchFamily="34" charset="0"/>
-                <a:ea typeface="Arial" pitchFamily="34" charset="-122"/>
-                <a:cs typeface="Arial" pitchFamily="34" charset="-120"/>
-              </a:rPr>
-              <a:t> Memorise three limbs only — </a:t>
-            </a:r>
-            <a:pPr algn="l" indent="0" marL="0">
-              <a:lnSpc>
-                <a:spcPts val="1620"/>
-              </a:lnSpc>
-              <a:spcAft>
-                <a:spcPts val="300"/>
-              </a:spcAft>
-              <a:buNone/>
-            </a:pPr>
-            <a:r>
-              <a:rPr lang="en-US" sz="1200" i="1" dirty="0">
-                <a:solidFill>
-                  <a:srgbClr val="1C2833"/>
-                </a:solidFill>
-                <a:latin typeface="Arial" pitchFamily="34" charset="0"/>
-                <a:ea typeface="Arial" pitchFamily="34" charset="-122"/>
-                <a:cs typeface="Arial" pitchFamily="34" charset="-120"/>
-              </a:rPr>
-              <a:t>tithi</a:t>
-            </a:r>
-            <a:pPr algn="l" indent="0" marL="0">
-              <a:lnSpc>
-                <a:spcPts val="1620"/>
-              </a:lnSpc>
-              <a:spcAft>
-                <a:spcPts val="300"/>
-              </a:spcAft>
-              <a:buNone/>
-            </a:pPr>
-            <a:r>
-              <a:rPr lang="en-US" sz="1200" dirty="0">
-                <a:solidFill>
-                  <a:srgbClr val="1C2833"/>
-                </a:solidFill>
-                <a:latin typeface="Arial" pitchFamily="34" charset="0"/>
-                <a:ea typeface="Arial" pitchFamily="34" charset="-122"/>
-                <a:cs typeface="Arial" pitchFamily="34" charset="-120"/>
-              </a:rPr>
-              <a:t>, </a:t>
-            </a:r>
-            <a:pPr algn="l" indent="0" marL="0">
-              <a:lnSpc>
-                <a:spcPts val="1620"/>
-              </a:lnSpc>
-              <a:spcAft>
-                <a:spcPts val="300"/>
-              </a:spcAft>
-              <a:buNone/>
-            </a:pPr>
-            <a:r>
-              <a:rPr lang="en-US" sz="1200" i="1" dirty="0">
-                <a:solidFill>
-                  <a:srgbClr val="1C2833"/>
-                </a:solidFill>
-                <a:latin typeface="Arial" pitchFamily="34" charset="0"/>
-                <a:ea typeface="Arial" pitchFamily="34" charset="-122"/>
-                <a:cs typeface="Arial" pitchFamily="34" charset="-120"/>
-              </a:rPr>
-              <a:t>vāra</a:t>
-            </a:r>
-            <a:pPr algn="l" indent="0" marL="0">
-              <a:lnSpc>
-                <a:spcPts val="1620"/>
-              </a:lnSpc>
-              <a:spcAft>
-                <a:spcPts val="300"/>
-              </a:spcAft>
-              <a:buNone/>
-            </a:pPr>
-            <a:r>
-              <a:rPr lang="en-US" sz="1200" dirty="0">
-                <a:solidFill>
-                  <a:srgbClr val="1C2833"/>
-                </a:solidFill>
-                <a:latin typeface="Arial" pitchFamily="34" charset="0"/>
-                <a:ea typeface="Arial" pitchFamily="34" charset="-122"/>
-                <a:cs typeface="Arial" pitchFamily="34" charset="-120"/>
-              </a:rPr>
-              <a:t>, </a:t>
-            </a:r>
-            <a:pPr algn="l" indent="0" marL="0">
-              <a:lnSpc>
-                <a:spcPts val="1620"/>
-              </a:lnSpc>
-              <a:spcAft>
-                <a:spcPts val="300"/>
-              </a:spcAft>
-              <a:buNone/>
-            </a:pPr>
-            <a:r>
-              <a:rPr lang="en-US" sz="1200" i="1" dirty="0">
-                <a:solidFill>
-                  <a:srgbClr val="1C2833"/>
-                </a:solidFill>
-                <a:latin typeface="Arial" pitchFamily="34" charset="0"/>
-                <a:ea typeface="Arial" pitchFamily="34" charset="-122"/>
-                <a:cs typeface="Arial" pitchFamily="34" charset="-120"/>
-              </a:rPr>
-              <a:t>nakṣatra</a:t>
-            </a:r>
-            <a:pPr algn="l" indent="0" marL="0">
-              <a:lnSpc>
-                <a:spcPts val="1620"/>
-              </a:lnSpc>
-              <a:spcAft>
-                <a:spcPts val="300"/>
-              </a:spcAft>
-              <a:buNone/>
-            </a:pPr>
-            <a:r>
-              <a:rPr lang="en-US" sz="1200" dirty="0">
-                <a:solidFill>
-                  <a:srgbClr val="1C2833"/>
-                </a:solidFill>
-                <a:latin typeface="Arial" pitchFamily="34" charset="0"/>
-                <a:ea typeface="Arial" pitchFamily="34" charset="-122"/>
-                <a:cs typeface="Arial" pitchFamily="34" charset="-120"/>
-              </a:rPr>
-              <a:t>. The yoga and karaṇa terms can stay as "things I've heard of" for now.</a:t>
+              <a:t> lists which nakṣatra the Moon is in each day.</a:t>
             </a:r>
             <a:endParaRPr lang="en-US" sz="1200" dirty="0"/>
           </a:p>
@@ -2860,7 +3455,7 @@
                 <a:ea typeface="Georgia" pitchFamily="34" charset="-122"/>
                 <a:cs typeface="Georgia" pitchFamily="34" charset="-120"/>
               </a:rPr>
-              <a:t>Teacher notes</a:t>
+              <a:t>Core (25 min) (cont.)</a:t>
             </a:r>
             <a:endParaRPr lang="en-US" sz="1800" dirty="0"/>
           </a:p>
@@ -2875,7 +3470,7 @@
         <p:spPr>
           <a:xfrm>
             <a:off x="406301" y="870942"/>
-            <a:ext cx="8498026" cy="1066354"/>
+            <a:ext cx="8498026" cy="426541"/>
           </a:xfrm>
           <a:prstGeom prst="rect">
             <a:avLst/>
@@ -2900,6 +3495,29 @@
               <a:buNone/>
             </a:pPr>
             <a:r>
+              <a:rPr lang="en-US" sz="1200" b="1" dirty="0">
+                <a:solidFill>
+                  <a:srgbClr val="1C2833"/>
+                </a:solidFill>
+                <a:latin typeface="Arial" pitchFamily="34" charset="0"/>
+                <a:ea typeface="Arial" pitchFamily="34" charset="-122"/>
+                <a:cs typeface="Arial" pitchFamily="34" charset="-120"/>
+              </a:rPr>
+              <a:t>Yoga — joining (27).</a:t>
+            </a:r>
+            <a:pPr algn="l" indent="0" marL="0">
+              <a:lnSpc>
+                <a:spcPts val="1680"/>
+              </a:lnSpc>
+              <a:spcBef>
+                <a:spcPts val="300"/>
+              </a:spcBef>
+              <a:spcAft>
+                <a:spcPts val="300"/>
+              </a:spcAft>
+              <a:buNone/>
+            </a:pPr>
+            <a:r>
               <a:rPr lang="en-US" sz="1200" dirty="0">
                 <a:solidFill>
                   <a:srgbClr val="1C2833"/>
@@ -2908,145 +3526,7 @@
                 <a:ea typeface="Arial" pitchFamily="34" charset="-122"/>
                 <a:cs typeface="Arial" pitchFamily="34" charset="-120"/>
               </a:rPr>
-              <a:t>– The </a:t>
-            </a:r>
-            <a:pPr algn="l" indent="0" marL="0">
-              <a:lnSpc>
-                <a:spcPts val="1680"/>
-              </a:lnSpc>
-              <a:spcBef>
-                <a:spcPts val="300"/>
-              </a:spcBef>
-              <a:spcAft>
-                <a:spcPts val="300"/>
-              </a:spcAft>
-              <a:buNone/>
-            </a:pPr>
-            <a:r>
-              <a:rPr lang="en-US" sz="1200" i="1" dirty="0">
-                <a:solidFill>
-                  <a:srgbClr val="1C2833"/>
-                </a:solidFill>
-                <a:latin typeface="Arial" pitchFamily="34" charset="0"/>
-                <a:ea typeface="Arial" pitchFamily="34" charset="-122"/>
-                <a:cs typeface="Arial" pitchFamily="34" charset="-120"/>
-              </a:rPr>
-              <a:t>yoga</a:t>
-            </a:r>
-            <a:pPr algn="l" indent="0" marL="0">
-              <a:lnSpc>
-                <a:spcPts val="1680"/>
-              </a:lnSpc>
-              <a:spcBef>
-                <a:spcPts val="300"/>
-              </a:spcBef>
-              <a:spcAft>
-                <a:spcPts val="300"/>
-              </a:spcAft>
-              <a:buNone/>
-            </a:pPr>
-            <a:r>
-              <a:rPr lang="en-US" sz="1200" dirty="0">
-                <a:solidFill>
-                  <a:srgbClr val="1C2833"/>
-                </a:solidFill>
-                <a:latin typeface="Arial" pitchFamily="34" charset="0"/>
-                <a:ea typeface="Arial" pitchFamily="34" charset="-122"/>
-                <a:cs typeface="Arial" pitchFamily="34" charset="-120"/>
-              </a:rPr>
-              <a:t> limb is the most confusing — partly because "yoga" also means the spiritual discipline. Note this explicitly. They are different applications of the same Sanskrit root </a:t>
-            </a:r>
-            <a:pPr algn="l" indent="0" marL="0">
-              <a:lnSpc>
-                <a:spcPts val="1680"/>
-              </a:lnSpc>
-              <a:spcBef>
-                <a:spcPts val="300"/>
-              </a:spcBef>
-              <a:spcAft>
-                <a:spcPts val="300"/>
-              </a:spcAft>
-              <a:buNone/>
-            </a:pPr>
-            <a:r>
-              <a:rPr lang="en-US" sz="1200" i="1" dirty="0">
-                <a:solidFill>
-                  <a:srgbClr val="1C2833"/>
-                </a:solidFill>
-                <a:latin typeface="Arial" pitchFamily="34" charset="0"/>
-                <a:ea typeface="Arial" pitchFamily="34" charset="-122"/>
-                <a:cs typeface="Arial" pitchFamily="34" charset="-120"/>
-              </a:rPr>
-              <a:t>yuj</a:t>
-            </a:r>
-            <a:pPr algn="l" indent="0" marL="0">
-              <a:lnSpc>
-                <a:spcPts val="1680"/>
-              </a:lnSpc>
-              <a:spcBef>
-                <a:spcPts val="300"/>
-              </a:spcBef>
-              <a:spcAft>
-                <a:spcPts val="300"/>
-              </a:spcAft>
-              <a:buNone/>
-            </a:pPr>
-            <a:r>
-              <a:rPr lang="en-US" sz="1200" dirty="0">
-                <a:solidFill>
-                  <a:srgbClr val="1C2833"/>
-                </a:solidFill>
-                <a:latin typeface="Arial" pitchFamily="34" charset="0"/>
-                <a:ea typeface="Arial" pitchFamily="34" charset="-122"/>
-                <a:cs typeface="Arial" pitchFamily="34" charset="-120"/>
-              </a:rPr>
-              <a:t> ("to join"). – The </a:t>
-            </a:r>
-            <a:pPr algn="l" indent="0" marL="0">
-              <a:lnSpc>
-                <a:spcPts val="1680"/>
-              </a:lnSpc>
-              <a:spcBef>
-                <a:spcPts val="300"/>
-              </a:spcBef>
-              <a:spcAft>
-                <a:spcPts val="300"/>
-              </a:spcAft>
-              <a:buNone/>
-            </a:pPr>
-            <a:r>
-              <a:rPr lang="en-US" sz="1200" i="1" dirty="0">
-                <a:solidFill>
-                  <a:srgbClr val="1C2833"/>
-                </a:solidFill>
-                <a:latin typeface="Arial" pitchFamily="34" charset="0"/>
-                <a:ea typeface="Arial" pitchFamily="34" charset="-122"/>
-                <a:cs typeface="Arial" pitchFamily="34" charset="-120"/>
-              </a:rPr>
-              <a:t>karaṇa</a:t>
-            </a:r>
-            <a:pPr algn="l" indent="0" marL="0">
-              <a:lnSpc>
-                <a:spcPts val="1680"/>
-              </a:lnSpc>
-              <a:spcBef>
-                <a:spcPts val="300"/>
-              </a:spcBef>
-              <a:spcAft>
-                <a:spcPts val="300"/>
-              </a:spcAft>
-              <a:buNone/>
-            </a:pPr>
-            <a:r>
-              <a:rPr lang="en-US" sz="1200" dirty="0">
-                <a:solidFill>
-                  <a:srgbClr val="1C2833"/>
-                </a:solidFill>
-                <a:latin typeface="Arial" pitchFamily="34" charset="0"/>
-                <a:ea typeface="Arial" pitchFamily="34" charset="-122"/>
-                <a:cs typeface="Arial" pitchFamily="34" charset="-120"/>
-              </a:rPr>
-              <a:t> naming is genuinely complicated. Don't try to teach all 11 names today — just enough that students know there are half-tithis and they have names. – This is a content-heavy day. If the class is fading, move the activity to a paired worksheet for tomorrow and use today's time for slow walkthrough.</a:t>
+              <a:t> Add the Sun's ecliptic longitude to the Moon's. Divide by 13°20'. The result is the yoga number (1–27). Each has a name (Viṣkambha, Prīti, Āyuṣmān, ...). It's a derived quantity, useful for timing in traditional astrology.</a:t>
             </a:r>
             <a:endParaRPr lang="en-US" sz="1200" dirty="0"/>
           </a:p>
@@ -3204,7 +3684,1712 @@
                 <a:ea typeface="Georgia" pitchFamily="34" charset="-122"/>
                 <a:cs typeface="Georgia" pitchFamily="34" charset="-120"/>
               </a:rPr>
-              <a:t>Citation(s) used in this lesson</a:t>
+              <a:t>Core (25 min) (cont.)</a:t>
+            </a:r>
+            <a:endParaRPr lang="en-US" sz="1800" dirty="0"/>
+          </a:p>
+        </p:txBody>
+      </p:sp>
+      <p:sp>
+        <p:nvSpPr>
+          <p:cNvPr id="4" name="Text 2"/>
+          <p:cNvSpPr/>
+          <p:nvPr/>
+        </p:nvSpPr>
+        <p:spPr>
+          <a:xfrm>
+            <a:off x="406301" y="870942"/>
+            <a:ext cx="8498026" cy="853083"/>
+          </a:xfrm>
+          <a:prstGeom prst="rect">
+            <a:avLst/>
+          </a:prstGeom>
+          <a:noFill/>
+          <a:ln/>
+        </p:spPr>
+        <p:txBody>
+          <a:bodyPr wrap="square" lIns="0" tIns="0" rIns="0" bIns="0" rtlCol="0" anchor="t"/>
+          <a:lstStyle/>
+          <a:p>
+            <a:pPr algn="l" indent="0" marL="0">
+              <a:lnSpc>
+                <a:spcPts val="1680"/>
+              </a:lnSpc>
+              <a:spcBef>
+                <a:spcPts val="300"/>
+              </a:spcBef>
+              <a:spcAft>
+                <a:spcPts val="300"/>
+              </a:spcAft>
+              <a:buNone/>
+            </a:pPr>
+            <a:r>
+              <a:rPr lang="en-US" sz="1200" b="1" dirty="0">
+                <a:solidFill>
+                  <a:srgbClr val="1C2833"/>
+                </a:solidFill>
+                <a:latin typeface="Arial" pitchFamily="34" charset="0"/>
+                <a:ea typeface="Arial" pitchFamily="34" charset="-122"/>
+                <a:cs typeface="Arial" pitchFamily="34" charset="-120"/>
+              </a:rPr>
+              <a:t>Karaṇa — half-tithi (11 cycling).</a:t>
+            </a:r>
+            <a:pPr algn="l" indent="0" marL="0">
+              <a:lnSpc>
+                <a:spcPts val="1680"/>
+              </a:lnSpc>
+              <a:spcBef>
+                <a:spcPts val="300"/>
+              </a:spcBef>
+              <a:spcAft>
+                <a:spcPts val="300"/>
+              </a:spcAft>
+              <a:buNone/>
+            </a:pPr>
+            <a:r>
+              <a:rPr lang="en-US" sz="1200" dirty="0">
+                <a:solidFill>
+                  <a:srgbClr val="1C2833"/>
+                </a:solidFill>
+                <a:latin typeface="Arial" pitchFamily="34" charset="0"/>
+                <a:ea typeface="Arial" pitchFamily="34" charset="-122"/>
+                <a:cs typeface="Arial" pitchFamily="34" charset="-120"/>
+              </a:rPr>
+              <a:t> Each tithi is split into two halves. The first 7 karaṇas of the month are </a:t>
+            </a:r>
+            <a:pPr algn="l" indent="0" marL="0">
+              <a:lnSpc>
+                <a:spcPts val="1680"/>
+              </a:lnSpc>
+              <a:spcBef>
+                <a:spcPts val="300"/>
+              </a:spcBef>
+              <a:spcAft>
+                <a:spcPts val="300"/>
+              </a:spcAft>
+              <a:buNone/>
+            </a:pPr>
+            <a:r>
+              <a:rPr lang="en-US" sz="1200" i="1" dirty="0">
+                <a:solidFill>
+                  <a:srgbClr val="1C2833"/>
+                </a:solidFill>
+                <a:latin typeface="Arial" pitchFamily="34" charset="0"/>
+                <a:ea typeface="Arial" pitchFamily="34" charset="-122"/>
+                <a:cs typeface="Arial" pitchFamily="34" charset="-120"/>
+              </a:rPr>
+              <a:t>cara</a:t>
+            </a:r>
+            <a:pPr algn="l" indent="0" marL="0">
+              <a:lnSpc>
+                <a:spcPts val="1680"/>
+              </a:lnSpc>
+              <a:spcBef>
+                <a:spcPts val="300"/>
+              </a:spcBef>
+              <a:spcAft>
+                <a:spcPts val="300"/>
+              </a:spcAft>
+              <a:buNone/>
+            </a:pPr>
+            <a:r>
+              <a:rPr lang="en-US" sz="1200" dirty="0">
+                <a:solidFill>
+                  <a:srgbClr val="1C2833"/>
+                </a:solidFill>
+                <a:latin typeface="Arial" pitchFamily="34" charset="0"/>
+                <a:ea typeface="Arial" pitchFamily="34" charset="-122"/>
+                <a:cs typeface="Arial" pitchFamily="34" charset="-120"/>
+              </a:rPr>
+              <a:t> ("moving") karaṇas — Bava, Bālava, Kaulava, Taitila, Garaja, Vaṇija, Viṣṭi. They cycle 8 times through the month. The last 4 are </a:t>
+            </a:r>
+            <a:pPr algn="l" indent="0" marL="0">
+              <a:lnSpc>
+                <a:spcPts val="1680"/>
+              </a:lnSpc>
+              <a:spcBef>
+                <a:spcPts val="300"/>
+              </a:spcBef>
+              <a:spcAft>
+                <a:spcPts val="300"/>
+              </a:spcAft>
+              <a:buNone/>
+            </a:pPr>
+            <a:r>
+              <a:rPr lang="en-US" sz="1200" i="1" dirty="0">
+                <a:solidFill>
+                  <a:srgbClr val="1C2833"/>
+                </a:solidFill>
+                <a:latin typeface="Arial" pitchFamily="34" charset="0"/>
+                <a:ea typeface="Arial" pitchFamily="34" charset="-122"/>
+                <a:cs typeface="Arial" pitchFamily="34" charset="-120"/>
+              </a:rPr>
+              <a:t>sthira</a:t>
+            </a:r>
+            <a:pPr algn="l" indent="0" marL="0">
+              <a:lnSpc>
+                <a:spcPts val="1680"/>
+              </a:lnSpc>
+              <a:spcBef>
+                <a:spcPts val="300"/>
+              </a:spcBef>
+              <a:spcAft>
+                <a:spcPts val="300"/>
+              </a:spcAft>
+              <a:buNone/>
+            </a:pPr>
+            <a:r>
+              <a:rPr lang="en-US" sz="1200" dirty="0">
+                <a:solidFill>
+                  <a:srgbClr val="1C2833"/>
+                </a:solidFill>
+                <a:latin typeface="Arial" pitchFamily="34" charset="0"/>
+                <a:ea typeface="Arial" pitchFamily="34" charset="-122"/>
+                <a:cs typeface="Arial" pitchFamily="34" charset="-120"/>
+              </a:rPr>
+              <a:t> ("fixed") — Śakuni, Catuṣpada, Nāga, Kiṁstughna — and appear once each near </a:t>
+            </a:r>
+            <a:pPr algn="l" indent="0" marL="0">
+              <a:lnSpc>
+                <a:spcPts val="1680"/>
+              </a:lnSpc>
+              <a:spcBef>
+                <a:spcPts val="300"/>
+              </a:spcBef>
+              <a:spcAft>
+                <a:spcPts val="300"/>
+              </a:spcAft>
+              <a:buNone/>
+            </a:pPr>
+            <a:r>
+              <a:rPr lang="en-US" sz="1200" i="1" dirty="0">
+                <a:solidFill>
+                  <a:srgbClr val="1C2833"/>
+                </a:solidFill>
+                <a:latin typeface="Arial" pitchFamily="34" charset="0"/>
+                <a:ea typeface="Arial" pitchFamily="34" charset="-122"/>
+                <a:cs typeface="Arial" pitchFamily="34" charset="-120"/>
+              </a:rPr>
+              <a:t>amāvasyā</a:t>
+            </a:r>
+            <a:pPr algn="l" indent="0" marL="0">
+              <a:lnSpc>
+                <a:spcPts val="1680"/>
+              </a:lnSpc>
+              <a:spcBef>
+                <a:spcPts val="300"/>
+              </a:spcBef>
+              <a:spcAft>
+                <a:spcPts val="300"/>
+              </a:spcAft>
+              <a:buNone/>
+            </a:pPr>
+            <a:r>
+              <a:rPr lang="en-US" sz="1200" dirty="0">
+                <a:solidFill>
+                  <a:srgbClr val="1C2833"/>
+                </a:solidFill>
+                <a:latin typeface="Arial" pitchFamily="34" charset="0"/>
+                <a:ea typeface="Arial" pitchFamily="34" charset="-122"/>
+                <a:cs typeface="Arial" pitchFamily="34" charset="-120"/>
+              </a:rPr>
+              <a:t>. So 8 × 7 + 4 = 60 half-tithis per month.</a:t>
+            </a:r>
+            <a:endParaRPr lang="en-US" sz="1200" dirty="0"/>
+          </a:p>
+        </p:txBody>
+      </p:sp>
+      <p:sp>
+        <p:nvSpPr>
+          <p:cNvPr id="5" name="Text 3"/>
+          <p:cNvSpPr/>
+          <p:nvPr/>
+        </p:nvSpPr>
+        <p:spPr>
+          <a:xfrm>
+            <a:off x="634901" y="1812875"/>
+            <a:ext cx="8102798" cy="281880"/>
+          </a:xfrm>
+          <a:prstGeom prst="rect">
+            <a:avLst/>
+          </a:prstGeom>
+          <a:noFill/>
+          <a:ln/>
+        </p:spPr>
+        <p:txBody>
+          <a:bodyPr wrap="square" lIns="0" tIns="0" rIns="0" bIns="0" rtlCol="0" anchor="t"/>
+          <a:lstStyle/>
+          <a:p>
+            <a:pPr algn="l" marL="342900" indent="-342900">
+              <a:lnSpc>
+                <a:spcPts val="1620"/>
+              </a:lnSpc>
+              <a:spcAft>
+                <a:spcPts val="300"/>
+              </a:spcAft>
+              <a:buSzPct val="100000"/>
+              <a:buChar char="•"/>
+            </a:pPr>
+            <a:r>
+              <a:rPr lang="en-US" sz="1200" b="1" dirty="0">
+                <a:solidFill>
+                  <a:srgbClr val="1C2833"/>
+                </a:solidFill>
+                <a:latin typeface="Arial" pitchFamily="34" charset="0"/>
+                <a:ea typeface="Arial" pitchFamily="34" charset="-122"/>
+                <a:cs typeface="Arial" pitchFamily="34" charset="-120"/>
+              </a:rPr>
+              <a:t>Why five limbs?</a:t>
+            </a:r>
+            <a:pPr algn="l" indent="0" marL="0">
+              <a:lnSpc>
+                <a:spcPts val="1620"/>
+              </a:lnSpc>
+              <a:spcAft>
+                <a:spcPts val="300"/>
+              </a:spcAft>
+              <a:buNone/>
+            </a:pPr>
+            <a:r>
+              <a:rPr lang="en-US" sz="1200" dirty="0">
+                <a:solidFill>
+                  <a:srgbClr val="1C2833"/>
+                </a:solidFill>
+                <a:latin typeface="Arial" pitchFamily="34" charset="0"/>
+                <a:ea typeface="Arial" pitchFamily="34" charset="-122"/>
+                <a:cs typeface="Arial" pitchFamily="34" charset="-120"/>
+              </a:rPr>
+              <a:t> Each limb encodes a different astronomical fact:</a:t>
+            </a:r>
+            <a:endParaRPr lang="en-US" sz="1200" dirty="0"/>
+          </a:p>
+        </p:txBody>
+      </p:sp>
+      <p:sp>
+        <p:nvSpPr>
+          <p:cNvPr id="6" name="Text 4"/>
+          <p:cNvSpPr/>
+          <p:nvPr/>
+        </p:nvSpPr>
+        <p:spPr>
+          <a:xfrm>
+            <a:off x="406301" y="4434929"/>
+            <a:ext cx="8498026" cy="213271"/>
+          </a:xfrm>
+          <a:prstGeom prst="rect">
+            <a:avLst/>
+          </a:prstGeom>
+          <a:noFill/>
+          <a:ln/>
+        </p:spPr>
+        <p:txBody>
+          <a:bodyPr wrap="square" lIns="0" tIns="0" rIns="0" bIns="0" rtlCol="0" anchor="t"/>
+          <a:lstStyle/>
+          <a:p>
+            <a:pPr algn="l" indent="0" marL="0">
+              <a:lnSpc>
+                <a:spcPts val="1680"/>
+              </a:lnSpc>
+              <a:spcBef>
+                <a:spcPts val="300"/>
+              </a:spcBef>
+              <a:spcAft>
+                <a:spcPts val="300"/>
+              </a:spcAft>
+              <a:buNone/>
+            </a:pPr>
+            <a:r>
+              <a:rPr lang="en-US" sz="1200" dirty="0">
+                <a:solidFill>
+                  <a:srgbClr val="1C2833"/>
+                </a:solidFill>
+                <a:latin typeface="Arial" pitchFamily="34" charset="0"/>
+                <a:ea typeface="Arial" pitchFamily="34" charset="-122"/>
+                <a:cs typeface="Arial" pitchFamily="34" charset="-120"/>
+              </a:rPr>
+              <a:t>Middle ·  · IKS Curriculum</a:t>
+            </a:r>
+            <a:endParaRPr lang="en-US" sz="1200" dirty="0"/>
+          </a:p>
+        </p:txBody>
+      </p:sp>
+    </p:spTree>
+  </p:cSld>
+  <p:clrMapOvr>
+    <a:masterClrMapping/>
+  </p:clrMapOvr>
+</p:sld>
+</file>
+
+<file path=ppt/slides/slide13.xml><?xml version="1.0" encoding="utf-8"?>
+<p:sld xmlns:a="http://schemas.openxmlformats.org/drawingml/2006/main" xmlns:r="http://schemas.openxmlformats.org/officeDocument/2006/relationships" xmlns:p="http://schemas.openxmlformats.org/presentationml/2006/main">
+  <p:cSld name="Slide 13">
+    <p:bg>
+      <p:bgPr>
+        <a:solidFill>
+          <a:srgbClr val="FFFFFF"/>
+        </a:solidFill>
+      </p:bgPr>
+    </p:bg>
+    <p:spTree>
+      <p:nvGrpSpPr>
+        <p:cNvPr id="1" name=""/>
+        <p:cNvGrpSpPr/>
+        <p:nvPr/>
+      </p:nvGrpSpPr>
+      <p:grpSpPr>
+        <a:xfrm>
+          <a:off x="0" y="0"/>
+          <a:ext cx="0" cy="0"/>
+          <a:chOff x="0" y="0"/>
+          <a:chExt cx="0" cy="0"/>
+        </a:xfrm>
+      </p:grpSpPr>
+      <p:sp>
+        <p:nvSpPr>
+          <p:cNvPr id="2" name="Text 0"/>
+          <p:cNvSpPr/>
+          <p:nvPr/>
+        </p:nvSpPr>
+        <p:spPr>
+          <a:xfrm>
+            <a:off x="0" y="0"/>
+            <a:ext cx="9144000" cy="101501"/>
+          </a:xfrm>
+          <a:prstGeom prst="rect">
+            <a:avLst/>
+          </a:prstGeom>
+          <a:solidFill>
+            <a:srgbClr val="277884"/>
+          </a:solidFill>
+          <a:ln/>
+        </p:spPr>
+        <p:txBody>
+          <a:bodyPr wrap="square" rtlCol="0" anchor="ctr"/>
+          <a:lstStyle/>
+          <a:p>
+            <a:pPr indent="0" marL="0">
+              <a:buNone/>
+            </a:pPr>
+            <a:endParaRPr lang="en-US" dirty="0"/>
+          </a:p>
+        </p:txBody>
+      </p:sp>
+      <p:sp>
+        <p:nvSpPr>
+          <p:cNvPr id="3" name="Text 1"/>
+          <p:cNvSpPr/>
+          <p:nvPr/>
+        </p:nvSpPr>
+        <p:spPr>
+          <a:xfrm>
+            <a:off x="406301" y="457051"/>
+            <a:ext cx="8498026" cy="274290"/>
+          </a:xfrm>
+          <a:prstGeom prst="rect">
+            <a:avLst/>
+          </a:prstGeom>
+          <a:noFill/>
+          <a:ln/>
+        </p:spPr>
+        <p:txBody>
+          <a:bodyPr wrap="square" lIns="0" tIns="0" rIns="0" bIns="0" rtlCol="0" anchor="t"/>
+          <a:lstStyle/>
+          <a:p>
+            <a:pPr algn="l" indent="0" marL="0">
+              <a:lnSpc>
+                <a:spcPts val="2160"/>
+              </a:lnSpc>
+              <a:spcBef>
+                <a:spcPts val="600"/>
+              </a:spcBef>
+              <a:spcAft>
+                <a:spcPts val="800"/>
+              </a:spcAft>
+              <a:buNone/>
+            </a:pPr>
+            <a:r>
+              <a:rPr lang="en-US" sz="1800" b="1" dirty="0">
+                <a:solidFill>
+                  <a:srgbClr val="FE4447"/>
+                </a:solidFill>
+                <a:latin typeface="Georgia" pitchFamily="34" charset="0"/>
+                <a:ea typeface="Georgia" pitchFamily="34" charset="-122"/>
+                <a:cs typeface="Georgia" pitchFamily="34" charset="-120"/>
+              </a:rPr>
+              <a:t>Core (25 min) (cont.)</a:t>
+            </a:r>
+            <a:endParaRPr lang="en-US" sz="1800" dirty="0"/>
+          </a:p>
+        </p:txBody>
+      </p:sp>
+      <p:sp>
+        <p:nvSpPr>
+          <p:cNvPr id="4" name="Text 2"/>
+          <p:cNvSpPr/>
+          <p:nvPr/>
+        </p:nvSpPr>
+        <p:spPr>
+          <a:xfrm>
+            <a:off x="634901" y="883593"/>
+            <a:ext cx="8102798" cy="1257002"/>
+          </a:xfrm>
+          <a:prstGeom prst="rect">
+            <a:avLst/>
+          </a:prstGeom>
+          <a:noFill/>
+          <a:ln/>
+        </p:spPr>
+        <p:txBody>
+          <a:bodyPr wrap="square" lIns="0" tIns="0" rIns="0" bIns="0" rtlCol="0" anchor="t"/>
+          <a:lstStyle/>
+          <a:p>
+            <a:pPr algn="l" marL="342900" indent="-342900">
+              <a:lnSpc>
+                <a:spcPts val="1620"/>
+              </a:lnSpc>
+              <a:spcAft>
+                <a:spcPts val="300"/>
+              </a:spcAft>
+              <a:buSzPct val="100000"/>
+              <a:buChar char="•"/>
+            </a:pPr>
+            <a:r>
+              <a:rPr lang="en-US" sz="1200" i="1" dirty="0">
+                <a:solidFill>
+                  <a:srgbClr val="1C2833"/>
+                </a:solidFill>
+                <a:latin typeface="Arial" pitchFamily="34" charset="0"/>
+                <a:ea typeface="Arial" pitchFamily="34" charset="-122"/>
+                <a:cs typeface="Arial" pitchFamily="34" charset="-120"/>
+              </a:rPr>
+              <a:t>tithi</a:t>
+            </a:r>
+            <a:pPr algn="l" indent="0" marL="0">
+              <a:lnSpc>
+                <a:spcPts val="1620"/>
+              </a:lnSpc>
+              <a:spcAft>
+                <a:spcPts val="300"/>
+              </a:spcAft>
+              <a:buNone/>
+            </a:pPr>
+            <a:r>
+              <a:rPr lang="en-US" sz="1200" dirty="0">
+                <a:solidFill>
+                  <a:srgbClr val="1C2833"/>
+                </a:solidFill>
+                <a:latin typeface="Arial" pitchFamily="34" charset="0"/>
+                <a:ea typeface="Arial" pitchFamily="34" charset="-122"/>
+                <a:cs typeface="Arial" pitchFamily="34" charset="-120"/>
+              </a:rPr>
+              <a:t>: position of the Moon </a:t>
+            </a:r>
+            <a:pPr algn="l" indent="0" marL="0">
+              <a:lnSpc>
+                <a:spcPts val="1620"/>
+              </a:lnSpc>
+              <a:spcAft>
+                <a:spcPts val="300"/>
+              </a:spcAft>
+              <a:buNone/>
+            </a:pPr>
+            <a:r>
+              <a:rPr lang="en-US" sz="1200" b="1" dirty="0">
+                <a:solidFill>
+                  <a:srgbClr val="1C2833"/>
+                </a:solidFill>
+                <a:latin typeface="Arial" pitchFamily="34" charset="0"/>
+                <a:ea typeface="Arial" pitchFamily="34" charset="-122"/>
+                <a:cs typeface="Arial" pitchFamily="34" charset="-120"/>
+              </a:rPr>
+              <a:t>relative to the Sun</a:t>
+            </a:r>
+            <a:pPr algn="l" indent="0" marL="0">
+              <a:lnSpc>
+                <a:spcPts val="1620"/>
+              </a:lnSpc>
+              <a:spcAft>
+                <a:spcPts val="300"/>
+              </a:spcAft>
+              <a:buNone/>
+            </a:pPr>
+            <a:r>
+              <a:rPr lang="en-US" sz="1200" dirty="0">
+                <a:solidFill>
+                  <a:srgbClr val="1C2833"/>
+                </a:solidFill>
+                <a:latin typeface="Arial" pitchFamily="34" charset="0"/>
+                <a:ea typeface="Arial" pitchFamily="34" charset="-122"/>
+                <a:cs typeface="Arial" pitchFamily="34" charset="-120"/>
+              </a:rPr>
+              <a:t>.</a:t>
+            </a:r>
+            <a:endParaRPr lang="en-US" sz="1200" dirty="0"/>
+          </a:p>
+          <a:p>
+            <a:pPr algn="l" marL="342900" indent="-342900">
+              <a:lnSpc>
+                <a:spcPts val="1620"/>
+              </a:lnSpc>
+              <a:spcAft>
+                <a:spcPts val="300"/>
+              </a:spcAft>
+              <a:buSzPct val="100000"/>
+              <a:buChar char="•"/>
+            </a:pPr>
+            <a:r>
+              <a:rPr lang="en-US" sz="1200" i="1" dirty="0">
+                <a:solidFill>
+                  <a:srgbClr val="1C2833"/>
+                </a:solidFill>
+                <a:latin typeface="Arial" pitchFamily="34" charset="0"/>
+                <a:ea typeface="Arial" pitchFamily="34" charset="-122"/>
+                <a:cs typeface="Arial" pitchFamily="34" charset="-120"/>
+              </a:rPr>
+              <a:t>nakṣatra</a:t>
+            </a:r>
+            <a:pPr algn="l" indent="0" marL="0">
+              <a:lnSpc>
+                <a:spcPts val="1620"/>
+              </a:lnSpc>
+              <a:spcAft>
+                <a:spcPts val="300"/>
+              </a:spcAft>
+              <a:buNone/>
+            </a:pPr>
+            <a:r>
+              <a:rPr lang="en-US" sz="1200" dirty="0">
+                <a:solidFill>
+                  <a:srgbClr val="1C2833"/>
+                </a:solidFill>
+                <a:latin typeface="Arial" pitchFamily="34" charset="0"/>
+                <a:ea typeface="Arial" pitchFamily="34" charset="-122"/>
+                <a:cs typeface="Arial" pitchFamily="34" charset="-120"/>
+              </a:rPr>
+              <a:t>: position of the Moon </a:t>
+            </a:r>
+            <a:pPr algn="l" indent="0" marL="0">
+              <a:lnSpc>
+                <a:spcPts val="1620"/>
+              </a:lnSpc>
+              <a:spcAft>
+                <a:spcPts val="300"/>
+              </a:spcAft>
+              <a:buNone/>
+            </a:pPr>
+            <a:r>
+              <a:rPr lang="en-US" sz="1200" b="1" dirty="0">
+                <a:solidFill>
+                  <a:srgbClr val="1C2833"/>
+                </a:solidFill>
+                <a:latin typeface="Arial" pitchFamily="34" charset="0"/>
+                <a:ea typeface="Arial" pitchFamily="34" charset="-122"/>
+                <a:cs typeface="Arial" pitchFamily="34" charset="-120"/>
+              </a:rPr>
+              <a:t>against the stars</a:t>
+            </a:r>
+            <a:pPr algn="l" indent="0" marL="0">
+              <a:lnSpc>
+                <a:spcPts val="1620"/>
+              </a:lnSpc>
+              <a:spcAft>
+                <a:spcPts val="300"/>
+              </a:spcAft>
+              <a:buNone/>
+            </a:pPr>
+            <a:r>
+              <a:rPr lang="en-US" sz="1200" dirty="0">
+                <a:solidFill>
+                  <a:srgbClr val="1C2833"/>
+                </a:solidFill>
+                <a:latin typeface="Arial" pitchFamily="34" charset="0"/>
+                <a:ea typeface="Arial" pitchFamily="34" charset="-122"/>
+                <a:cs typeface="Arial" pitchFamily="34" charset="-120"/>
+              </a:rPr>
+              <a:t>.</a:t>
+            </a:r>
+            <a:endParaRPr lang="en-US" sz="1200" dirty="0"/>
+          </a:p>
+          <a:p>
+            <a:pPr algn="l" marL="342900" indent="-342900">
+              <a:lnSpc>
+                <a:spcPts val="1620"/>
+              </a:lnSpc>
+              <a:spcAft>
+                <a:spcPts val="300"/>
+              </a:spcAft>
+              <a:buSzPct val="100000"/>
+              <a:buChar char="•"/>
+            </a:pPr>
+            <a:r>
+              <a:rPr lang="en-US" sz="1200" i="1" dirty="0">
+                <a:solidFill>
+                  <a:srgbClr val="1C2833"/>
+                </a:solidFill>
+                <a:latin typeface="Arial" pitchFamily="34" charset="0"/>
+                <a:ea typeface="Arial" pitchFamily="34" charset="-122"/>
+                <a:cs typeface="Arial" pitchFamily="34" charset="-120"/>
+              </a:rPr>
+              <a:t>yoga</a:t>
+            </a:r>
+            <a:pPr algn="l" indent="0" marL="0">
+              <a:lnSpc>
+                <a:spcPts val="1620"/>
+              </a:lnSpc>
+              <a:spcAft>
+                <a:spcPts val="300"/>
+              </a:spcAft>
+              <a:buNone/>
+            </a:pPr>
+            <a:r>
+              <a:rPr lang="en-US" sz="1200" dirty="0">
+                <a:solidFill>
+                  <a:srgbClr val="1C2833"/>
+                </a:solidFill>
+                <a:latin typeface="Arial" pitchFamily="34" charset="0"/>
+                <a:ea typeface="Arial" pitchFamily="34" charset="-122"/>
+                <a:cs typeface="Arial" pitchFamily="34" charset="-120"/>
+              </a:rPr>
+              <a:t>: combined Sun + Moon position.</a:t>
+            </a:r>
+            <a:endParaRPr lang="en-US" sz="1200" dirty="0"/>
+          </a:p>
+          <a:p>
+            <a:pPr algn="l" marL="342900" indent="-342900">
+              <a:lnSpc>
+                <a:spcPts val="1620"/>
+              </a:lnSpc>
+              <a:spcAft>
+                <a:spcPts val="300"/>
+              </a:spcAft>
+              <a:buSzPct val="100000"/>
+              <a:buChar char="•"/>
+            </a:pPr>
+            <a:r>
+              <a:rPr lang="en-US" sz="1200" i="1" dirty="0">
+                <a:solidFill>
+                  <a:srgbClr val="1C2833"/>
+                </a:solidFill>
+                <a:latin typeface="Arial" pitchFamily="34" charset="0"/>
+                <a:ea typeface="Arial" pitchFamily="34" charset="-122"/>
+                <a:cs typeface="Arial" pitchFamily="34" charset="-120"/>
+              </a:rPr>
+              <a:t>vāra</a:t>
+            </a:r>
+            <a:pPr algn="l" indent="0" marL="0">
+              <a:lnSpc>
+                <a:spcPts val="1620"/>
+              </a:lnSpc>
+              <a:spcAft>
+                <a:spcPts val="300"/>
+              </a:spcAft>
+              <a:buNone/>
+            </a:pPr>
+            <a:r>
+              <a:rPr lang="en-US" sz="1200" dirty="0">
+                <a:solidFill>
+                  <a:srgbClr val="1C2833"/>
+                </a:solidFill>
+                <a:latin typeface="Arial" pitchFamily="34" charset="0"/>
+                <a:ea typeface="Arial" pitchFamily="34" charset="-122"/>
+                <a:cs typeface="Arial" pitchFamily="34" charset="-120"/>
+              </a:rPr>
+              <a:t>: solar day count.</a:t>
+            </a:r>
+            <a:endParaRPr lang="en-US" sz="1200" dirty="0"/>
+          </a:p>
+          <a:p>
+            <a:pPr algn="l" marL="342900" indent="-342900">
+              <a:lnSpc>
+                <a:spcPts val="1620"/>
+              </a:lnSpc>
+              <a:spcAft>
+                <a:spcPts val="300"/>
+              </a:spcAft>
+              <a:buSzPct val="100000"/>
+              <a:buChar char="•"/>
+            </a:pPr>
+            <a:r>
+              <a:rPr lang="en-US" sz="1200" i="1" dirty="0">
+                <a:solidFill>
+                  <a:srgbClr val="1C2833"/>
+                </a:solidFill>
+                <a:latin typeface="Arial" pitchFamily="34" charset="0"/>
+                <a:ea typeface="Arial" pitchFamily="34" charset="-122"/>
+                <a:cs typeface="Arial" pitchFamily="34" charset="-120"/>
+              </a:rPr>
+              <a:t>karaṇa</a:t>
+            </a:r>
+            <a:pPr algn="l" indent="0" marL="0">
+              <a:lnSpc>
+                <a:spcPts val="1620"/>
+              </a:lnSpc>
+              <a:spcAft>
+                <a:spcPts val="300"/>
+              </a:spcAft>
+              <a:buNone/>
+            </a:pPr>
+            <a:r>
+              <a:rPr lang="en-US" sz="1200" dirty="0">
+                <a:solidFill>
+                  <a:srgbClr val="1C2833"/>
+                </a:solidFill>
+                <a:latin typeface="Arial" pitchFamily="34" charset="0"/>
+                <a:ea typeface="Arial" pitchFamily="34" charset="-122"/>
+                <a:cs typeface="Arial" pitchFamily="34" charset="-120"/>
+              </a:rPr>
+              <a:t>: a finer division for sub-day timing.</a:t>
+            </a:r>
+            <a:endParaRPr lang="en-US" sz="1200" dirty="0"/>
+          </a:p>
+        </p:txBody>
+      </p:sp>
+      <p:sp>
+        <p:nvSpPr>
+          <p:cNvPr id="5" name="Text 3"/>
+          <p:cNvSpPr/>
+          <p:nvPr/>
+        </p:nvSpPr>
+        <p:spPr>
+          <a:xfrm>
+            <a:off x="406301" y="2229445"/>
+            <a:ext cx="8498026" cy="426541"/>
+          </a:xfrm>
+          <a:prstGeom prst="rect">
+            <a:avLst/>
+          </a:prstGeom>
+          <a:noFill/>
+          <a:ln/>
+        </p:spPr>
+        <p:txBody>
+          <a:bodyPr wrap="square" lIns="0" tIns="0" rIns="0" bIns="0" rtlCol="0" anchor="t"/>
+          <a:lstStyle/>
+          <a:p>
+            <a:pPr algn="l" indent="0" marL="0">
+              <a:lnSpc>
+                <a:spcPts val="1680"/>
+              </a:lnSpc>
+              <a:spcBef>
+                <a:spcPts val="300"/>
+              </a:spcBef>
+              <a:spcAft>
+                <a:spcPts val="300"/>
+              </a:spcAft>
+              <a:buNone/>
+            </a:pPr>
+            <a:r>
+              <a:rPr lang="en-US" sz="1200" dirty="0">
+                <a:solidFill>
+                  <a:srgbClr val="1C2833"/>
+                </a:solidFill>
+                <a:latin typeface="Arial" pitchFamily="34" charset="0"/>
+                <a:ea typeface="Arial" pitchFamily="34" charset="-122"/>
+                <a:cs typeface="Arial" pitchFamily="34" charset="-120"/>
+              </a:rPr>
+              <a:t>Together they pinpoint the astronomical situation on any given day. The </a:t>
+            </a:r>
+            <a:pPr algn="l" indent="0" marL="0">
+              <a:lnSpc>
+                <a:spcPts val="1680"/>
+              </a:lnSpc>
+              <a:spcBef>
+                <a:spcPts val="300"/>
+              </a:spcBef>
+              <a:spcAft>
+                <a:spcPts val="300"/>
+              </a:spcAft>
+              <a:buNone/>
+            </a:pPr>
+            <a:r>
+              <a:rPr lang="en-US" sz="1200" i="1" dirty="0">
+                <a:solidFill>
+                  <a:srgbClr val="1C2833"/>
+                </a:solidFill>
+                <a:latin typeface="Arial" pitchFamily="34" charset="0"/>
+                <a:ea typeface="Arial" pitchFamily="34" charset="-122"/>
+                <a:cs typeface="Arial" pitchFamily="34" charset="-120"/>
+              </a:rPr>
+              <a:t>pañcāṅga</a:t>
+            </a:r>
+            <a:pPr algn="l" indent="0" marL="0">
+              <a:lnSpc>
+                <a:spcPts val="1680"/>
+              </a:lnSpc>
+              <a:spcBef>
+                <a:spcPts val="300"/>
+              </a:spcBef>
+              <a:spcAft>
+                <a:spcPts val="300"/>
+              </a:spcAft>
+              <a:buNone/>
+            </a:pPr>
+            <a:r>
+              <a:rPr lang="en-US" sz="1200" dirty="0">
+                <a:solidFill>
+                  <a:srgbClr val="1C2833"/>
+                </a:solidFill>
+                <a:latin typeface="Arial" pitchFamily="34" charset="0"/>
+                <a:ea typeface="Arial" pitchFamily="34" charset="-122"/>
+                <a:cs typeface="Arial" pitchFamily="34" charset="-120"/>
+              </a:rPr>
+              <a:t> is, in effect, a compact astronomical state vector.</a:t>
+            </a:r>
+            <a:endParaRPr lang="en-US" sz="1200" dirty="0"/>
+          </a:p>
+        </p:txBody>
+      </p:sp>
+      <p:sp>
+        <p:nvSpPr>
+          <p:cNvPr id="6" name="Text 4"/>
+          <p:cNvSpPr/>
+          <p:nvPr/>
+        </p:nvSpPr>
+        <p:spPr>
+          <a:xfrm>
+            <a:off x="406301" y="4434929"/>
+            <a:ext cx="8498026" cy="213271"/>
+          </a:xfrm>
+          <a:prstGeom prst="rect">
+            <a:avLst/>
+          </a:prstGeom>
+          <a:noFill/>
+          <a:ln/>
+        </p:spPr>
+        <p:txBody>
+          <a:bodyPr wrap="square" lIns="0" tIns="0" rIns="0" bIns="0" rtlCol="0" anchor="t"/>
+          <a:lstStyle/>
+          <a:p>
+            <a:pPr algn="l" indent="0" marL="0">
+              <a:lnSpc>
+                <a:spcPts val="1680"/>
+              </a:lnSpc>
+              <a:spcBef>
+                <a:spcPts val="300"/>
+              </a:spcBef>
+              <a:spcAft>
+                <a:spcPts val="300"/>
+              </a:spcAft>
+              <a:buNone/>
+            </a:pPr>
+            <a:r>
+              <a:rPr lang="en-US" sz="1200" dirty="0">
+                <a:solidFill>
+                  <a:srgbClr val="1C2833"/>
+                </a:solidFill>
+                <a:latin typeface="Arial" pitchFamily="34" charset="0"/>
+                <a:ea typeface="Arial" pitchFamily="34" charset="-122"/>
+                <a:cs typeface="Arial" pitchFamily="34" charset="-120"/>
+              </a:rPr>
+              <a:t>Middle ·  · IKS Curriculum</a:t>
+            </a:r>
+            <a:endParaRPr lang="en-US" sz="1200" dirty="0"/>
+          </a:p>
+        </p:txBody>
+      </p:sp>
+    </p:spTree>
+  </p:cSld>
+  <p:clrMapOvr>
+    <a:masterClrMapping/>
+  </p:clrMapOvr>
+</p:sld>
+</file>
+
+<file path=ppt/slides/slide14.xml><?xml version="1.0" encoding="utf-8"?>
+<p:sld xmlns:a="http://schemas.openxmlformats.org/drawingml/2006/main" xmlns:r="http://schemas.openxmlformats.org/officeDocument/2006/relationships" xmlns:p="http://schemas.openxmlformats.org/presentationml/2006/main">
+  <p:cSld name="Slide 14">
+    <p:bg>
+      <p:bgPr>
+        <a:solidFill>
+          <a:srgbClr val="FFFFFF"/>
+        </a:solidFill>
+      </p:bgPr>
+    </p:bg>
+    <p:spTree>
+      <p:nvGrpSpPr>
+        <p:cNvPr id="1" name=""/>
+        <p:cNvGrpSpPr/>
+        <p:nvPr/>
+      </p:nvGrpSpPr>
+      <p:grpSpPr>
+        <a:xfrm>
+          <a:off x="0" y="0"/>
+          <a:ext cx="0" cy="0"/>
+          <a:chOff x="0" y="0"/>
+          <a:chExt cx="0" cy="0"/>
+        </a:xfrm>
+      </p:grpSpPr>
+      <p:sp>
+        <p:nvSpPr>
+          <p:cNvPr id="2" name="Text 0"/>
+          <p:cNvSpPr/>
+          <p:nvPr/>
+        </p:nvSpPr>
+        <p:spPr>
+          <a:xfrm>
+            <a:off x="0" y="0"/>
+            <a:ext cx="9144000" cy="101501"/>
+          </a:xfrm>
+          <a:prstGeom prst="rect">
+            <a:avLst/>
+          </a:prstGeom>
+          <a:solidFill>
+            <a:srgbClr val="277884"/>
+          </a:solidFill>
+          <a:ln/>
+        </p:spPr>
+        <p:txBody>
+          <a:bodyPr wrap="square" rtlCol="0" anchor="ctr"/>
+          <a:lstStyle/>
+          <a:p>
+            <a:pPr indent="0" marL="0">
+              <a:buNone/>
+            </a:pPr>
+            <a:endParaRPr lang="en-US" dirty="0"/>
+          </a:p>
+        </p:txBody>
+      </p:sp>
+      <p:sp>
+        <p:nvSpPr>
+          <p:cNvPr id="3" name="Text 1"/>
+          <p:cNvSpPr/>
+          <p:nvPr/>
+        </p:nvSpPr>
+        <p:spPr>
+          <a:xfrm>
+            <a:off x="406301" y="457051"/>
+            <a:ext cx="8498026" cy="274290"/>
+          </a:xfrm>
+          <a:prstGeom prst="rect">
+            <a:avLst/>
+          </a:prstGeom>
+          <a:noFill/>
+          <a:ln/>
+        </p:spPr>
+        <p:txBody>
+          <a:bodyPr wrap="square" lIns="0" tIns="0" rIns="0" bIns="0" rtlCol="0" anchor="t"/>
+          <a:lstStyle/>
+          <a:p>
+            <a:pPr algn="l" indent="0" marL="0">
+              <a:lnSpc>
+                <a:spcPts val="2160"/>
+              </a:lnSpc>
+              <a:spcBef>
+                <a:spcPts val="600"/>
+              </a:spcBef>
+              <a:spcAft>
+                <a:spcPts val="800"/>
+              </a:spcAft>
+              <a:buNone/>
+            </a:pPr>
+            <a:r>
+              <a:rPr lang="en-US" sz="1800" b="1" dirty="0">
+                <a:solidFill>
+                  <a:srgbClr val="FE4447"/>
+                </a:solidFill>
+                <a:latin typeface="Georgia" pitchFamily="34" charset="0"/>
+                <a:ea typeface="Georgia" pitchFamily="34" charset="-122"/>
+                <a:cs typeface="Georgia" pitchFamily="34" charset="-120"/>
+              </a:rPr>
+              <a:t>Core (25 min) (cont.)</a:t>
+            </a:r>
+            <a:endParaRPr lang="en-US" sz="1800" dirty="0"/>
+          </a:p>
+        </p:txBody>
+      </p:sp>
+      <p:sp>
+        <p:nvSpPr>
+          <p:cNvPr id="4" name="Text 2"/>
+          <p:cNvSpPr/>
+          <p:nvPr/>
+        </p:nvSpPr>
+        <p:spPr>
+          <a:xfrm>
+            <a:off x="634901" y="883593"/>
+            <a:ext cx="8102798" cy="898922"/>
+          </a:xfrm>
+          <a:prstGeom prst="rect">
+            <a:avLst/>
+          </a:prstGeom>
+          <a:noFill/>
+          <a:ln/>
+        </p:spPr>
+        <p:txBody>
+          <a:bodyPr wrap="square" lIns="0" tIns="0" rIns="0" bIns="0" rtlCol="0" anchor="t"/>
+          <a:lstStyle/>
+          <a:p>
+            <a:pPr algn="l" marL="342900" indent="-342900">
+              <a:lnSpc>
+                <a:spcPts val="1620"/>
+              </a:lnSpc>
+              <a:spcAft>
+                <a:spcPts val="300"/>
+              </a:spcAft>
+              <a:buSzPct val="100000"/>
+              <a:buChar char="•"/>
+            </a:pPr>
+            <a:r>
+              <a:rPr lang="en-US" sz="1200" b="1" dirty="0">
+                <a:solidFill>
+                  <a:srgbClr val="1C2833"/>
+                </a:solidFill>
+                <a:latin typeface="Arial" pitchFamily="34" charset="0"/>
+                <a:ea typeface="Arial" pitchFamily="34" charset="-122"/>
+                <a:cs typeface="Arial" pitchFamily="34" charset="-120"/>
+              </a:rPr>
+              <a:t>Modern parallel.</a:t>
+            </a:r>
+            <a:pPr algn="l" indent="0" marL="0">
+              <a:lnSpc>
+                <a:spcPts val="1620"/>
+              </a:lnSpc>
+              <a:spcAft>
+                <a:spcPts val="300"/>
+              </a:spcAft>
+              <a:buNone/>
+            </a:pPr>
+            <a:r>
+              <a:rPr lang="en-US" sz="1200" dirty="0">
+                <a:solidFill>
+                  <a:srgbClr val="1C2833"/>
+                </a:solidFill>
+                <a:latin typeface="Arial" pitchFamily="34" charset="0"/>
+                <a:ea typeface="Arial" pitchFamily="34" charset="-122"/>
+                <a:cs typeface="Arial" pitchFamily="34" charset="-120"/>
+              </a:rPr>
+              <a:t> A modern astronomy almanac (e.g. an ephemeris like NASA's Horizons system) lists planet positions, lunar phase, day of week, eclipse data, etc. The </a:t>
+            </a:r>
+            <a:pPr algn="l" indent="0" marL="0">
+              <a:lnSpc>
+                <a:spcPts val="1620"/>
+              </a:lnSpc>
+              <a:spcAft>
+                <a:spcPts val="300"/>
+              </a:spcAft>
+              <a:buNone/>
+            </a:pPr>
+            <a:r>
+              <a:rPr lang="en-US" sz="1200" i="1" dirty="0">
+                <a:solidFill>
+                  <a:srgbClr val="1C2833"/>
+                </a:solidFill>
+                <a:latin typeface="Arial" pitchFamily="34" charset="0"/>
+                <a:ea typeface="Arial" pitchFamily="34" charset="-122"/>
+                <a:cs typeface="Arial" pitchFamily="34" charset="-120"/>
+              </a:rPr>
+              <a:t>pañcāṅga</a:t>
+            </a:r>
+            <a:pPr algn="l" indent="0" marL="0">
+              <a:lnSpc>
+                <a:spcPts val="1620"/>
+              </a:lnSpc>
+              <a:spcAft>
+                <a:spcPts val="300"/>
+              </a:spcAft>
+              <a:buNone/>
+            </a:pPr>
+            <a:r>
+              <a:rPr lang="en-US" sz="1200" dirty="0">
+                <a:solidFill>
+                  <a:srgbClr val="1C2833"/>
+                </a:solidFill>
+                <a:latin typeface="Arial" pitchFamily="34" charset="0"/>
+                <a:ea typeface="Arial" pitchFamily="34" charset="-122"/>
+                <a:cs typeface="Arial" pitchFamily="34" charset="-120"/>
+              </a:rPr>
+              <a:t> is exactly this kind of document — older format, same purpose. The major difference: the </a:t>
+            </a:r>
+            <a:pPr algn="l" indent="0" marL="0">
+              <a:lnSpc>
+                <a:spcPts val="1620"/>
+              </a:lnSpc>
+              <a:spcAft>
+                <a:spcPts val="300"/>
+              </a:spcAft>
+              <a:buNone/>
+            </a:pPr>
+            <a:r>
+              <a:rPr lang="en-US" sz="1200" i="1" dirty="0">
+                <a:solidFill>
+                  <a:srgbClr val="1C2833"/>
+                </a:solidFill>
+                <a:latin typeface="Arial" pitchFamily="34" charset="0"/>
+                <a:ea typeface="Arial" pitchFamily="34" charset="-122"/>
+                <a:cs typeface="Arial" pitchFamily="34" charset="-120"/>
+              </a:rPr>
+              <a:t>pañcāṅga</a:t>
+            </a:r>
+            <a:pPr algn="l" indent="0" marL="0">
+              <a:lnSpc>
+                <a:spcPts val="1620"/>
+              </a:lnSpc>
+              <a:spcAft>
+                <a:spcPts val="300"/>
+              </a:spcAft>
+              <a:buNone/>
+            </a:pPr>
+            <a:r>
+              <a:rPr lang="en-US" sz="1200" dirty="0">
+                <a:solidFill>
+                  <a:srgbClr val="1C2833"/>
+                </a:solidFill>
+                <a:latin typeface="Arial" pitchFamily="34" charset="0"/>
+                <a:ea typeface="Arial" pitchFamily="34" charset="-122"/>
+                <a:cs typeface="Arial" pitchFamily="34" charset="-120"/>
+              </a:rPr>
+              <a:t> also carries cultural / ritual tags (auspicious times, fast days), which a modern ephemeris does not.</a:t>
+            </a:r>
+            <a:endParaRPr lang="en-US" sz="1200" dirty="0"/>
+          </a:p>
+        </p:txBody>
+      </p:sp>
+      <p:sp>
+        <p:nvSpPr>
+          <p:cNvPr id="5" name="Text 3"/>
+          <p:cNvSpPr/>
+          <p:nvPr/>
+        </p:nvSpPr>
+        <p:spPr>
+          <a:xfrm>
+            <a:off x="406301" y="4434929"/>
+            <a:ext cx="8498026" cy="213271"/>
+          </a:xfrm>
+          <a:prstGeom prst="rect">
+            <a:avLst/>
+          </a:prstGeom>
+          <a:noFill/>
+          <a:ln/>
+        </p:spPr>
+        <p:txBody>
+          <a:bodyPr wrap="square" lIns="0" tIns="0" rIns="0" bIns="0" rtlCol="0" anchor="t"/>
+          <a:lstStyle/>
+          <a:p>
+            <a:pPr algn="l" indent="0" marL="0">
+              <a:lnSpc>
+                <a:spcPts val="1680"/>
+              </a:lnSpc>
+              <a:spcBef>
+                <a:spcPts val="300"/>
+              </a:spcBef>
+              <a:spcAft>
+                <a:spcPts val="300"/>
+              </a:spcAft>
+              <a:buNone/>
+            </a:pPr>
+            <a:r>
+              <a:rPr lang="en-US" sz="1200" dirty="0">
+                <a:solidFill>
+                  <a:srgbClr val="1C2833"/>
+                </a:solidFill>
+                <a:latin typeface="Arial" pitchFamily="34" charset="0"/>
+                <a:ea typeface="Arial" pitchFamily="34" charset="-122"/>
+                <a:cs typeface="Arial" pitchFamily="34" charset="-120"/>
+              </a:rPr>
+              <a:t>Middle ·  · IKS Curriculum</a:t>
+            </a:r>
+            <a:endParaRPr lang="en-US" sz="1200" dirty="0"/>
+          </a:p>
+        </p:txBody>
+      </p:sp>
+    </p:spTree>
+  </p:cSld>
+  <p:clrMapOvr>
+    <a:masterClrMapping/>
+  </p:clrMapOvr>
+</p:sld>
+</file>
+
+<file path=ppt/slides/slide15.xml><?xml version="1.0" encoding="utf-8"?>
+<p:sld xmlns:a="http://schemas.openxmlformats.org/drawingml/2006/main" xmlns:r="http://schemas.openxmlformats.org/officeDocument/2006/relationships" xmlns:p="http://schemas.openxmlformats.org/presentationml/2006/main">
+  <p:cSld name="Slide 15">
+    <p:bg>
+      <p:bgPr>
+        <a:solidFill>
+          <a:srgbClr val="FFFFFF"/>
+        </a:solidFill>
+      </p:bgPr>
+    </p:bg>
+    <p:spTree>
+      <p:nvGrpSpPr>
+        <p:cNvPr id="1" name=""/>
+        <p:cNvGrpSpPr/>
+        <p:nvPr/>
+      </p:nvGrpSpPr>
+      <p:grpSpPr>
+        <a:xfrm>
+          <a:off x="0" y="0"/>
+          <a:ext cx="0" cy="0"/>
+          <a:chOff x="0" y="0"/>
+          <a:chExt cx="0" cy="0"/>
+        </a:xfrm>
+      </p:grpSpPr>
+      <p:sp>
+        <p:nvSpPr>
+          <p:cNvPr id="2" name="Text 0"/>
+          <p:cNvSpPr/>
+          <p:nvPr/>
+        </p:nvSpPr>
+        <p:spPr>
+          <a:xfrm>
+            <a:off x="0" y="0"/>
+            <a:ext cx="9144000" cy="101501"/>
+          </a:xfrm>
+          <a:prstGeom prst="rect">
+            <a:avLst/>
+          </a:prstGeom>
+          <a:solidFill>
+            <a:srgbClr val="277884"/>
+          </a:solidFill>
+          <a:ln/>
+        </p:spPr>
+        <p:txBody>
+          <a:bodyPr wrap="square" rtlCol="0" anchor="ctr"/>
+          <a:lstStyle/>
+          <a:p>
+            <a:pPr indent="0" marL="0">
+              <a:buNone/>
+            </a:pPr>
+            <a:endParaRPr lang="en-US" dirty="0"/>
+          </a:p>
+        </p:txBody>
+      </p:sp>
+      <p:sp>
+        <p:nvSpPr>
+          <p:cNvPr id="3" name="Text 1"/>
+          <p:cNvSpPr/>
+          <p:nvPr/>
+        </p:nvSpPr>
+        <p:spPr>
+          <a:xfrm>
+            <a:off x="406301" y="457051"/>
+            <a:ext cx="8498026" cy="274290"/>
+          </a:xfrm>
+          <a:prstGeom prst="rect">
+            <a:avLst/>
+          </a:prstGeom>
+          <a:noFill/>
+          <a:ln/>
+        </p:spPr>
+        <p:txBody>
+          <a:bodyPr wrap="square" lIns="0" tIns="0" rIns="0" bIns="0" rtlCol="0" anchor="t"/>
+          <a:lstStyle/>
+          <a:p>
+            <a:pPr algn="l" indent="0" marL="0">
+              <a:lnSpc>
+                <a:spcPts val="2160"/>
+              </a:lnSpc>
+              <a:spcBef>
+                <a:spcPts val="600"/>
+              </a:spcBef>
+              <a:spcAft>
+                <a:spcPts val="800"/>
+              </a:spcAft>
+              <a:buNone/>
+            </a:pPr>
+            <a:r>
+              <a:rPr lang="en-US" sz="1800" b="1" dirty="0">
+                <a:solidFill>
+                  <a:srgbClr val="FE4447"/>
+                </a:solidFill>
+                <a:latin typeface="Georgia" pitchFamily="34" charset="0"/>
+                <a:ea typeface="Georgia" pitchFamily="34" charset="-122"/>
+                <a:cs typeface="Georgia" pitchFamily="34" charset="-120"/>
+              </a:rPr>
+              <a:t>Activity (10 min) — Read the pañcāṅga</a:t>
+            </a:r>
+            <a:endParaRPr lang="en-US" sz="1800" dirty="0"/>
+          </a:p>
+        </p:txBody>
+      </p:sp>
+      <p:sp>
+        <p:nvSpPr>
+          <p:cNvPr id="4" name="Text 2"/>
+          <p:cNvSpPr/>
+          <p:nvPr/>
+        </p:nvSpPr>
+        <p:spPr>
+          <a:xfrm>
+            <a:off x="406301" y="870942"/>
+            <a:ext cx="8498026" cy="213271"/>
+          </a:xfrm>
+          <a:prstGeom prst="rect">
+            <a:avLst/>
+          </a:prstGeom>
+          <a:noFill/>
+          <a:ln/>
+        </p:spPr>
+        <p:txBody>
+          <a:bodyPr wrap="square" lIns="0" tIns="0" rIns="0" bIns="0" rtlCol="0" anchor="t"/>
+          <a:lstStyle/>
+          <a:p>
+            <a:pPr algn="l" indent="0" marL="0">
+              <a:lnSpc>
+                <a:spcPts val="1680"/>
+              </a:lnSpc>
+              <a:spcBef>
+                <a:spcPts val="300"/>
+              </a:spcBef>
+              <a:spcAft>
+                <a:spcPts val="300"/>
+              </a:spcAft>
+              <a:buNone/>
+            </a:pPr>
+            <a:r>
+              <a:rPr lang="en-US" sz="1200" dirty="0">
+                <a:solidFill>
+                  <a:srgbClr val="1C2833"/>
+                </a:solidFill>
+                <a:latin typeface="Arial" pitchFamily="34" charset="0"/>
+                <a:ea typeface="Arial" pitchFamily="34" charset="-122"/>
+                <a:cs typeface="Arial" pitchFamily="34" charset="-120"/>
+              </a:rPr>
+              <a:t>In pairs, students take yesterday's </a:t>
+            </a:r>
+            <a:pPr algn="l" indent="0" marL="0">
+              <a:lnSpc>
+                <a:spcPts val="1680"/>
+              </a:lnSpc>
+              <a:spcBef>
+                <a:spcPts val="300"/>
+              </a:spcBef>
+              <a:spcAft>
+                <a:spcPts val="300"/>
+              </a:spcAft>
+              <a:buNone/>
+            </a:pPr>
+            <a:r>
+              <a:rPr lang="en-US" sz="1200" i="1" dirty="0">
+                <a:solidFill>
+                  <a:srgbClr val="1C2833"/>
+                </a:solidFill>
+                <a:latin typeface="Arial" pitchFamily="34" charset="0"/>
+                <a:ea typeface="Arial" pitchFamily="34" charset="-122"/>
+                <a:cs typeface="Arial" pitchFamily="34" charset="-120"/>
+              </a:rPr>
+              <a:t>pañcāṅga</a:t>
+            </a:r>
+            <a:pPr algn="l" indent="0" marL="0">
+              <a:lnSpc>
+                <a:spcPts val="1680"/>
+              </a:lnSpc>
+              <a:spcBef>
+                <a:spcPts val="300"/>
+              </a:spcBef>
+              <a:spcAft>
+                <a:spcPts val="300"/>
+              </a:spcAft>
+              <a:buNone/>
+            </a:pPr>
+            <a:r>
+              <a:rPr lang="en-US" sz="1200" dirty="0">
+                <a:solidFill>
+                  <a:srgbClr val="1C2833"/>
+                </a:solidFill>
+                <a:latin typeface="Arial" pitchFamily="34" charset="0"/>
+                <a:ea typeface="Arial" pitchFamily="34" charset="-122"/>
+                <a:cs typeface="Arial" pitchFamily="34" charset="-120"/>
+              </a:rPr>
+              <a:t> page and find:</a:t>
+            </a:r>
+            <a:endParaRPr lang="en-US" sz="1200" dirty="0"/>
+          </a:p>
+        </p:txBody>
+      </p:sp>
+      <p:sp>
+        <p:nvSpPr>
+          <p:cNvPr id="5" name="Text 3"/>
+          <p:cNvSpPr/>
+          <p:nvPr/>
+        </p:nvSpPr>
+        <p:spPr>
+          <a:xfrm>
+            <a:off x="634901" y="1173063"/>
+            <a:ext cx="8102798" cy="1257002"/>
+          </a:xfrm>
+          <a:prstGeom prst="rect">
+            <a:avLst/>
+          </a:prstGeom>
+          <a:noFill/>
+          <a:ln/>
+        </p:spPr>
+        <p:txBody>
+          <a:bodyPr wrap="square" lIns="0" tIns="0" rIns="0" bIns="0" rtlCol="0" anchor="t"/>
+          <a:lstStyle/>
+          <a:p>
+            <a:pPr algn="l" marL="342900" indent="-342900">
+              <a:lnSpc>
+                <a:spcPts val="1620"/>
+              </a:lnSpc>
+              <a:spcAft>
+                <a:spcPts val="300"/>
+              </a:spcAft>
+              <a:buSzPct val="100000"/>
+              <a:buChar char="•"/>
+            </a:pPr>
+            <a:r>
+              <a:rPr lang="en-US" sz="1200" dirty="0">
+                <a:solidFill>
+                  <a:srgbClr val="1C2833"/>
+                </a:solidFill>
+                <a:latin typeface="Arial" pitchFamily="34" charset="0"/>
+                <a:ea typeface="Arial" pitchFamily="34" charset="-122"/>
+                <a:cs typeface="Arial" pitchFamily="34" charset="-120"/>
+              </a:rPr>
+              <a:t>Today's date row.</a:t>
+            </a:r>
+            <a:endParaRPr lang="en-US" sz="1200" dirty="0"/>
+          </a:p>
+          <a:p>
+            <a:pPr algn="l" marL="342900" indent="-342900">
+              <a:lnSpc>
+                <a:spcPts val="1620"/>
+              </a:lnSpc>
+              <a:spcAft>
+                <a:spcPts val="300"/>
+              </a:spcAft>
+              <a:buSzPct val="100000"/>
+              <a:buChar char="•"/>
+            </a:pPr>
+            <a:r>
+              <a:rPr lang="en-US" sz="1200" dirty="0">
+                <a:solidFill>
+                  <a:srgbClr val="1C2833"/>
+                </a:solidFill>
+                <a:latin typeface="Arial" pitchFamily="34" charset="0"/>
+                <a:ea typeface="Arial" pitchFamily="34" charset="-122"/>
+                <a:cs typeface="Arial" pitchFamily="34" charset="-120"/>
+              </a:rPr>
+              <a:t>The tithi (already familiar).</a:t>
+            </a:r>
+            <a:endParaRPr lang="en-US" sz="1200" dirty="0"/>
+          </a:p>
+          <a:p>
+            <a:pPr algn="l" marL="342900" indent="-342900">
+              <a:lnSpc>
+                <a:spcPts val="1620"/>
+              </a:lnSpc>
+              <a:spcAft>
+                <a:spcPts val="300"/>
+              </a:spcAft>
+              <a:buSzPct val="100000"/>
+              <a:buChar char="•"/>
+            </a:pPr>
+            <a:r>
+              <a:rPr lang="en-US" sz="1200" dirty="0">
+                <a:solidFill>
+                  <a:srgbClr val="1C2833"/>
+                </a:solidFill>
+                <a:latin typeface="Arial" pitchFamily="34" charset="0"/>
+                <a:ea typeface="Arial" pitchFamily="34" charset="-122"/>
+                <a:cs typeface="Arial" pitchFamily="34" charset="-120"/>
+              </a:rPr>
+              <a:t>The vāra (compare with the English weekday — does it match?).</a:t>
+            </a:r>
+            <a:endParaRPr lang="en-US" sz="1200" dirty="0"/>
+          </a:p>
+          <a:p>
+            <a:pPr algn="l" marL="342900" indent="-342900">
+              <a:lnSpc>
+                <a:spcPts val="1620"/>
+              </a:lnSpc>
+              <a:spcAft>
+                <a:spcPts val="300"/>
+              </a:spcAft>
+              <a:buSzPct val="100000"/>
+              <a:buChar char="•"/>
+            </a:pPr>
+            <a:r>
+              <a:rPr lang="en-US" sz="1200" dirty="0">
+                <a:solidFill>
+                  <a:srgbClr val="1C2833"/>
+                </a:solidFill>
+                <a:latin typeface="Arial" pitchFamily="34" charset="0"/>
+                <a:ea typeface="Arial" pitchFamily="34" charset="-122"/>
+                <a:cs typeface="Arial" pitchFamily="34" charset="-120"/>
+              </a:rPr>
+              <a:t>The nakṣatra. Try to pronounce it.</a:t>
+            </a:r>
+            <a:endParaRPr lang="en-US" sz="1200" dirty="0"/>
+          </a:p>
+          <a:p>
+            <a:pPr algn="l" marL="342900" indent="-342900">
+              <a:lnSpc>
+                <a:spcPts val="1620"/>
+              </a:lnSpc>
+              <a:spcAft>
+                <a:spcPts val="300"/>
+              </a:spcAft>
+              <a:buSzPct val="100000"/>
+              <a:buChar char="•"/>
+            </a:pPr>
+            <a:r>
+              <a:rPr lang="en-US" sz="1200" dirty="0">
+                <a:solidFill>
+                  <a:srgbClr val="1C2833"/>
+                </a:solidFill>
+                <a:latin typeface="Arial" pitchFamily="34" charset="0"/>
+                <a:ea typeface="Arial" pitchFamily="34" charset="-122"/>
+                <a:cs typeface="Arial" pitchFamily="34" charset="-120"/>
+              </a:rPr>
+              <a:t>The yoga and karaṇa names (these are new — just read them, no need to compute).</a:t>
+            </a:r>
+            <a:endParaRPr lang="en-US" sz="1200" dirty="0"/>
+          </a:p>
+        </p:txBody>
+      </p:sp>
+      <p:sp>
+        <p:nvSpPr>
+          <p:cNvPr id="6" name="Text 4"/>
+          <p:cNvSpPr/>
+          <p:nvPr/>
+        </p:nvSpPr>
+        <p:spPr>
+          <a:xfrm>
+            <a:off x="406301" y="4434929"/>
+            <a:ext cx="8498026" cy="213271"/>
+          </a:xfrm>
+          <a:prstGeom prst="rect">
+            <a:avLst/>
+          </a:prstGeom>
+          <a:noFill/>
+          <a:ln/>
+        </p:spPr>
+        <p:txBody>
+          <a:bodyPr wrap="square" lIns="0" tIns="0" rIns="0" bIns="0" rtlCol="0" anchor="t"/>
+          <a:lstStyle/>
+          <a:p>
+            <a:pPr algn="l" indent="0" marL="0">
+              <a:lnSpc>
+                <a:spcPts val="1680"/>
+              </a:lnSpc>
+              <a:spcBef>
+                <a:spcPts val="300"/>
+              </a:spcBef>
+              <a:spcAft>
+                <a:spcPts val="300"/>
+              </a:spcAft>
+              <a:buNone/>
+            </a:pPr>
+            <a:r>
+              <a:rPr lang="en-US" sz="1200" dirty="0">
+                <a:solidFill>
+                  <a:srgbClr val="1C2833"/>
+                </a:solidFill>
+                <a:latin typeface="Arial" pitchFamily="34" charset="0"/>
+                <a:ea typeface="Arial" pitchFamily="34" charset="-122"/>
+                <a:cs typeface="Arial" pitchFamily="34" charset="-120"/>
+              </a:rPr>
+              <a:t>Middle ·  · IKS Curriculum</a:t>
+            </a:r>
+            <a:endParaRPr lang="en-US" sz="1200" dirty="0"/>
+          </a:p>
+        </p:txBody>
+      </p:sp>
+    </p:spTree>
+  </p:cSld>
+  <p:clrMapOvr>
+    <a:masterClrMapping/>
+  </p:clrMapOvr>
+</p:sld>
+</file>
+
+<file path=ppt/slides/slide16.xml><?xml version="1.0" encoding="utf-8"?>
+<p:sld xmlns:a="http://schemas.openxmlformats.org/drawingml/2006/main" xmlns:r="http://schemas.openxmlformats.org/officeDocument/2006/relationships" xmlns:p="http://schemas.openxmlformats.org/presentationml/2006/main">
+  <p:cSld name="Slide 16">
+    <p:bg>
+      <p:bgPr>
+        <a:solidFill>
+          <a:srgbClr val="FFFFFF"/>
+        </a:solidFill>
+      </p:bgPr>
+    </p:bg>
+    <p:spTree>
+      <p:nvGrpSpPr>
+        <p:cNvPr id="1" name=""/>
+        <p:cNvGrpSpPr/>
+        <p:nvPr/>
+      </p:nvGrpSpPr>
+      <p:grpSpPr>
+        <a:xfrm>
+          <a:off x="0" y="0"/>
+          <a:ext cx="0" cy="0"/>
+          <a:chOff x="0" y="0"/>
+          <a:chExt cx="0" cy="0"/>
+        </a:xfrm>
+      </p:grpSpPr>
+      <p:sp>
+        <p:nvSpPr>
+          <p:cNvPr id="2" name="Text 0"/>
+          <p:cNvSpPr/>
+          <p:nvPr/>
+        </p:nvSpPr>
+        <p:spPr>
+          <a:xfrm>
+            <a:off x="0" y="0"/>
+            <a:ext cx="9144000" cy="101501"/>
+          </a:xfrm>
+          <a:prstGeom prst="rect">
+            <a:avLst/>
+          </a:prstGeom>
+          <a:solidFill>
+            <a:srgbClr val="277884"/>
+          </a:solidFill>
+          <a:ln/>
+        </p:spPr>
+        <p:txBody>
+          <a:bodyPr wrap="square" rtlCol="0" anchor="ctr"/>
+          <a:lstStyle/>
+          <a:p>
+            <a:pPr indent="0" marL="0">
+              <a:buNone/>
+            </a:pPr>
+            <a:endParaRPr lang="en-US" dirty="0"/>
+          </a:p>
+        </p:txBody>
+      </p:sp>
+      <p:sp>
+        <p:nvSpPr>
+          <p:cNvPr id="3" name="Text 1"/>
+          <p:cNvSpPr/>
+          <p:nvPr/>
+        </p:nvSpPr>
+        <p:spPr>
+          <a:xfrm>
+            <a:off x="406301" y="457051"/>
+            <a:ext cx="8498026" cy="274290"/>
+          </a:xfrm>
+          <a:prstGeom prst="rect">
+            <a:avLst/>
+          </a:prstGeom>
+          <a:noFill/>
+          <a:ln/>
+        </p:spPr>
+        <p:txBody>
+          <a:bodyPr wrap="square" lIns="0" tIns="0" rIns="0" bIns="0" rtlCol="0" anchor="t"/>
+          <a:lstStyle/>
+          <a:p>
+            <a:pPr algn="l" indent="0" marL="0">
+              <a:lnSpc>
+                <a:spcPts val="2160"/>
+              </a:lnSpc>
+              <a:spcBef>
+                <a:spcPts val="600"/>
+              </a:spcBef>
+              <a:spcAft>
+                <a:spcPts val="800"/>
+              </a:spcAft>
+              <a:buNone/>
+            </a:pPr>
+            <a:r>
+              <a:rPr lang="en-US" sz="1800" b="1" dirty="0">
+                <a:solidFill>
+                  <a:srgbClr val="FE4447"/>
+                </a:solidFill>
+                <a:latin typeface="Georgia" pitchFamily="34" charset="0"/>
+                <a:ea typeface="Georgia" pitchFamily="34" charset="-122"/>
+                <a:cs typeface="Georgia" pitchFamily="34" charset="-120"/>
+              </a:rPr>
+              <a:t>Activity (10 min) — Read the pañcāṅga (cont.)</a:t>
             </a:r>
             <a:endParaRPr lang="en-US" sz="1800" dirty="0"/>
           </a:p>
@@ -3252,7 +5437,7 @@
                 <a:ea typeface="Arial" pitchFamily="34" charset="-122"/>
                 <a:cs typeface="Arial" pitchFamily="34" charset="-120"/>
               </a:rPr>
-              <a:t>– General reference: the class </a:t>
+              <a:t>Each pair writes one sentence: </a:t>
             </a:r>
             <a:pPr algn="l" indent="0" marL="0">
               <a:lnSpc>
@@ -3275,8 +5460,33 @@
                 <a:ea typeface="Arial" pitchFamily="34" charset="-122"/>
                 <a:cs typeface="Arial" pitchFamily="34" charset="-120"/>
               </a:rPr>
-              <a:t>pañcāṅga</a:t>
-            </a:r>
+              <a:t>"Today, [date], the Moon is in [nakṣatra] nakṣatra, it is [tithi] of the [pakṣa] pakṣa, and the vāra is [day]."</a:t>
+            </a:r>
+            <a:endParaRPr lang="en-US" sz="1200" dirty="0"/>
+          </a:p>
+        </p:txBody>
+      </p:sp>
+      <p:sp>
+        <p:nvSpPr>
+          <p:cNvPr id="5" name="Text 3"/>
+          <p:cNvSpPr/>
+          <p:nvPr/>
+        </p:nvSpPr>
+        <p:spPr>
+          <a:xfrm>
+            <a:off x="406301" y="4434929"/>
+            <a:ext cx="8498026" cy="213271"/>
+          </a:xfrm>
+          <a:prstGeom prst="rect">
+            <a:avLst/>
+          </a:prstGeom>
+          <a:noFill/>
+          <a:ln/>
+        </p:spPr>
+        <p:txBody>
+          <a:bodyPr wrap="square" lIns="0" tIns="0" rIns="0" bIns="0" rtlCol="0" anchor="t"/>
+          <a:lstStyle/>
+          <a:p>
             <a:pPr algn="l" indent="0" marL="0">
               <a:lnSpc>
                 <a:spcPts val="1680"/>
@@ -3298,8 +5508,253 @@
                 <a:ea typeface="Arial" pitchFamily="34" charset="-122"/>
                 <a:cs typeface="Arial" pitchFamily="34" charset="-120"/>
               </a:rPr>
-              <a:t> source. The five-limb framework dates to early Indian astronomical literature (e.g. </a:t>
-            </a:r>
+              <a:t>Middle ·  · IKS Curriculum</a:t>
+            </a:r>
+            <a:endParaRPr lang="en-US" sz="1200" dirty="0"/>
+          </a:p>
+        </p:txBody>
+      </p:sp>
+    </p:spTree>
+  </p:cSld>
+  <p:clrMapOvr>
+    <a:masterClrMapping/>
+  </p:clrMapOvr>
+</p:sld>
+</file>
+
+<file path=ppt/slides/slide17.xml><?xml version="1.0" encoding="utf-8"?>
+<p:sld xmlns:a="http://schemas.openxmlformats.org/drawingml/2006/main" xmlns:r="http://schemas.openxmlformats.org/officeDocument/2006/relationships" xmlns:p="http://schemas.openxmlformats.org/presentationml/2006/main">
+  <p:cSld name="Slide 17">
+    <p:bg>
+      <p:bgPr>
+        <a:solidFill>
+          <a:srgbClr val="FFFFFF"/>
+        </a:solidFill>
+      </p:bgPr>
+    </p:bg>
+    <p:spTree>
+      <p:nvGrpSpPr>
+        <p:cNvPr id="1" name=""/>
+        <p:cNvGrpSpPr/>
+        <p:nvPr/>
+      </p:nvGrpSpPr>
+      <p:grpSpPr>
+        <a:xfrm>
+          <a:off x="0" y="0"/>
+          <a:ext cx="0" cy="0"/>
+          <a:chOff x="0" y="0"/>
+          <a:chExt cx="0" cy="0"/>
+        </a:xfrm>
+      </p:grpSpPr>
+      <p:sp>
+        <p:nvSpPr>
+          <p:cNvPr id="2" name="Text 0"/>
+          <p:cNvSpPr/>
+          <p:nvPr/>
+        </p:nvSpPr>
+        <p:spPr>
+          <a:xfrm>
+            <a:off x="0" y="0"/>
+            <a:ext cx="9144000" cy="101501"/>
+          </a:xfrm>
+          <a:prstGeom prst="rect">
+            <a:avLst/>
+          </a:prstGeom>
+          <a:solidFill>
+            <a:srgbClr val="277884"/>
+          </a:solidFill>
+          <a:ln/>
+        </p:spPr>
+        <p:txBody>
+          <a:bodyPr wrap="square" rtlCol="0" anchor="ctr"/>
+          <a:lstStyle/>
+          <a:p>
+            <a:pPr indent="0" marL="0">
+              <a:buNone/>
+            </a:pPr>
+            <a:endParaRPr lang="en-US" dirty="0"/>
+          </a:p>
+        </p:txBody>
+      </p:sp>
+      <p:sp>
+        <p:nvSpPr>
+          <p:cNvPr id="3" name="Text 1"/>
+          <p:cNvSpPr/>
+          <p:nvPr/>
+        </p:nvSpPr>
+        <p:spPr>
+          <a:xfrm>
+            <a:off x="406301" y="457051"/>
+            <a:ext cx="8498026" cy="274290"/>
+          </a:xfrm>
+          <a:prstGeom prst="rect">
+            <a:avLst/>
+          </a:prstGeom>
+          <a:noFill/>
+          <a:ln/>
+        </p:spPr>
+        <p:txBody>
+          <a:bodyPr wrap="square" lIns="0" tIns="0" rIns="0" bIns="0" rtlCol="0" anchor="t"/>
+          <a:lstStyle/>
+          <a:p>
+            <a:pPr algn="l" indent="0" marL="0">
+              <a:lnSpc>
+                <a:spcPts val="2160"/>
+              </a:lnSpc>
+              <a:spcBef>
+                <a:spcPts val="600"/>
+              </a:spcBef>
+              <a:spcAft>
+                <a:spcPts val="800"/>
+              </a:spcAft>
+              <a:buNone/>
+            </a:pPr>
+            <a:r>
+              <a:rPr lang="en-US" sz="1800" b="1" dirty="0">
+                <a:solidFill>
+                  <a:srgbClr val="FE4447"/>
+                </a:solidFill>
+                <a:latin typeface="Georgia" pitchFamily="34" charset="0"/>
+                <a:ea typeface="Georgia" pitchFamily="34" charset="-122"/>
+                <a:cs typeface="Georgia" pitchFamily="34" charset="-120"/>
+              </a:rPr>
+              <a:t>Wrap-up (5 min)</a:t>
+            </a:r>
+            <a:endParaRPr lang="en-US" sz="1800" dirty="0"/>
+          </a:p>
+        </p:txBody>
+      </p:sp>
+      <p:sp>
+        <p:nvSpPr>
+          <p:cNvPr id="4" name="Text 2"/>
+          <p:cNvSpPr/>
+          <p:nvPr/>
+        </p:nvSpPr>
+        <p:spPr>
+          <a:xfrm>
+            <a:off x="634901" y="883593"/>
+            <a:ext cx="8102798" cy="731341"/>
+          </a:xfrm>
+          <a:prstGeom prst="rect">
+            <a:avLst/>
+          </a:prstGeom>
+          <a:noFill/>
+          <a:ln/>
+        </p:spPr>
+        <p:txBody>
+          <a:bodyPr wrap="square" lIns="0" tIns="0" rIns="0" bIns="0" rtlCol="0" anchor="t"/>
+          <a:lstStyle/>
+          <a:p>
+            <a:pPr algn="l" marL="342900" indent="-342900">
+              <a:lnSpc>
+                <a:spcPts val="1620"/>
+              </a:lnSpc>
+              <a:spcAft>
+                <a:spcPts val="300"/>
+              </a:spcAft>
+              <a:buSzPct val="100000"/>
+              <a:buChar char="•"/>
+            </a:pPr>
+            <a:r>
+              <a:rPr lang="en-US" sz="1200" dirty="0">
+                <a:solidFill>
+                  <a:srgbClr val="1C2833"/>
+                </a:solidFill>
+                <a:latin typeface="Arial" pitchFamily="34" charset="0"/>
+                <a:ea typeface="Arial" pitchFamily="34" charset="-122"/>
+                <a:cs typeface="Arial" pitchFamily="34" charset="-120"/>
+              </a:rPr>
+              <a:t>Read aloud 2–3 students' sentences. The class reciprocates with the meanings ("Mars day," "Saturn day," etc.).</a:t>
+            </a:r>
+            <a:endParaRPr lang="en-US" sz="1200" dirty="0"/>
+          </a:p>
+          <a:p>
+            <a:pPr algn="l" marL="342900" indent="-342900">
+              <a:lnSpc>
+                <a:spcPts val="1620"/>
+              </a:lnSpc>
+              <a:spcAft>
+                <a:spcPts val="300"/>
+              </a:spcAft>
+              <a:buSzPct val="100000"/>
+              <a:buChar char="•"/>
+            </a:pPr>
+            <a:r>
+              <a:rPr lang="en-US" sz="1200" b="1" dirty="0">
+                <a:solidFill>
+                  <a:srgbClr val="1C2833"/>
+                </a:solidFill>
+                <a:latin typeface="Arial" pitchFamily="34" charset="0"/>
+                <a:ea typeface="Arial" pitchFamily="34" charset="-122"/>
+                <a:cs typeface="Arial" pitchFamily="34" charset="-120"/>
+              </a:rPr>
+              <a:t>Preview Day 7:</a:t>
+            </a:r>
+            <a:pPr algn="l" indent="0" marL="0">
+              <a:lnSpc>
+                <a:spcPts val="1620"/>
+              </a:lnSpc>
+              <a:spcAft>
+                <a:spcPts val="300"/>
+              </a:spcAft>
+              <a:buNone/>
+            </a:pPr>
+            <a:r>
+              <a:rPr lang="en-US" sz="1200" dirty="0">
+                <a:solidFill>
+                  <a:srgbClr val="1C2833"/>
+                </a:solidFill>
+                <a:latin typeface="Arial" pitchFamily="34" charset="0"/>
+                <a:ea typeface="Arial" pitchFamily="34" charset="-122"/>
+                <a:cs typeface="Arial" pitchFamily="34" charset="-120"/>
+              </a:rPr>
+              <a:t> </a:t>
+            </a:r>
+            <a:pPr algn="l" indent="0" marL="0">
+              <a:lnSpc>
+                <a:spcPts val="1620"/>
+              </a:lnSpc>
+              <a:spcAft>
+                <a:spcPts val="300"/>
+              </a:spcAft>
+              <a:buNone/>
+            </a:pPr>
+            <a:r>
+              <a:rPr lang="en-US" sz="1200" i="1" dirty="0">
+                <a:solidFill>
+                  <a:srgbClr val="1C2833"/>
+                </a:solidFill>
+                <a:latin typeface="Arial" pitchFamily="34" charset="0"/>
+                <a:ea typeface="Arial" pitchFamily="34" charset="-122"/>
+                <a:cs typeface="Arial" pitchFamily="34" charset="-120"/>
+              </a:rPr>
+              <a:t>"Tomorrow, the big question — why do eclipses happen on amāvasyā and pūrṇimā, but not every month?"</a:t>
+            </a:r>
+            <a:endParaRPr lang="en-US" sz="1200" dirty="0"/>
+          </a:p>
+        </p:txBody>
+      </p:sp>
+      <p:sp>
+        <p:nvSpPr>
+          <p:cNvPr id="5" name="Text 3"/>
+          <p:cNvSpPr/>
+          <p:nvPr/>
+        </p:nvSpPr>
+        <p:spPr>
+          <a:xfrm>
+            <a:off x="406301" y="4434929"/>
+            <a:ext cx="8498026" cy="213271"/>
+          </a:xfrm>
+          <a:prstGeom prst="rect">
+            <a:avLst/>
+          </a:prstGeom>
+          <a:noFill/>
+          <a:ln/>
+        </p:spPr>
+        <p:txBody>
+          <a:bodyPr wrap="square" lIns="0" tIns="0" rIns="0" bIns="0" rtlCol="0" anchor="t"/>
+          <a:lstStyle/>
+          <a:p>
             <a:pPr algn="l" indent="0" marL="0">
               <a:lnSpc>
                 <a:spcPts val="1680"/>
@@ -3313,16 +5768,578 @@
               <a:buNone/>
             </a:pPr>
             <a:r>
-              <a:rPr lang="en-US" sz="1200" i="1" dirty="0">
-                <a:solidFill>
-                  <a:srgbClr val="1C2833"/>
-                </a:solidFill>
-                <a:latin typeface="Arial" pitchFamily="34" charset="0"/>
-                <a:ea typeface="Arial" pitchFamily="34" charset="-122"/>
-                <a:cs typeface="Arial" pitchFamily="34" charset="-120"/>
-              </a:rPr>
-              <a:t>Pañcasiddhāntikā</a:t>
-            </a:r>
+              <a:rPr lang="en-US" sz="1200" dirty="0">
+                <a:solidFill>
+                  <a:srgbClr val="1C2833"/>
+                </a:solidFill>
+                <a:latin typeface="Arial" pitchFamily="34" charset="0"/>
+                <a:ea typeface="Arial" pitchFamily="34" charset="-122"/>
+                <a:cs typeface="Arial" pitchFamily="34" charset="-120"/>
+              </a:rPr>
+              <a:t>Middle ·  · IKS Curriculum</a:t>
+            </a:r>
+            <a:endParaRPr lang="en-US" sz="1200" dirty="0"/>
+          </a:p>
+        </p:txBody>
+      </p:sp>
+    </p:spTree>
+  </p:cSld>
+  <p:clrMapOvr>
+    <a:masterClrMapping/>
+  </p:clrMapOvr>
+</p:sld>
+</file>
+
+<file path=ppt/slides/slide18.xml><?xml version="1.0" encoding="utf-8"?>
+<p:sld xmlns:a="http://schemas.openxmlformats.org/drawingml/2006/main" xmlns:r="http://schemas.openxmlformats.org/officeDocument/2006/relationships" xmlns:p="http://schemas.openxmlformats.org/presentationml/2006/main">
+  <p:cSld name="Slide 18">
+    <p:bg>
+      <p:bgPr>
+        <a:solidFill>
+          <a:srgbClr val="FFFFFF"/>
+        </a:solidFill>
+      </p:bgPr>
+    </p:bg>
+    <p:spTree>
+      <p:nvGrpSpPr>
+        <p:cNvPr id="1" name=""/>
+        <p:cNvGrpSpPr/>
+        <p:nvPr/>
+      </p:nvGrpSpPr>
+      <p:grpSpPr>
+        <a:xfrm>
+          <a:off x="0" y="0"/>
+          <a:ext cx="0" cy="0"/>
+          <a:chOff x="0" y="0"/>
+          <a:chExt cx="0" cy="0"/>
+        </a:xfrm>
+      </p:grpSpPr>
+      <p:sp>
+        <p:nvSpPr>
+          <p:cNvPr id="2" name="Text 0"/>
+          <p:cNvSpPr/>
+          <p:nvPr/>
+        </p:nvSpPr>
+        <p:spPr>
+          <a:xfrm>
+            <a:off x="0" y="0"/>
+            <a:ext cx="9144000" cy="101501"/>
+          </a:xfrm>
+          <a:prstGeom prst="rect">
+            <a:avLst/>
+          </a:prstGeom>
+          <a:solidFill>
+            <a:srgbClr val="277884"/>
+          </a:solidFill>
+          <a:ln/>
+        </p:spPr>
+        <p:txBody>
+          <a:bodyPr wrap="square" rtlCol="0" anchor="ctr"/>
+          <a:lstStyle/>
+          <a:p>
+            <a:pPr indent="0" marL="0">
+              <a:buNone/>
+            </a:pPr>
+            <a:endParaRPr lang="en-US" dirty="0"/>
+          </a:p>
+        </p:txBody>
+      </p:sp>
+      <p:sp>
+        <p:nvSpPr>
+          <p:cNvPr id="3" name="Text 1"/>
+          <p:cNvSpPr/>
+          <p:nvPr/>
+        </p:nvSpPr>
+        <p:spPr>
+          <a:xfrm>
+            <a:off x="406301" y="457051"/>
+            <a:ext cx="8498026" cy="274290"/>
+          </a:xfrm>
+          <a:prstGeom prst="rect">
+            <a:avLst/>
+          </a:prstGeom>
+          <a:noFill/>
+          <a:ln/>
+        </p:spPr>
+        <p:txBody>
+          <a:bodyPr wrap="square" lIns="0" tIns="0" rIns="0" bIns="0" rtlCol="0" anchor="t"/>
+          <a:lstStyle/>
+          <a:p>
+            <a:pPr algn="l" indent="0" marL="0">
+              <a:lnSpc>
+                <a:spcPts val="2160"/>
+              </a:lnSpc>
+              <a:spcBef>
+                <a:spcPts val="600"/>
+              </a:spcBef>
+              <a:spcAft>
+                <a:spcPts val="800"/>
+              </a:spcAft>
+              <a:buNone/>
+            </a:pPr>
+            <a:r>
+              <a:rPr lang="en-US" sz="1800" b="1" dirty="0">
+                <a:solidFill>
+                  <a:srgbClr val="FE4447"/>
+                </a:solidFill>
+                <a:latin typeface="Georgia" pitchFamily="34" charset="0"/>
+                <a:ea typeface="Georgia" pitchFamily="34" charset="-122"/>
+                <a:cs typeface="Georgia" pitchFamily="34" charset="-120"/>
+              </a:rPr>
+              <a:t>Student-facing content</a:t>
+            </a:r>
+            <a:endParaRPr lang="en-US" sz="1800" dirty="0"/>
+          </a:p>
+        </p:txBody>
+      </p:sp>
+      <p:sp>
+        <p:nvSpPr>
+          <p:cNvPr id="4" name="Text 2"/>
+          <p:cNvSpPr/>
+          <p:nvPr/>
+        </p:nvSpPr>
+        <p:spPr>
+          <a:xfrm>
+            <a:off x="406301" y="883593"/>
+            <a:ext cx="8331398" cy="1843088"/>
+          </a:xfrm>
+          <a:prstGeom prst="rect">
+            <a:avLst/>
+          </a:prstGeom>
+          <a:solidFill>
+            <a:srgbClr val="F4F8F9"/>
+          </a:solidFill>
+          <a:ln/>
+        </p:spPr>
+        <p:txBody>
+          <a:bodyPr wrap="square" rtlCol="0" anchor="ctr"/>
+          <a:lstStyle/>
+          <a:p>
+            <a:pPr indent="0" marL="0">
+              <a:buNone/>
+            </a:pPr>
+            <a:endParaRPr lang="en-US" dirty="0"/>
+          </a:p>
+        </p:txBody>
+      </p:sp>
+      <p:sp>
+        <p:nvSpPr>
+          <p:cNvPr id="5" name="Shape 3"/>
+          <p:cNvSpPr/>
+          <p:nvPr/>
+        </p:nvSpPr>
+        <p:spPr>
+          <a:xfrm>
+            <a:off x="434876" y="883593"/>
+            <a:ext cx="0" cy="1843088"/>
+          </a:xfrm>
+          <a:prstGeom prst="line">
+            <a:avLst/>
+          </a:prstGeom>
+          <a:noFill/>
+          <a:ln w="57150">
+            <a:solidFill>
+              <a:srgbClr val="FE4447"/>
+            </a:solidFill>
+            <a:prstDash val="solid"/>
+          </a:ln>
+        </p:spPr>
+      </p:sp>
+      <p:sp>
+        <p:nvSpPr>
+          <p:cNvPr id="6" name="Text 4"/>
+          <p:cNvSpPr/>
+          <p:nvPr/>
+        </p:nvSpPr>
+        <p:spPr>
+          <a:xfrm>
+            <a:off x="692051" y="1074093"/>
+            <a:ext cx="7973389" cy="230981"/>
+          </a:xfrm>
+          <a:prstGeom prst="rect">
+            <a:avLst/>
+          </a:prstGeom>
+          <a:noFill/>
+          <a:ln/>
+        </p:spPr>
+        <p:txBody>
+          <a:bodyPr wrap="square" lIns="0" tIns="0" rIns="0" bIns="0" rtlCol="0" anchor="t"/>
+          <a:lstStyle/>
+          <a:p>
+            <a:pPr algn="l" indent="0" marL="0">
+              <a:lnSpc>
+                <a:spcPts val="1820"/>
+              </a:lnSpc>
+              <a:spcBef>
+                <a:spcPts val="300"/>
+              </a:spcBef>
+              <a:spcAft>
+                <a:spcPts val="300"/>
+              </a:spcAft>
+              <a:buNone/>
+            </a:pPr>
+            <a:r>
+              <a:rPr lang="en-US" sz="1300" b="1" i="1" dirty="0">
+                <a:solidFill>
+                  <a:srgbClr val="1C2833"/>
+                </a:solidFill>
+                <a:latin typeface="Georgia" pitchFamily="34" charset="0"/>
+                <a:ea typeface="Georgia" pitchFamily="34" charset="-122"/>
+                <a:cs typeface="Georgia" pitchFamily="34" charset="-120"/>
+              </a:rPr>
+              <a:t>A pañcāṅga has five limbs. Each tracks a different astronomical fact.</a:t>
+            </a:r>
+            <a:endParaRPr lang="en-US" sz="1300" dirty="0"/>
+          </a:p>
+        </p:txBody>
+      </p:sp>
+      <p:sp>
+        <p:nvSpPr>
+          <p:cNvPr id="7" name="Text 5"/>
+          <p:cNvSpPr/>
+          <p:nvPr/>
+        </p:nvSpPr>
+        <p:spPr>
+          <a:xfrm>
+            <a:off x="692051" y="1343174"/>
+            <a:ext cx="7973389" cy="692944"/>
+          </a:xfrm>
+          <a:prstGeom prst="rect">
+            <a:avLst/>
+          </a:prstGeom>
+          <a:noFill/>
+          <a:ln/>
+        </p:spPr>
+        <p:txBody>
+          <a:bodyPr wrap="square" lIns="0" tIns="0" rIns="0" bIns="0" rtlCol="0" anchor="t"/>
+          <a:lstStyle/>
+          <a:p>
+            <a:pPr algn="l" indent="0" marL="0">
+              <a:lnSpc>
+                <a:spcPts val="1820"/>
+              </a:lnSpc>
+              <a:spcBef>
+                <a:spcPts val="300"/>
+              </a:spcBef>
+              <a:spcAft>
+                <a:spcPts val="300"/>
+              </a:spcAft>
+              <a:buNone/>
+            </a:pPr>
+            <a:r>
+              <a:rPr lang="en-US" sz="1300" dirty="0">
+                <a:solidFill>
+                  <a:srgbClr val="1C2833"/>
+                </a:solidFill>
+                <a:latin typeface="Georgia" pitchFamily="34" charset="0"/>
+                <a:ea typeface="Georgia" pitchFamily="34" charset="-122"/>
+                <a:cs typeface="Georgia" pitchFamily="34" charset="-120"/>
+              </a:rPr>
+              <a:t>| Limb | What it tracks | |------|----------------| | </a:t>
+            </a:r>
+            <a:pPr algn="l" indent="0" marL="0">
+              <a:lnSpc>
+                <a:spcPts val="1820"/>
+              </a:lnSpc>
+              <a:spcBef>
+                <a:spcPts val="300"/>
+              </a:spcBef>
+              <a:spcAft>
+                <a:spcPts val="300"/>
+              </a:spcAft>
+              <a:buNone/>
+            </a:pPr>
+            <a:r>
+              <a:rPr lang="en-US" sz="1300" i="1" dirty="0">
+                <a:solidFill>
+                  <a:srgbClr val="1C2833"/>
+                </a:solidFill>
+                <a:latin typeface="Georgia" pitchFamily="34" charset="0"/>
+                <a:ea typeface="Georgia" pitchFamily="34" charset="-122"/>
+                <a:cs typeface="Georgia" pitchFamily="34" charset="-120"/>
+              </a:rPr>
+              <a:t>tithi</a:t>
+            </a:r>
+            <a:pPr algn="l" indent="0" marL="0">
+              <a:lnSpc>
+                <a:spcPts val="1820"/>
+              </a:lnSpc>
+              <a:spcBef>
+                <a:spcPts val="300"/>
+              </a:spcBef>
+              <a:spcAft>
+                <a:spcPts val="300"/>
+              </a:spcAft>
+              <a:buNone/>
+            </a:pPr>
+            <a:r>
+              <a:rPr lang="en-US" sz="1300" dirty="0">
+                <a:solidFill>
+                  <a:srgbClr val="1C2833"/>
+                </a:solidFill>
+                <a:latin typeface="Georgia" pitchFamily="34" charset="0"/>
+                <a:ea typeface="Georgia" pitchFamily="34" charset="-122"/>
+                <a:cs typeface="Georgia" pitchFamily="34" charset="-120"/>
+              </a:rPr>
+              <a:t> | Moon's elongation from the Sun (1 of 30) | | </a:t>
+            </a:r>
+            <a:pPr algn="l" indent="0" marL="0">
+              <a:lnSpc>
+                <a:spcPts val="1820"/>
+              </a:lnSpc>
+              <a:spcBef>
+                <a:spcPts val="300"/>
+              </a:spcBef>
+              <a:spcAft>
+                <a:spcPts val="300"/>
+              </a:spcAft>
+              <a:buNone/>
+            </a:pPr>
+            <a:r>
+              <a:rPr lang="en-US" sz="1300" i="1" dirty="0">
+                <a:solidFill>
+                  <a:srgbClr val="1C2833"/>
+                </a:solidFill>
+                <a:latin typeface="Georgia" pitchFamily="34" charset="0"/>
+                <a:ea typeface="Georgia" pitchFamily="34" charset="-122"/>
+                <a:cs typeface="Georgia" pitchFamily="34" charset="-120"/>
+              </a:rPr>
+              <a:t>vāra</a:t>
+            </a:r>
+            <a:pPr algn="l" indent="0" marL="0">
+              <a:lnSpc>
+                <a:spcPts val="1820"/>
+              </a:lnSpc>
+              <a:spcBef>
+                <a:spcPts val="300"/>
+              </a:spcBef>
+              <a:spcAft>
+                <a:spcPts val="300"/>
+              </a:spcAft>
+              <a:buNone/>
+            </a:pPr>
+            <a:r>
+              <a:rPr lang="en-US" sz="1300" dirty="0">
+                <a:solidFill>
+                  <a:srgbClr val="1C2833"/>
+                </a:solidFill>
+                <a:latin typeface="Georgia" pitchFamily="34" charset="0"/>
+                <a:ea typeface="Georgia" pitchFamily="34" charset="-122"/>
+                <a:cs typeface="Georgia" pitchFamily="34" charset="-120"/>
+              </a:rPr>
+              <a:t> | day of the week (1 of 7) | | </a:t>
+            </a:r>
+            <a:pPr algn="l" indent="0" marL="0">
+              <a:lnSpc>
+                <a:spcPts val="1820"/>
+              </a:lnSpc>
+              <a:spcBef>
+                <a:spcPts val="300"/>
+              </a:spcBef>
+              <a:spcAft>
+                <a:spcPts val="300"/>
+              </a:spcAft>
+              <a:buNone/>
+            </a:pPr>
+            <a:r>
+              <a:rPr lang="en-US" sz="1300" i="1" dirty="0">
+                <a:solidFill>
+                  <a:srgbClr val="1C2833"/>
+                </a:solidFill>
+                <a:latin typeface="Georgia" pitchFamily="34" charset="0"/>
+                <a:ea typeface="Georgia" pitchFamily="34" charset="-122"/>
+                <a:cs typeface="Georgia" pitchFamily="34" charset="-120"/>
+              </a:rPr>
+              <a:t>nakṣatra</a:t>
+            </a:r>
+            <a:pPr algn="l" indent="0" marL="0">
+              <a:lnSpc>
+                <a:spcPts val="1820"/>
+              </a:lnSpc>
+              <a:spcBef>
+                <a:spcPts val="300"/>
+              </a:spcBef>
+              <a:spcAft>
+                <a:spcPts val="300"/>
+              </a:spcAft>
+              <a:buNone/>
+            </a:pPr>
+            <a:r>
+              <a:rPr lang="en-US" sz="1300" dirty="0">
+                <a:solidFill>
+                  <a:srgbClr val="1C2833"/>
+                </a:solidFill>
+                <a:latin typeface="Georgia" pitchFamily="34" charset="0"/>
+                <a:ea typeface="Georgia" pitchFamily="34" charset="-122"/>
+                <a:cs typeface="Georgia" pitchFamily="34" charset="-120"/>
+              </a:rPr>
+              <a:t> | Moon's position against the stars (1 of 27) | | </a:t>
+            </a:r>
+            <a:pPr algn="l" indent="0" marL="0">
+              <a:lnSpc>
+                <a:spcPts val="1820"/>
+              </a:lnSpc>
+              <a:spcBef>
+                <a:spcPts val="300"/>
+              </a:spcBef>
+              <a:spcAft>
+                <a:spcPts val="300"/>
+              </a:spcAft>
+              <a:buNone/>
+            </a:pPr>
+            <a:r>
+              <a:rPr lang="en-US" sz="1300" i="1" dirty="0">
+                <a:solidFill>
+                  <a:srgbClr val="1C2833"/>
+                </a:solidFill>
+                <a:latin typeface="Georgia" pitchFamily="34" charset="0"/>
+                <a:ea typeface="Georgia" pitchFamily="34" charset="-122"/>
+                <a:cs typeface="Georgia" pitchFamily="34" charset="-120"/>
+              </a:rPr>
+              <a:t>yoga</a:t>
+            </a:r>
+            <a:pPr algn="l" indent="0" marL="0">
+              <a:lnSpc>
+                <a:spcPts val="1820"/>
+              </a:lnSpc>
+              <a:spcBef>
+                <a:spcPts val="300"/>
+              </a:spcBef>
+              <a:spcAft>
+                <a:spcPts val="300"/>
+              </a:spcAft>
+              <a:buNone/>
+            </a:pPr>
+            <a:r>
+              <a:rPr lang="en-US" sz="1300" dirty="0">
+                <a:solidFill>
+                  <a:srgbClr val="1C2833"/>
+                </a:solidFill>
+                <a:latin typeface="Georgia" pitchFamily="34" charset="0"/>
+                <a:ea typeface="Georgia" pitchFamily="34" charset="-122"/>
+                <a:cs typeface="Georgia" pitchFamily="34" charset="-120"/>
+              </a:rPr>
+              <a:t> | sum of Sun + Moon longitudes (1 of 27) | | </a:t>
+            </a:r>
+            <a:pPr algn="l" indent="0" marL="0">
+              <a:lnSpc>
+                <a:spcPts val="1820"/>
+              </a:lnSpc>
+              <a:spcBef>
+                <a:spcPts val="300"/>
+              </a:spcBef>
+              <a:spcAft>
+                <a:spcPts val="300"/>
+              </a:spcAft>
+              <a:buNone/>
+            </a:pPr>
+            <a:r>
+              <a:rPr lang="en-US" sz="1300" i="1" dirty="0">
+                <a:solidFill>
+                  <a:srgbClr val="1C2833"/>
+                </a:solidFill>
+                <a:latin typeface="Georgia" pitchFamily="34" charset="0"/>
+                <a:ea typeface="Georgia" pitchFamily="34" charset="-122"/>
+                <a:cs typeface="Georgia" pitchFamily="34" charset="-120"/>
+              </a:rPr>
+              <a:t>karaṇa</a:t>
+            </a:r>
+            <a:pPr algn="l" indent="0" marL="0">
+              <a:lnSpc>
+                <a:spcPts val="1820"/>
+              </a:lnSpc>
+              <a:spcBef>
+                <a:spcPts val="300"/>
+              </a:spcBef>
+              <a:spcAft>
+                <a:spcPts val="300"/>
+              </a:spcAft>
+              <a:buNone/>
+            </a:pPr>
+            <a:r>
+              <a:rPr lang="en-US" sz="1300" dirty="0">
+                <a:solidFill>
+                  <a:srgbClr val="1C2833"/>
+                </a:solidFill>
+                <a:latin typeface="Georgia" pitchFamily="34" charset="0"/>
+                <a:ea typeface="Georgia" pitchFamily="34" charset="-122"/>
+                <a:cs typeface="Georgia" pitchFamily="34" charset="-120"/>
+              </a:rPr>
+              <a:t> | half-tithi (1 of 11 cycling names) |</a:t>
+            </a:r>
+            <a:endParaRPr lang="en-US" sz="1300" dirty="0"/>
+          </a:p>
+        </p:txBody>
+      </p:sp>
+      <p:sp>
+        <p:nvSpPr>
+          <p:cNvPr id="8" name="Text 6"/>
+          <p:cNvSpPr/>
+          <p:nvPr/>
+        </p:nvSpPr>
+        <p:spPr>
+          <a:xfrm>
+            <a:off x="692051" y="2074218"/>
+            <a:ext cx="7973389" cy="461963"/>
+          </a:xfrm>
+          <a:prstGeom prst="rect">
+            <a:avLst/>
+          </a:prstGeom>
+          <a:noFill/>
+          <a:ln/>
+        </p:spPr>
+        <p:txBody>
+          <a:bodyPr wrap="square" lIns="0" tIns="0" rIns="0" bIns="0" rtlCol="0" anchor="t"/>
+          <a:lstStyle/>
+          <a:p>
+            <a:pPr algn="l" indent="0" marL="0">
+              <a:lnSpc>
+                <a:spcPts val="1820"/>
+              </a:lnSpc>
+              <a:spcBef>
+                <a:spcPts val="300"/>
+              </a:spcBef>
+              <a:spcAft>
+                <a:spcPts val="300"/>
+              </a:spcAft>
+              <a:buNone/>
+            </a:pPr>
+            <a:r>
+              <a:rPr lang="en-US" sz="1300" i="1" dirty="0">
+                <a:solidFill>
+                  <a:srgbClr val="1C2833"/>
+                </a:solidFill>
+                <a:latin typeface="Georgia" pitchFamily="34" charset="0"/>
+                <a:ea typeface="Georgia" pitchFamily="34" charset="-122"/>
+                <a:cs typeface="Georgia" pitchFamily="34" charset="-120"/>
+              </a:rPr>
+              <a:t>Knowing all five for a given moment is like having a snapshot of where the Sun and Moon are. A modern astronomy almanac does the same job in a different format.</a:t>
+            </a:r>
+            <a:endParaRPr lang="en-US" sz="1300" dirty="0"/>
+          </a:p>
+        </p:txBody>
+      </p:sp>
+      <p:sp>
+        <p:nvSpPr>
+          <p:cNvPr id="9" name="Text 7"/>
+          <p:cNvSpPr/>
+          <p:nvPr/>
+        </p:nvSpPr>
+        <p:spPr>
+          <a:xfrm>
+            <a:off x="406301" y="4434929"/>
+            <a:ext cx="8498026" cy="213271"/>
+          </a:xfrm>
+          <a:prstGeom prst="rect">
+            <a:avLst/>
+          </a:prstGeom>
+          <a:noFill/>
+          <a:ln/>
+        </p:spPr>
+        <p:txBody>
+          <a:bodyPr wrap="square" lIns="0" tIns="0" rIns="0" bIns="0" rtlCol="0" anchor="t"/>
+          <a:lstStyle/>
+          <a:p>
             <a:pPr algn="l" indent="0" marL="0">
               <a:lnSpc>
                 <a:spcPts val="1680"/>
@@ -3344,42 +6361,152 @@
                 <a:ea typeface="Arial" pitchFamily="34" charset="-122"/>
                 <a:cs typeface="Arial" pitchFamily="34" charset="-120"/>
               </a:rPr>
-              <a:t> of Varāhamihira, 6th c. CE), but the modern </a:t>
-            </a:r>
-            <a:pPr algn="l" indent="0" marL="0">
-              <a:lnSpc>
-                <a:spcPts val="1680"/>
+              <a:t>Middle ·  · IKS Curriculum</a:t>
+            </a:r>
+            <a:endParaRPr lang="en-US" sz="1200" dirty="0"/>
+          </a:p>
+        </p:txBody>
+      </p:sp>
+    </p:spTree>
+  </p:cSld>
+  <p:clrMapOvr>
+    <a:masterClrMapping/>
+  </p:clrMapOvr>
+</p:sld>
+</file>
+
+<file path=ppt/slides/slide19.xml><?xml version="1.0" encoding="utf-8"?>
+<p:sld xmlns:a="http://schemas.openxmlformats.org/drawingml/2006/main" xmlns:r="http://schemas.openxmlformats.org/officeDocument/2006/relationships" xmlns:p="http://schemas.openxmlformats.org/presentationml/2006/main">
+  <p:cSld name="Slide 19">
+    <p:bg>
+      <p:bgPr>
+        <a:solidFill>
+          <a:srgbClr val="FFFFFF"/>
+        </a:solidFill>
+      </p:bgPr>
+    </p:bg>
+    <p:spTree>
+      <p:nvGrpSpPr>
+        <p:cNvPr id="1" name=""/>
+        <p:cNvGrpSpPr/>
+        <p:nvPr/>
+      </p:nvGrpSpPr>
+      <p:grpSpPr>
+        <a:xfrm>
+          <a:off x="0" y="0"/>
+          <a:ext cx="0" cy="0"/>
+          <a:chOff x="0" y="0"/>
+          <a:chExt cx="0" cy="0"/>
+        </a:xfrm>
+      </p:grpSpPr>
+      <p:sp>
+        <p:nvSpPr>
+          <p:cNvPr id="2" name="Text 0"/>
+          <p:cNvSpPr/>
+          <p:nvPr/>
+        </p:nvSpPr>
+        <p:spPr>
+          <a:xfrm>
+            <a:off x="0" y="0"/>
+            <a:ext cx="9144000" cy="101501"/>
+          </a:xfrm>
+          <a:prstGeom prst="rect">
+            <a:avLst/>
+          </a:prstGeom>
+          <a:solidFill>
+            <a:srgbClr val="277884"/>
+          </a:solidFill>
+          <a:ln/>
+        </p:spPr>
+        <p:txBody>
+          <a:bodyPr wrap="square" rtlCol="0" anchor="ctr"/>
+          <a:lstStyle/>
+          <a:p>
+            <a:pPr indent="0" marL="0">
+              <a:buNone/>
+            </a:pPr>
+            <a:endParaRPr lang="en-US" dirty="0"/>
+          </a:p>
+        </p:txBody>
+      </p:sp>
+      <p:sp>
+        <p:nvSpPr>
+          <p:cNvPr id="3" name="Text 1"/>
+          <p:cNvSpPr/>
+          <p:nvPr/>
+        </p:nvSpPr>
+        <p:spPr>
+          <a:xfrm>
+            <a:off x="406301" y="457051"/>
+            <a:ext cx="8498026" cy="274290"/>
+          </a:xfrm>
+          <a:prstGeom prst="rect">
+            <a:avLst/>
+          </a:prstGeom>
+          <a:noFill/>
+          <a:ln/>
+        </p:spPr>
+        <p:txBody>
+          <a:bodyPr wrap="square" lIns="0" tIns="0" rIns="0" bIns="0" rtlCol="0" anchor="t"/>
+          <a:lstStyle/>
+          <a:p>
+            <a:pPr algn="l" indent="0" marL="0">
+              <a:lnSpc>
+                <a:spcPts val="2160"/>
               </a:lnSpc>
               <a:spcBef>
-                <a:spcPts val="300"/>
+                <a:spcPts val="600"/>
               </a:spcBef>
               <a:spcAft>
-                <a:spcPts val="300"/>
-              </a:spcAft>
-              <a:buNone/>
-            </a:pPr>
-            <a:r>
-              <a:rPr lang="en-US" sz="1200" i="1" dirty="0">
-                <a:solidFill>
-                  <a:srgbClr val="1C2833"/>
-                </a:solidFill>
-                <a:latin typeface="Arial" pitchFamily="34" charset="0"/>
-                <a:ea typeface="Arial" pitchFamily="34" charset="-122"/>
-                <a:cs typeface="Arial" pitchFamily="34" charset="-120"/>
-              </a:rPr>
-              <a:t>pañcāṅga</a:t>
-            </a:r>
-            <a:pPr algn="l" indent="0" marL="0">
-              <a:lnSpc>
-                <a:spcPts val="1680"/>
-              </a:lnSpc>
-              <a:spcBef>
-                <a:spcPts val="300"/>
-              </a:spcBef>
-              <a:spcAft>
-                <a:spcPts val="300"/>
-              </a:spcAft>
-              <a:buNone/>
+                <a:spcPts val="800"/>
+              </a:spcAft>
+              <a:buNone/>
+            </a:pPr>
+            <a:r>
+              <a:rPr lang="en-US" sz="1800" b="1" dirty="0">
+                <a:solidFill>
+                  <a:srgbClr val="FE4447"/>
+                </a:solidFill>
+                <a:latin typeface="Georgia" pitchFamily="34" charset="0"/>
+                <a:ea typeface="Georgia" pitchFamily="34" charset="-122"/>
+                <a:cs typeface="Georgia" pitchFamily="34" charset="-120"/>
+              </a:rPr>
+              <a:t>Homework</a:t>
+            </a:r>
+            <a:endParaRPr lang="en-US" sz="1800" dirty="0"/>
+          </a:p>
+        </p:txBody>
+      </p:sp>
+      <p:sp>
+        <p:nvSpPr>
+          <p:cNvPr id="4" name="Text 2"/>
+          <p:cNvSpPr/>
+          <p:nvPr/>
+        </p:nvSpPr>
+        <p:spPr>
+          <a:xfrm>
+            <a:off x="634901" y="883593"/>
+            <a:ext cx="8102798" cy="731341"/>
+          </a:xfrm>
+          <a:prstGeom prst="rect">
+            <a:avLst/>
+          </a:prstGeom>
+          <a:noFill/>
+          <a:ln/>
+        </p:spPr>
+        <p:txBody>
+          <a:bodyPr wrap="square" lIns="0" tIns="0" rIns="0" bIns="0" rtlCol="0" anchor="t"/>
+          <a:lstStyle/>
+          <a:p>
+            <a:pPr algn="l" marL="342900" indent="-342900">
+              <a:lnSpc>
+                <a:spcPts val="1620"/>
+              </a:lnSpc>
+              <a:spcAft>
+                <a:spcPts val="300"/>
+              </a:spcAft>
+              <a:buSzPct val="100000"/>
+              <a:buChar char="•"/>
             </a:pPr>
             <a:r>
               <a:rPr lang="en-US" sz="1200" dirty="0">
@@ -3390,7 +6517,31 @@
                 <a:ea typeface="Arial" pitchFamily="34" charset="-122"/>
                 <a:cs typeface="Arial" pitchFamily="34" charset="-120"/>
               </a:rPr>
-              <a:t> form is later. Paraphrased; no specific verse cited.</a:t>
+              <a:t>Continue the Moon diary.</a:t>
+            </a:r>
+            <a:endParaRPr lang="en-US" sz="1200" dirty="0"/>
+          </a:p>
+          <a:p>
+            <a:pPr algn="l" marL="342900" indent="-342900">
+              <a:lnSpc>
+                <a:spcPts val="1620"/>
+              </a:lnSpc>
+              <a:spcAft>
+                <a:spcPts val="300"/>
+              </a:spcAft>
+              <a:buSzPct val="100000"/>
+              <a:buChar char="•"/>
+            </a:pPr>
+            <a:r>
+              <a:rPr lang="en-US" sz="1200" dirty="0">
+                <a:solidFill>
+                  <a:srgbClr val="1C2833"/>
+                </a:solidFill>
+                <a:latin typeface="Arial" pitchFamily="34" charset="0"/>
+                <a:ea typeface="Arial" pitchFamily="34" charset="-122"/>
+                <a:cs typeface="Arial" pitchFamily="34" charset="-120"/>
+              </a:rPr>
+              <a:t>For Day 7: read NASA's published lunar phase page for the current year. Note any solar or lunar eclipses listed for this year — when, where visible. Bring 1 example.</a:t>
             </a:r>
             <a:endParaRPr lang="en-US" sz="1200" dirty="0"/>
           </a:p>
@@ -3548,7 +6699,7 @@
                 <a:ea typeface="Georgia" pitchFamily="34" charset="-122"/>
                 <a:cs typeface="Georgia" pitchFamily="34" charset="-120"/>
               </a:rPr>
-              <a:t>Materials</a:t>
+              <a:t>Learning objective</a:t>
             </a:r>
             <a:endParaRPr lang="en-US" sz="1800" dirty="0"/>
           </a:p>
@@ -3563,6 +6714,146 @@
         <p:spPr>
           <a:xfrm>
             <a:off x="406301" y="870942"/>
+            <a:ext cx="8498026" cy="426541"/>
+          </a:xfrm>
+          <a:prstGeom prst="rect">
+            <a:avLst/>
+          </a:prstGeom>
+          <a:noFill/>
+          <a:ln/>
+        </p:spPr>
+        <p:txBody>
+          <a:bodyPr wrap="square" lIns="0" tIns="0" rIns="0" bIns="0" rtlCol="0" anchor="t"/>
+          <a:lstStyle/>
+          <a:p>
+            <a:pPr algn="l" indent="0" marL="0">
+              <a:lnSpc>
+                <a:spcPts val="1680"/>
+              </a:lnSpc>
+              <a:spcBef>
+                <a:spcPts val="300"/>
+              </a:spcBef>
+              <a:spcAft>
+                <a:spcPts val="300"/>
+              </a:spcAft>
+              <a:buNone/>
+            </a:pPr>
+            <a:r>
+              <a:rPr lang="en-US" sz="1200" dirty="0">
+                <a:solidFill>
+                  <a:srgbClr val="1C2833"/>
+                </a:solidFill>
+                <a:latin typeface="Arial" pitchFamily="34" charset="0"/>
+                <a:ea typeface="Arial" pitchFamily="34" charset="-122"/>
+                <a:cs typeface="Arial" pitchFamily="34" charset="-120"/>
+              </a:rPr>
+              <a:t>Students will name the five limbs (</a:t>
+            </a:r>
+            <a:pPr algn="l" indent="0" marL="0">
+              <a:lnSpc>
+                <a:spcPts val="1680"/>
+              </a:lnSpc>
+              <a:spcBef>
+                <a:spcPts val="300"/>
+              </a:spcBef>
+              <a:spcAft>
+                <a:spcPts val="300"/>
+              </a:spcAft>
+              <a:buNone/>
+            </a:pPr>
+            <a:r>
+              <a:rPr lang="en-US" sz="1200" i="1" dirty="0">
+                <a:solidFill>
+                  <a:srgbClr val="1C2833"/>
+                </a:solidFill>
+                <a:latin typeface="Arial" pitchFamily="34" charset="0"/>
+                <a:ea typeface="Arial" pitchFamily="34" charset="-122"/>
+                <a:cs typeface="Arial" pitchFamily="34" charset="-120"/>
+              </a:rPr>
+              <a:t>aṅga</a:t>
+            </a:r>
+            <a:pPr algn="l" indent="0" marL="0">
+              <a:lnSpc>
+                <a:spcPts val="1680"/>
+              </a:lnSpc>
+              <a:spcBef>
+                <a:spcPts val="300"/>
+              </a:spcBef>
+              <a:spcAft>
+                <a:spcPts val="300"/>
+              </a:spcAft>
+              <a:buNone/>
+            </a:pPr>
+            <a:r>
+              <a:rPr lang="en-US" sz="1200" dirty="0">
+                <a:solidFill>
+                  <a:srgbClr val="1C2833"/>
+                </a:solidFill>
+                <a:latin typeface="Arial" pitchFamily="34" charset="0"/>
+                <a:ea typeface="Arial" pitchFamily="34" charset="-122"/>
+                <a:cs typeface="Arial" pitchFamily="34" charset="-120"/>
+              </a:rPr>
+              <a:t>) of the </a:t>
+            </a:r>
+            <a:pPr algn="l" indent="0" marL="0">
+              <a:lnSpc>
+                <a:spcPts val="1680"/>
+              </a:lnSpc>
+              <a:spcBef>
+                <a:spcPts val="300"/>
+              </a:spcBef>
+              <a:spcAft>
+                <a:spcPts val="300"/>
+              </a:spcAft>
+              <a:buNone/>
+            </a:pPr>
+            <a:r>
+              <a:rPr lang="en-US" sz="1200" i="1" dirty="0">
+                <a:solidFill>
+                  <a:srgbClr val="1C2833"/>
+                </a:solidFill>
+                <a:latin typeface="Arial" pitchFamily="34" charset="0"/>
+                <a:ea typeface="Arial" pitchFamily="34" charset="-122"/>
+                <a:cs typeface="Arial" pitchFamily="34" charset="-120"/>
+              </a:rPr>
+              <a:t>pañcāṅga</a:t>
+            </a:r>
+            <a:pPr algn="l" indent="0" marL="0">
+              <a:lnSpc>
+                <a:spcPts val="1680"/>
+              </a:lnSpc>
+              <a:spcBef>
+                <a:spcPts val="300"/>
+              </a:spcBef>
+              <a:spcAft>
+                <a:spcPts val="300"/>
+              </a:spcAft>
+              <a:buNone/>
+            </a:pPr>
+            <a:r>
+              <a:rPr lang="en-US" sz="1200" dirty="0">
+                <a:solidFill>
+                  <a:srgbClr val="1C2833"/>
+                </a:solidFill>
+                <a:latin typeface="Arial" pitchFamily="34" charset="0"/>
+                <a:ea typeface="Arial" pitchFamily="34" charset="-122"/>
+                <a:cs typeface="Arial" pitchFamily="34" charset="-120"/>
+              </a:rPr>
+              <a:t> — tithi, vāra, nakṣatra, yoga, karaṇa — and explain in one sentence each what each limb tracks.</a:t>
+            </a:r>
+            <a:endParaRPr lang="en-US" sz="1200" dirty="0"/>
+          </a:p>
+        </p:txBody>
+      </p:sp>
+      <p:sp>
+        <p:nvSpPr>
+          <p:cNvPr id="5" name="Text 3"/>
+          <p:cNvSpPr/>
+          <p:nvPr/>
+        </p:nvSpPr>
+        <p:spPr>
+          <a:xfrm>
+            <a:off x="406301" y="4434929"/>
             <a:ext cx="8498026" cy="213271"/>
           </a:xfrm>
           <a:prstGeom prst="rect">
@@ -3596,8 +6887,413 @@
                 <a:ea typeface="Arial" pitchFamily="34" charset="-122"/>
                 <a:cs typeface="Arial" pitchFamily="34" charset="-120"/>
               </a:rPr>
-              <a:t>– The </a:t>
-            </a:r>
+              <a:t>Middle ·  · IKS Curriculum</a:t>
+            </a:r>
+            <a:endParaRPr lang="en-US" sz="1200" dirty="0"/>
+          </a:p>
+        </p:txBody>
+      </p:sp>
+    </p:spTree>
+  </p:cSld>
+  <p:clrMapOvr>
+    <a:masterClrMapping/>
+  </p:clrMapOvr>
+</p:sld>
+</file>
+
+<file path=ppt/slides/slide20.xml><?xml version="1.0" encoding="utf-8"?>
+<p:sld xmlns:a="http://schemas.openxmlformats.org/drawingml/2006/main" xmlns:r="http://schemas.openxmlformats.org/officeDocument/2006/relationships" xmlns:p="http://schemas.openxmlformats.org/presentationml/2006/main">
+  <p:cSld name="Slide 20">
+    <p:bg>
+      <p:bgPr>
+        <a:solidFill>
+          <a:srgbClr val="FFFFFF"/>
+        </a:solidFill>
+      </p:bgPr>
+    </p:bg>
+    <p:spTree>
+      <p:nvGrpSpPr>
+        <p:cNvPr id="1" name=""/>
+        <p:cNvGrpSpPr/>
+        <p:nvPr/>
+      </p:nvGrpSpPr>
+      <p:grpSpPr>
+        <a:xfrm>
+          <a:off x="0" y="0"/>
+          <a:ext cx="0" cy="0"/>
+          <a:chOff x="0" y="0"/>
+          <a:chExt cx="0" cy="0"/>
+        </a:xfrm>
+      </p:grpSpPr>
+      <p:sp>
+        <p:nvSpPr>
+          <p:cNvPr id="2" name="Text 0"/>
+          <p:cNvSpPr/>
+          <p:nvPr/>
+        </p:nvSpPr>
+        <p:spPr>
+          <a:xfrm>
+            <a:off x="0" y="0"/>
+            <a:ext cx="9144000" cy="101501"/>
+          </a:xfrm>
+          <a:prstGeom prst="rect">
+            <a:avLst/>
+          </a:prstGeom>
+          <a:solidFill>
+            <a:srgbClr val="277884"/>
+          </a:solidFill>
+          <a:ln/>
+        </p:spPr>
+        <p:txBody>
+          <a:bodyPr wrap="square" rtlCol="0" anchor="ctr"/>
+          <a:lstStyle/>
+          <a:p>
+            <a:pPr indent="0" marL="0">
+              <a:buNone/>
+            </a:pPr>
+            <a:endParaRPr lang="en-US" dirty="0"/>
+          </a:p>
+        </p:txBody>
+      </p:sp>
+      <p:sp>
+        <p:nvSpPr>
+          <p:cNvPr id="3" name="Text 1"/>
+          <p:cNvSpPr/>
+          <p:nvPr/>
+        </p:nvSpPr>
+        <p:spPr>
+          <a:xfrm>
+            <a:off x="406301" y="457051"/>
+            <a:ext cx="8498026" cy="274290"/>
+          </a:xfrm>
+          <a:prstGeom prst="rect">
+            <a:avLst/>
+          </a:prstGeom>
+          <a:noFill/>
+          <a:ln/>
+        </p:spPr>
+        <p:txBody>
+          <a:bodyPr wrap="square" lIns="0" tIns="0" rIns="0" bIns="0" rtlCol="0" anchor="t"/>
+          <a:lstStyle/>
+          <a:p>
+            <a:pPr algn="l" indent="0" marL="0">
+              <a:lnSpc>
+                <a:spcPts val="2160"/>
+              </a:lnSpc>
+              <a:spcBef>
+                <a:spcPts val="600"/>
+              </a:spcBef>
+              <a:spcAft>
+                <a:spcPts val="800"/>
+              </a:spcAft>
+              <a:buNone/>
+            </a:pPr>
+            <a:r>
+              <a:rPr lang="en-US" sz="1800" b="1" dirty="0">
+                <a:solidFill>
+                  <a:srgbClr val="FE4447"/>
+                </a:solidFill>
+                <a:latin typeface="Georgia" pitchFamily="34" charset="0"/>
+                <a:ea typeface="Georgia" pitchFamily="34" charset="-122"/>
+                <a:cs typeface="Georgia" pitchFamily="34" charset="-120"/>
+              </a:rPr>
+              <a:t>Differentiation</a:t>
+            </a:r>
+            <a:endParaRPr lang="en-US" sz="1800" dirty="0"/>
+          </a:p>
+        </p:txBody>
+      </p:sp>
+      <p:sp>
+        <p:nvSpPr>
+          <p:cNvPr id="4" name="Text 2"/>
+          <p:cNvSpPr/>
+          <p:nvPr/>
+        </p:nvSpPr>
+        <p:spPr>
+          <a:xfrm>
+            <a:off x="634901" y="883593"/>
+            <a:ext cx="8102798" cy="1142702"/>
+          </a:xfrm>
+          <a:prstGeom prst="rect">
+            <a:avLst/>
+          </a:prstGeom>
+          <a:noFill/>
+          <a:ln/>
+        </p:spPr>
+        <p:txBody>
+          <a:bodyPr wrap="square" lIns="0" tIns="0" rIns="0" bIns="0" rtlCol="0" anchor="t"/>
+          <a:lstStyle/>
+          <a:p>
+            <a:pPr algn="l" marL="342900" indent="-342900">
+              <a:lnSpc>
+                <a:spcPts val="1620"/>
+              </a:lnSpc>
+              <a:spcAft>
+                <a:spcPts val="300"/>
+              </a:spcAft>
+              <a:buSzPct val="100000"/>
+              <a:buChar char="•"/>
+            </a:pPr>
+            <a:r>
+              <a:rPr lang="en-US" sz="1200" b="1" dirty="0">
+                <a:solidFill>
+                  <a:srgbClr val="1C2833"/>
+                </a:solidFill>
+                <a:latin typeface="Arial" pitchFamily="34" charset="0"/>
+                <a:ea typeface="Arial" pitchFamily="34" charset="-122"/>
+                <a:cs typeface="Arial" pitchFamily="34" charset="-120"/>
+              </a:rPr>
+              <a:t>One tier up:</a:t>
+            </a:r>
+            <a:pPr algn="l" indent="0" marL="0">
+              <a:lnSpc>
+                <a:spcPts val="1620"/>
+              </a:lnSpc>
+              <a:spcAft>
+                <a:spcPts val="300"/>
+              </a:spcAft>
+              <a:buNone/>
+            </a:pPr>
+            <a:r>
+              <a:rPr lang="en-US" sz="1200" dirty="0">
+                <a:solidFill>
+                  <a:srgbClr val="1C2833"/>
+                </a:solidFill>
+                <a:latin typeface="Arial" pitchFamily="34" charset="0"/>
+                <a:ea typeface="Arial" pitchFamily="34" charset="-122"/>
+                <a:cs typeface="Arial" pitchFamily="34" charset="-120"/>
+              </a:rPr>
+              <a:t> Compute the yoga number for today. You need the Sun's ecliptic longitude and the Moon's ecliptic longitude (from any astronomy app). Add them, divide by 13°20', take the integer part + 1 — that's the yoga number. Compare with what the </a:t>
+            </a:r>
+            <a:pPr algn="l" indent="0" marL="0">
+              <a:lnSpc>
+                <a:spcPts val="1620"/>
+              </a:lnSpc>
+              <a:spcAft>
+                <a:spcPts val="300"/>
+              </a:spcAft>
+              <a:buNone/>
+            </a:pPr>
+            <a:r>
+              <a:rPr lang="en-US" sz="1200" i="1" dirty="0">
+                <a:solidFill>
+                  <a:srgbClr val="1C2833"/>
+                </a:solidFill>
+                <a:latin typeface="Arial" pitchFamily="34" charset="0"/>
+                <a:ea typeface="Arial" pitchFamily="34" charset="-122"/>
+                <a:cs typeface="Arial" pitchFamily="34" charset="-120"/>
+              </a:rPr>
+              <a:t>pañcāṅga</a:t>
+            </a:r>
+            <a:pPr algn="l" indent="0" marL="0">
+              <a:lnSpc>
+                <a:spcPts val="1620"/>
+              </a:lnSpc>
+              <a:spcAft>
+                <a:spcPts val="300"/>
+              </a:spcAft>
+              <a:buNone/>
+            </a:pPr>
+            <a:r>
+              <a:rPr lang="en-US" sz="1200" dirty="0">
+                <a:solidFill>
+                  <a:srgbClr val="1C2833"/>
+                </a:solidFill>
+                <a:latin typeface="Arial" pitchFamily="34" charset="0"/>
+                <a:ea typeface="Arial" pitchFamily="34" charset="-122"/>
+                <a:cs typeface="Arial" pitchFamily="34" charset="-120"/>
+              </a:rPr>
+              <a:t> says.</a:t>
+            </a:r>
+            <a:endParaRPr lang="en-US" sz="1200" dirty="0"/>
+          </a:p>
+          <a:p>
+            <a:pPr algn="l" marL="342900" indent="-342900">
+              <a:lnSpc>
+                <a:spcPts val="1620"/>
+              </a:lnSpc>
+              <a:spcAft>
+                <a:spcPts val="300"/>
+              </a:spcAft>
+              <a:buSzPct val="100000"/>
+              <a:buChar char="•"/>
+            </a:pPr>
+            <a:r>
+              <a:rPr lang="en-US" sz="1200" b="1" dirty="0">
+                <a:solidFill>
+                  <a:srgbClr val="1C2833"/>
+                </a:solidFill>
+                <a:latin typeface="Arial" pitchFamily="34" charset="0"/>
+                <a:ea typeface="Arial" pitchFamily="34" charset="-122"/>
+                <a:cs typeface="Arial" pitchFamily="34" charset="-120"/>
+              </a:rPr>
+              <a:t>One tier down:</a:t>
+            </a:r>
+            <a:pPr algn="l" indent="0" marL="0">
+              <a:lnSpc>
+                <a:spcPts val="1620"/>
+              </a:lnSpc>
+              <a:spcAft>
+                <a:spcPts val="300"/>
+              </a:spcAft>
+              <a:buNone/>
+            </a:pPr>
+            <a:r>
+              <a:rPr lang="en-US" sz="1200" dirty="0">
+                <a:solidFill>
+                  <a:srgbClr val="1C2833"/>
+                </a:solidFill>
+                <a:latin typeface="Arial" pitchFamily="34" charset="0"/>
+                <a:ea typeface="Arial" pitchFamily="34" charset="-122"/>
+                <a:cs typeface="Arial" pitchFamily="34" charset="-120"/>
+              </a:rPr>
+              <a:t> Memorise three limbs only — </a:t>
+            </a:r>
+            <a:pPr algn="l" indent="0" marL="0">
+              <a:lnSpc>
+                <a:spcPts val="1620"/>
+              </a:lnSpc>
+              <a:spcAft>
+                <a:spcPts val="300"/>
+              </a:spcAft>
+              <a:buNone/>
+            </a:pPr>
+            <a:r>
+              <a:rPr lang="en-US" sz="1200" i="1" dirty="0">
+                <a:solidFill>
+                  <a:srgbClr val="1C2833"/>
+                </a:solidFill>
+                <a:latin typeface="Arial" pitchFamily="34" charset="0"/>
+                <a:ea typeface="Arial" pitchFamily="34" charset="-122"/>
+                <a:cs typeface="Arial" pitchFamily="34" charset="-120"/>
+              </a:rPr>
+              <a:t>tithi</a:t>
+            </a:r>
+            <a:pPr algn="l" indent="0" marL="0">
+              <a:lnSpc>
+                <a:spcPts val="1620"/>
+              </a:lnSpc>
+              <a:spcAft>
+                <a:spcPts val="300"/>
+              </a:spcAft>
+              <a:buNone/>
+            </a:pPr>
+            <a:r>
+              <a:rPr lang="en-US" sz="1200" dirty="0">
+                <a:solidFill>
+                  <a:srgbClr val="1C2833"/>
+                </a:solidFill>
+                <a:latin typeface="Arial" pitchFamily="34" charset="0"/>
+                <a:ea typeface="Arial" pitchFamily="34" charset="-122"/>
+                <a:cs typeface="Arial" pitchFamily="34" charset="-120"/>
+              </a:rPr>
+              <a:t>, </a:t>
+            </a:r>
+            <a:pPr algn="l" indent="0" marL="0">
+              <a:lnSpc>
+                <a:spcPts val="1620"/>
+              </a:lnSpc>
+              <a:spcAft>
+                <a:spcPts val="300"/>
+              </a:spcAft>
+              <a:buNone/>
+            </a:pPr>
+            <a:r>
+              <a:rPr lang="en-US" sz="1200" i="1" dirty="0">
+                <a:solidFill>
+                  <a:srgbClr val="1C2833"/>
+                </a:solidFill>
+                <a:latin typeface="Arial" pitchFamily="34" charset="0"/>
+                <a:ea typeface="Arial" pitchFamily="34" charset="-122"/>
+                <a:cs typeface="Arial" pitchFamily="34" charset="-120"/>
+              </a:rPr>
+              <a:t>vāra</a:t>
+            </a:r>
+            <a:pPr algn="l" indent="0" marL="0">
+              <a:lnSpc>
+                <a:spcPts val="1620"/>
+              </a:lnSpc>
+              <a:spcAft>
+                <a:spcPts val="300"/>
+              </a:spcAft>
+              <a:buNone/>
+            </a:pPr>
+            <a:r>
+              <a:rPr lang="en-US" sz="1200" dirty="0">
+                <a:solidFill>
+                  <a:srgbClr val="1C2833"/>
+                </a:solidFill>
+                <a:latin typeface="Arial" pitchFamily="34" charset="0"/>
+                <a:ea typeface="Arial" pitchFamily="34" charset="-122"/>
+                <a:cs typeface="Arial" pitchFamily="34" charset="-120"/>
+              </a:rPr>
+              <a:t>, </a:t>
+            </a:r>
+            <a:pPr algn="l" indent="0" marL="0">
+              <a:lnSpc>
+                <a:spcPts val="1620"/>
+              </a:lnSpc>
+              <a:spcAft>
+                <a:spcPts val="300"/>
+              </a:spcAft>
+              <a:buNone/>
+            </a:pPr>
+            <a:r>
+              <a:rPr lang="en-US" sz="1200" i="1" dirty="0">
+                <a:solidFill>
+                  <a:srgbClr val="1C2833"/>
+                </a:solidFill>
+                <a:latin typeface="Arial" pitchFamily="34" charset="0"/>
+                <a:ea typeface="Arial" pitchFamily="34" charset="-122"/>
+                <a:cs typeface="Arial" pitchFamily="34" charset="-120"/>
+              </a:rPr>
+              <a:t>nakṣatra</a:t>
+            </a:r>
+            <a:pPr algn="l" indent="0" marL="0">
+              <a:lnSpc>
+                <a:spcPts val="1620"/>
+              </a:lnSpc>
+              <a:spcAft>
+                <a:spcPts val="300"/>
+              </a:spcAft>
+              <a:buNone/>
+            </a:pPr>
+            <a:r>
+              <a:rPr lang="en-US" sz="1200" dirty="0">
+                <a:solidFill>
+                  <a:srgbClr val="1C2833"/>
+                </a:solidFill>
+                <a:latin typeface="Arial" pitchFamily="34" charset="0"/>
+                <a:ea typeface="Arial" pitchFamily="34" charset="-122"/>
+                <a:cs typeface="Arial" pitchFamily="34" charset="-120"/>
+              </a:rPr>
+              <a:t>. The yoga and karaṇa terms can stay as "things I've heard of" for now.</a:t>
+            </a:r>
+            <a:endParaRPr lang="en-US" sz="1200" dirty="0"/>
+          </a:p>
+        </p:txBody>
+      </p:sp>
+      <p:sp>
+        <p:nvSpPr>
+          <p:cNvPr id="5" name="Text 3"/>
+          <p:cNvSpPr/>
+          <p:nvPr/>
+        </p:nvSpPr>
+        <p:spPr>
+          <a:xfrm>
+            <a:off x="406301" y="4434929"/>
+            <a:ext cx="8498026" cy="213271"/>
+          </a:xfrm>
+          <a:prstGeom prst="rect">
+            <a:avLst/>
+          </a:prstGeom>
+          <a:noFill/>
+          <a:ln/>
+        </p:spPr>
+        <p:txBody>
+          <a:bodyPr wrap="square" lIns="0" tIns="0" rIns="0" bIns="0" rtlCol="0" anchor="t"/>
+          <a:lstStyle/>
+          <a:p>
             <a:pPr algn="l" indent="0" marL="0">
               <a:lnSpc>
                 <a:spcPts val="1680"/>
@@ -3611,6 +7307,182 @@
               <a:buNone/>
             </a:pPr>
             <a:r>
+              <a:rPr lang="en-US" sz="1200" dirty="0">
+                <a:solidFill>
+                  <a:srgbClr val="1C2833"/>
+                </a:solidFill>
+                <a:latin typeface="Arial" pitchFamily="34" charset="0"/>
+                <a:ea typeface="Arial" pitchFamily="34" charset="-122"/>
+                <a:cs typeface="Arial" pitchFamily="34" charset="-120"/>
+              </a:rPr>
+              <a:t>Middle ·  · IKS Curriculum</a:t>
+            </a:r>
+            <a:endParaRPr lang="en-US" sz="1200" dirty="0"/>
+          </a:p>
+        </p:txBody>
+      </p:sp>
+    </p:spTree>
+  </p:cSld>
+  <p:clrMapOvr>
+    <a:masterClrMapping/>
+  </p:clrMapOvr>
+</p:sld>
+</file>
+
+<file path=ppt/slides/slide21.xml><?xml version="1.0" encoding="utf-8"?>
+<p:sld xmlns:a="http://schemas.openxmlformats.org/drawingml/2006/main" xmlns:r="http://schemas.openxmlformats.org/officeDocument/2006/relationships" xmlns:p="http://schemas.openxmlformats.org/presentationml/2006/main">
+  <p:cSld name="Slide 21">
+    <p:bg>
+      <p:bgPr>
+        <a:solidFill>
+          <a:srgbClr val="FFFFFF"/>
+        </a:solidFill>
+      </p:bgPr>
+    </p:bg>
+    <p:spTree>
+      <p:nvGrpSpPr>
+        <p:cNvPr id="1" name=""/>
+        <p:cNvGrpSpPr/>
+        <p:nvPr/>
+      </p:nvGrpSpPr>
+      <p:grpSpPr>
+        <a:xfrm>
+          <a:off x="0" y="0"/>
+          <a:ext cx="0" cy="0"/>
+          <a:chOff x="0" y="0"/>
+          <a:chExt cx="0" cy="0"/>
+        </a:xfrm>
+      </p:grpSpPr>
+      <p:sp>
+        <p:nvSpPr>
+          <p:cNvPr id="2" name="Text 0"/>
+          <p:cNvSpPr/>
+          <p:nvPr/>
+        </p:nvSpPr>
+        <p:spPr>
+          <a:xfrm>
+            <a:off x="0" y="0"/>
+            <a:ext cx="9144000" cy="101501"/>
+          </a:xfrm>
+          <a:prstGeom prst="rect">
+            <a:avLst/>
+          </a:prstGeom>
+          <a:solidFill>
+            <a:srgbClr val="277884"/>
+          </a:solidFill>
+          <a:ln/>
+        </p:spPr>
+        <p:txBody>
+          <a:bodyPr wrap="square" rtlCol="0" anchor="ctr"/>
+          <a:lstStyle/>
+          <a:p>
+            <a:pPr indent="0" marL="0">
+              <a:buNone/>
+            </a:pPr>
+            <a:endParaRPr lang="en-US" dirty="0"/>
+          </a:p>
+        </p:txBody>
+      </p:sp>
+      <p:sp>
+        <p:nvSpPr>
+          <p:cNvPr id="3" name="Text 1"/>
+          <p:cNvSpPr/>
+          <p:nvPr/>
+        </p:nvSpPr>
+        <p:spPr>
+          <a:xfrm>
+            <a:off x="406301" y="457051"/>
+            <a:ext cx="8498026" cy="274290"/>
+          </a:xfrm>
+          <a:prstGeom prst="rect">
+            <a:avLst/>
+          </a:prstGeom>
+          <a:noFill/>
+          <a:ln/>
+        </p:spPr>
+        <p:txBody>
+          <a:bodyPr wrap="square" lIns="0" tIns="0" rIns="0" bIns="0" rtlCol="0" anchor="t"/>
+          <a:lstStyle/>
+          <a:p>
+            <a:pPr algn="l" indent="0" marL="0">
+              <a:lnSpc>
+                <a:spcPts val="2160"/>
+              </a:lnSpc>
+              <a:spcBef>
+                <a:spcPts val="600"/>
+              </a:spcBef>
+              <a:spcAft>
+                <a:spcPts val="800"/>
+              </a:spcAft>
+              <a:buNone/>
+            </a:pPr>
+            <a:r>
+              <a:rPr lang="en-US" sz="1800" b="1" dirty="0">
+                <a:solidFill>
+                  <a:srgbClr val="FE4447"/>
+                </a:solidFill>
+                <a:latin typeface="Georgia" pitchFamily="34" charset="0"/>
+                <a:ea typeface="Georgia" pitchFamily="34" charset="-122"/>
+                <a:cs typeface="Georgia" pitchFamily="34" charset="-120"/>
+              </a:rPr>
+              <a:t>Teacher notes</a:t>
+            </a:r>
+            <a:endParaRPr lang="en-US" sz="1800" dirty="0"/>
+          </a:p>
+        </p:txBody>
+      </p:sp>
+      <p:sp>
+        <p:nvSpPr>
+          <p:cNvPr id="4" name="Text 2"/>
+          <p:cNvSpPr/>
+          <p:nvPr/>
+        </p:nvSpPr>
+        <p:spPr>
+          <a:xfrm>
+            <a:off x="634901" y="883593"/>
+            <a:ext cx="8102798" cy="1386483"/>
+          </a:xfrm>
+          <a:prstGeom prst="rect">
+            <a:avLst/>
+          </a:prstGeom>
+          <a:noFill/>
+          <a:ln/>
+        </p:spPr>
+        <p:txBody>
+          <a:bodyPr wrap="square" lIns="0" tIns="0" rIns="0" bIns="0" rtlCol="0" anchor="t"/>
+          <a:lstStyle/>
+          <a:p>
+            <a:pPr algn="l" marL="342900" indent="-342900">
+              <a:lnSpc>
+                <a:spcPts val="1620"/>
+              </a:lnSpc>
+              <a:spcAft>
+                <a:spcPts val="300"/>
+              </a:spcAft>
+              <a:buSzPct val="100000"/>
+              <a:buChar char="•"/>
+            </a:pPr>
+            <a:r>
+              <a:rPr lang="en-US" sz="1200" dirty="0">
+                <a:solidFill>
+                  <a:srgbClr val="1C2833"/>
+                </a:solidFill>
+                <a:latin typeface="Arial" pitchFamily="34" charset="0"/>
+                <a:ea typeface="Arial" pitchFamily="34" charset="-122"/>
+                <a:cs typeface="Arial" pitchFamily="34" charset="-120"/>
+              </a:rPr>
+              <a:t>The </a:t>
+            </a:r>
+            <a:pPr algn="l" indent="0" marL="0">
+              <a:lnSpc>
+                <a:spcPts val="1620"/>
+              </a:lnSpc>
+              <a:spcAft>
+                <a:spcPts val="300"/>
+              </a:spcAft>
+              <a:buNone/>
+            </a:pPr>
+            <a:r>
               <a:rPr lang="en-US" sz="1200" i="1" dirty="0">
                 <a:solidFill>
                   <a:srgbClr val="1C2833"/>
@@ -3619,15 +7491,384 @@
                 <a:ea typeface="Arial" pitchFamily="34" charset="-122"/>
                 <a:cs typeface="Arial" pitchFamily="34" charset="-120"/>
               </a:rPr>
+              <a:t>yoga</a:t>
+            </a:r>
+            <a:pPr algn="l" indent="0" marL="0">
+              <a:lnSpc>
+                <a:spcPts val="1620"/>
+              </a:lnSpc>
+              <a:spcAft>
+                <a:spcPts val="300"/>
+              </a:spcAft>
+              <a:buNone/>
+            </a:pPr>
+            <a:r>
+              <a:rPr lang="en-US" sz="1200" dirty="0">
+                <a:solidFill>
+                  <a:srgbClr val="1C2833"/>
+                </a:solidFill>
+                <a:latin typeface="Arial" pitchFamily="34" charset="0"/>
+                <a:ea typeface="Arial" pitchFamily="34" charset="-122"/>
+                <a:cs typeface="Arial" pitchFamily="34" charset="-120"/>
+              </a:rPr>
+              <a:t> limb is the most confusing — partly because "yoga" also means the spiritual discipline. Note this explicitly. They are different applications of the same Sanskrit root </a:t>
+            </a:r>
+            <a:pPr algn="l" indent="0" marL="0">
+              <a:lnSpc>
+                <a:spcPts val="1620"/>
+              </a:lnSpc>
+              <a:spcAft>
+                <a:spcPts val="300"/>
+              </a:spcAft>
+              <a:buNone/>
+            </a:pPr>
+            <a:r>
+              <a:rPr lang="en-US" sz="1200" i="1" dirty="0">
+                <a:solidFill>
+                  <a:srgbClr val="1C2833"/>
+                </a:solidFill>
+                <a:latin typeface="Arial" pitchFamily="34" charset="0"/>
+                <a:ea typeface="Arial" pitchFamily="34" charset="-122"/>
+                <a:cs typeface="Arial" pitchFamily="34" charset="-120"/>
+              </a:rPr>
+              <a:t>yuj</a:t>
+            </a:r>
+            <a:pPr algn="l" indent="0" marL="0">
+              <a:lnSpc>
+                <a:spcPts val="1620"/>
+              </a:lnSpc>
+              <a:spcAft>
+                <a:spcPts val="300"/>
+              </a:spcAft>
+              <a:buNone/>
+            </a:pPr>
+            <a:r>
+              <a:rPr lang="en-US" sz="1200" dirty="0">
+                <a:solidFill>
+                  <a:srgbClr val="1C2833"/>
+                </a:solidFill>
+                <a:latin typeface="Arial" pitchFamily="34" charset="0"/>
+                <a:ea typeface="Arial" pitchFamily="34" charset="-122"/>
+                <a:cs typeface="Arial" pitchFamily="34" charset="-120"/>
+              </a:rPr>
+              <a:t> ("to join").</a:t>
+            </a:r>
+            <a:endParaRPr lang="en-US" sz="1200" dirty="0"/>
+          </a:p>
+          <a:p>
+            <a:pPr algn="l" marL="342900" indent="-342900">
+              <a:lnSpc>
+                <a:spcPts val="1620"/>
+              </a:lnSpc>
+              <a:spcAft>
+                <a:spcPts val="300"/>
+              </a:spcAft>
+              <a:buSzPct val="100000"/>
+              <a:buChar char="•"/>
+            </a:pPr>
+            <a:r>
+              <a:rPr lang="en-US" sz="1200" dirty="0">
+                <a:solidFill>
+                  <a:srgbClr val="1C2833"/>
+                </a:solidFill>
+                <a:latin typeface="Arial" pitchFamily="34" charset="0"/>
+                <a:ea typeface="Arial" pitchFamily="34" charset="-122"/>
+                <a:cs typeface="Arial" pitchFamily="34" charset="-120"/>
+              </a:rPr>
+              <a:t>The </a:t>
+            </a:r>
+            <a:pPr algn="l" indent="0" marL="0">
+              <a:lnSpc>
+                <a:spcPts val="1620"/>
+              </a:lnSpc>
+              <a:spcAft>
+                <a:spcPts val="300"/>
+              </a:spcAft>
+              <a:buNone/>
+            </a:pPr>
+            <a:r>
+              <a:rPr lang="en-US" sz="1200" i="1" dirty="0">
+                <a:solidFill>
+                  <a:srgbClr val="1C2833"/>
+                </a:solidFill>
+                <a:latin typeface="Arial" pitchFamily="34" charset="0"/>
+                <a:ea typeface="Arial" pitchFamily="34" charset="-122"/>
+                <a:cs typeface="Arial" pitchFamily="34" charset="-120"/>
+              </a:rPr>
+              <a:t>karaṇa</a:t>
+            </a:r>
+            <a:pPr algn="l" indent="0" marL="0">
+              <a:lnSpc>
+                <a:spcPts val="1620"/>
+              </a:lnSpc>
+              <a:spcAft>
+                <a:spcPts val="300"/>
+              </a:spcAft>
+              <a:buNone/>
+            </a:pPr>
+            <a:r>
+              <a:rPr lang="en-US" sz="1200" dirty="0">
+                <a:solidFill>
+                  <a:srgbClr val="1C2833"/>
+                </a:solidFill>
+                <a:latin typeface="Arial" pitchFamily="34" charset="0"/>
+                <a:ea typeface="Arial" pitchFamily="34" charset="-122"/>
+                <a:cs typeface="Arial" pitchFamily="34" charset="-120"/>
+              </a:rPr>
+              <a:t> naming is genuinely complicated. Don't try to teach all 11 names today — just enough that students know there are half-tithis and they have names.</a:t>
+            </a:r>
+            <a:endParaRPr lang="en-US" sz="1200" dirty="0"/>
+          </a:p>
+          <a:p>
+            <a:pPr algn="l" marL="342900" indent="-342900">
+              <a:lnSpc>
+                <a:spcPts val="1620"/>
+              </a:lnSpc>
+              <a:spcAft>
+                <a:spcPts val="300"/>
+              </a:spcAft>
+              <a:buSzPct val="100000"/>
+              <a:buChar char="•"/>
+            </a:pPr>
+            <a:r>
+              <a:rPr lang="en-US" sz="1200" dirty="0">
+                <a:solidFill>
+                  <a:srgbClr val="1C2833"/>
+                </a:solidFill>
+                <a:latin typeface="Arial" pitchFamily="34" charset="0"/>
+                <a:ea typeface="Arial" pitchFamily="34" charset="-122"/>
+                <a:cs typeface="Arial" pitchFamily="34" charset="-120"/>
+              </a:rPr>
+              <a:t>This is a content-heavy day. If the class is fading, move the activity to a paired worksheet for tomorrow and use today's time for slow walkthrough.</a:t>
+            </a:r>
+            <a:endParaRPr lang="en-US" sz="1200" dirty="0"/>
+          </a:p>
+        </p:txBody>
+      </p:sp>
+      <p:sp>
+        <p:nvSpPr>
+          <p:cNvPr id="5" name="Text 3"/>
+          <p:cNvSpPr/>
+          <p:nvPr/>
+        </p:nvSpPr>
+        <p:spPr>
+          <a:xfrm>
+            <a:off x="406301" y="4434929"/>
+            <a:ext cx="8498026" cy="213271"/>
+          </a:xfrm>
+          <a:prstGeom prst="rect">
+            <a:avLst/>
+          </a:prstGeom>
+          <a:noFill/>
+          <a:ln/>
+        </p:spPr>
+        <p:txBody>
+          <a:bodyPr wrap="square" lIns="0" tIns="0" rIns="0" bIns="0" rtlCol="0" anchor="t"/>
+          <a:lstStyle/>
+          <a:p>
+            <a:pPr algn="l" indent="0" marL="0">
+              <a:lnSpc>
+                <a:spcPts val="1680"/>
+              </a:lnSpc>
+              <a:spcBef>
+                <a:spcPts val="300"/>
+              </a:spcBef>
+              <a:spcAft>
+                <a:spcPts val="300"/>
+              </a:spcAft>
+              <a:buNone/>
+            </a:pPr>
+            <a:r>
+              <a:rPr lang="en-US" sz="1200" dirty="0">
+                <a:solidFill>
+                  <a:srgbClr val="1C2833"/>
+                </a:solidFill>
+                <a:latin typeface="Arial" pitchFamily="34" charset="0"/>
+                <a:ea typeface="Arial" pitchFamily="34" charset="-122"/>
+                <a:cs typeface="Arial" pitchFamily="34" charset="-120"/>
+              </a:rPr>
+              <a:t>Middle ·  · IKS Curriculum</a:t>
+            </a:r>
+            <a:endParaRPr lang="en-US" sz="1200" dirty="0"/>
+          </a:p>
+        </p:txBody>
+      </p:sp>
+    </p:spTree>
+  </p:cSld>
+  <p:clrMapOvr>
+    <a:masterClrMapping/>
+  </p:clrMapOvr>
+</p:sld>
+</file>
+
+<file path=ppt/slides/slide22.xml><?xml version="1.0" encoding="utf-8"?>
+<p:sld xmlns:a="http://schemas.openxmlformats.org/drawingml/2006/main" xmlns:r="http://schemas.openxmlformats.org/officeDocument/2006/relationships" xmlns:p="http://schemas.openxmlformats.org/presentationml/2006/main">
+  <p:cSld name="Slide 22">
+    <p:bg>
+      <p:bgPr>
+        <a:solidFill>
+          <a:srgbClr val="FFFFFF"/>
+        </a:solidFill>
+      </p:bgPr>
+    </p:bg>
+    <p:spTree>
+      <p:nvGrpSpPr>
+        <p:cNvPr id="1" name=""/>
+        <p:cNvGrpSpPr/>
+        <p:nvPr/>
+      </p:nvGrpSpPr>
+      <p:grpSpPr>
+        <a:xfrm>
+          <a:off x="0" y="0"/>
+          <a:ext cx="0" cy="0"/>
+          <a:chOff x="0" y="0"/>
+          <a:chExt cx="0" cy="0"/>
+        </a:xfrm>
+      </p:grpSpPr>
+      <p:sp>
+        <p:nvSpPr>
+          <p:cNvPr id="2" name="Text 0"/>
+          <p:cNvSpPr/>
+          <p:nvPr/>
+        </p:nvSpPr>
+        <p:spPr>
+          <a:xfrm>
+            <a:off x="0" y="0"/>
+            <a:ext cx="9144000" cy="101501"/>
+          </a:xfrm>
+          <a:prstGeom prst="rect">
+            <a:avLst/>
+          </a:prstGeom>
+          <a:solidFill>
+            <a:srgbClr val="277884"/>
+          </a:solidFill>
+          <a:ln/>
+        </p:spPr>
+        <p:txBody>
+          <a:bodyPr wrap="square" rtlCol="0" anchor="ctr"/>
+          <a:lstStyle/>
+          <a:p>
+            <a:pPr indent="0" marL="0">
+              <a:buNone/>
+            </a:pPr>
+            <a:endParaRPr lang="en-US" dirty="0"/>
+          </a:p>
+        </p:txBody>
+      </p:sp>
+      <p:sp>
+        <p:nvSpPr>
+          <p:cNvPr id="3" name="Text 1"/>
+          <p:cNvSpPr/>
+          <p:nvPr/>
+        </p:nvSpPr>
+        <p:spPr>
+          <a:xfrm>
+            <a:off x="406301" y="457051"/>
+            <a:ext cx="8498026" cy="274290"/>
+          </a:xfrm>
+          <a:prstGeom prst="rect">
+            <a:avLst/>
+          </a:prstGeom>
+          <a:noFill/>
+          <a:ln/>
+        </p:spPr>
+        <p:txBody>
+          <a:bodyPr wrap="square" lIns="0" tIns="0" rIns="0" bIns="0" rtlCol="0" anchor="t"/>
+          <a:lstStyle/>
+          <a:p>
+            <a:pPr algn="l" indent="0" marL="0">
+              <a:lnSpc>
+                <a:spcPts val="2160"/>
+              </a:lnSpc>
+              <a:spcBef>
+                <a:spcPts val="600"/>
+              </a:spcBef>
+              <a:spcAft>
+                <a:spcPts val="800"/>
+              </a:spcAft>
+              <a:buNone/>
+            </a:pPr>
+            <a:r>
+              <a:rPr lang="en-US" sz="1800" b="1" dirty="0">
+                <a:solidFill>
+                  <a:srgbClr val="FE4447"/>
+                </a:solidFill>
+                <a:latin typeface="Georgia" pitchFamily="34" charset="0"/>
+                <a:ea typeface="Georgia" pitchFamily="34" charset="-122"/>
+                <a:cs typeface="Georgia" pitchFamily="34" charset="-120"/>
+              </a:rPr>
+              <a:t>Citation(s) used in this lesson</a:t>
+            </a:r>
+            <a:endParaRPr lang="en-US" sz="1800" dirty="0"/>
+          </a:p>
+        </p:txBody>
+      </p:sp>
+      <p:sp>
+        <p:nvSpPr>
+          <p:cNvPr id="4" name="Text 2"/>
+          <p:cNvSpPr/>
+          <p:nvPr/>
+        </p:nvSpPr>
+        <p:spPr>
+          <a:xfrm>
+            <a:off x="634901" y="883593"/>
+            <a:ext cx="8102798" cy="693241"/>
+          </a:xfrm>
+          <a:prstGeom prst="rect">
+            <a:avLst/>
+          </a:prstGeom>
+          <a:noFill/>
+          <a:ln/>
+        </p:spPr>
+        <p:txBody>
+          <a:bodyPr wrap="square" lIns="0" tIns="0" rIns="0" bIns="0" rtlCol="0" anchor="t"/>
+          <a:lstStyle/>
+          <a:p>
+            <a:pPr algn="l" marL="342900" indent="-342900">
+              <a:lnSpc>
+                <a:spcPts val="1620"/>
+              </a:lnSpc>
+              <a:spcAft>
+                <a:spcPts val="300"/>
+              </a:spcAft>
+              <a:buSzPct val="100000"/>
+              <a:buChar char="•"/>
+            </a:pPr>
+            <a:r>
+              <a:rPr lang="en-US" sz="1200" dirty="0">
+                <a:solidFill>
+                  <a:srgbClr val="1C2833"/>
+                </a:solidFill>
+                <a:latin typeface="Arial" pitchFamily="34" charset="0"/>
+                <a:ea typeface="Arial" pitchFamily="34" charset="-122"/>
+                <a:cs typeface="Arial" pitchFamily="34" charset="-120"/>
+              </a:rPr>
+              <a:t>General reference: the class </a:t>
+            </a:r>
+            <a:pPr algn="l" indent="0" marL="0">
+              <a:lnSpc>
+                <a:spcPts val="1620"/>
+              </a:lnSpc>
+              <a:spcAft>
+                <a:spcPts val="300"/>
+              </a:spcAft>
+              <a:buNone/>
+            </a:pPr>
+            <a:r>
+              <a:rPr lang="en-US" sz="1200" i="1" dirty="0">
+                <a:solidFill>
+                  <a:srgbClr val="1C2833"/>
+                </a:solidFill>
+                <a:latin typeface="Arial" pitchFamily="34" charset="0"/>
+                <a:ea typeface="Arial" pitchFamily="34" charset="-122"/>
+                <a:cs typeface="Arial" pitchFamily="34" charset="-120"/>
+              </a:rPr>
               <a:t>pañcāṅga</a:t>
             </a:r>
             <a:pPr algn="l" indent="0" marL="0">
               <a:lnSpc>
-                <a:spcPts val="1680"/>
-              </a:lnSpc>
-              <a:spcBef>
-                <a:spcPts val="300"/>
-              </a:spcBef>
+                <a:spcPts val="1620"/>
+              </a:lnSpc>
               <a:spcAft>
                 <a:spcPts val="300"/>
               </a:spcAft>
@@ -3642,7 +7883,87 @@
                 <a:ea typeface="Arial" pitchFamily="34" charset="-122"/>
                 <a:cs typeface="Arial" pitchFamily="34" charset="-120"/>
               </a:rPr>
-              <a:t> sample page used on Day 4 – Board with a 5-row table ready – Notebooks</a:t>
+              <a:t> source. The five-limb framework dates to early Indian astronomical literature (e.g. </a:t>
+            </a:r>
+            <a:pPr algn="l" indent="0" marL="0">
+              <a:lnSpc>
+                <a:spcPts val="1620"/>
+              </a:lnSpc>
+              <a:spcAft>
+                <a:spcPts val="300"/>
+              </a:spcAft>
+              <a:buNone/>
+            </a:pPr>
+            <a:r>
+              <a:rPr lang="en-US" sz="1200" i="1" dirty="0">
+                <a:solidFill>
+                  <a:srgbClr val="1C2833"/>
+                </a:solidFill>
+                <a:latin typeface="Arial" pitchFamily="34" charset="0"/>
+                <a:ea typeface="Arial" pitchFamily="34" charset="-122"/>
+                <a:cs typeface="Arial" pitchFamily="34" charset="-120"/>
+              </a:rPr>
+              <a:t>Pañcasiddhāntikā</a:t>
+            </a:r>
+            <a:pPr algn="l" indent="0" marL="0">
+              <a:lnSpc>
+                <a:spcPts val="1620"/>
+              </a:lnSpc>
+              <a:spcAft>
+                <a:spcPts val="300"/>
+              </a:spcAft>
+              <a:buNone/>
+            </a:pPr>
+            <a:r>
+              <a:rPr lang="en-US" sz="1200" dirty="0">
+                <a:solidFill>
+                  <a:srgbClr val="1C2833"/>
+                </a:solidFill>
+                <a:latin typeface="Arial" pitchFamily="34" charset="0"/>
+                <a:ea typeface="Arial" pitchFamily="34" charset="-122"/>
+                <a:cs typeface="Arial" pitchFamily="34" charset="-120"/>
+              </a:rPr>
+              <a:t> of Varāhamihira, 6th c. CE), but the modern </a:t>
+            </a:r>
+            <a:pPr algn="l" indent="0" marL="0">
+              <a:lnSpc>
+                <a:spcPts val="1620"/>
+              </a:lnSpc>
+              <a:spcAft>
+                <a:spcPts val="300"/>
+              </a:spcAft>
+              <a:buNone/>
+            </a:pPr>
+            <a:r>
+              <a:rPr lang="en-US" sz="1200" i="1" dirty="0">
+                <a:solidFill>
+                  <a:srgbClr val="1C2833"/>
+                </a:solidFill>
+                <a:latin typeface="Arial" pitchFamily="34" charset="0"/>
+                <a:ea typeface="Arial" pitchFamily="34" charset="-122"/>
+                <a:cs typeface="Arial" pitchFamily="34" charset="-120"/>
+              </a:rPr>
+              <a:t>pañcāṅga</a:t>
+            </a:r>
+            <a:pPr algn="l" indent="0" marL="0">
+              <a:lnSpc>
+                <a:spcPts val="1620"/>
+              </a:lnSpc>
+              <a:spcAft>
+                <a:spcPts val="300"/>
+              </a:spcAft>
+              <a:buNone/>
+            </a:pPr>
+            <a:r>
+              <a:rPr lang="en-US" sz="1200" dirty="0">
+                <a:solidFill>
+                  <a:srgbClr val="1C2833"/>
+                </a:solidFill>
+                <a:latin typeface="Arial" pitchFamily="34" charset="0"/>
+                <a:ea typeface="Arial" pitchFamily="34" charset="-122"/>
+                <a:cs typeface="Arial" pitchFamily="34" charset="-120"/>
+              </a:rPr>
+              <a:t> form is later. Paraphrased; no specific verse cited.</a:t>
             </a:r>
             <a:endParaRPr lang="en-US" sz="1200" dirty="0"/>
           </a:p>
@@ -3800,7 +8121,7 @@
                 <a:ea typeface="Georgia" pitchFamily="34" charset="-122"/>
                 <a:cs typeface="Georgia" pitchFamily="34" charset="-120"/>
               </a:rPr>
-              <a:t>Vocabulary introduced today</a:t>
+              <a:t>Materials</a:t>
             </a:r>
             <a:endParaRPr lang="en-US" sz="1800" dirty="0"/>
           </a:p>
@@ -3815,7 +8136,7 @@
         <p:spPr>
           <a:xfrm>
             <a:off x="634901" y="883593"/>
-            <a:ext cx="8102798" cy="1668363"/>
+            <a:ext cx="8102798" cy="769441"/>
           </a:xfrm>
           <a:prstGeom prst="rect">
             <a:avLst/>
@@ -3838,6 +8159,26 @@
               <a:buChar char="•"/>
             </a:pPr>
             <a:r>
+              <a:rPr lang="en-US" sz="1200" dirty="0">
+                <a:solidFill>
+                  <a:srgbClr val="1C2833"/>
+                </a:solidFill>
+                <a:latin typeface="Arial" pitchFamily="34" charset="0"/>
+                <a:ea typeface="Arial" pitchFamily="34" charset="-122"/>
+                <a:cs typeface="Arial" pitchFamily="34" charset="-120"/>
+              </a:rPr>
+              <a:t>The </a:t>
+            </a:r>
+            <a:pPr algn="l" indent="0" marL="0">
+              <a:lnSpc>
+                <a:spcPts val="1620"/>
+              </a:lnSpc>
+              <a:spcAft>
+                <a:spcPts val="300"/>
+              </a:spcAft>
+              <a:buNone/>
+            </a:pPr>
+            <a:r>
               <a:rPr lang="en-US" sz="1200" i="1" dirty="0">
                 <a:solidFill>
                   <a:srgbClr val="1C2833"/>
@@ -3866,7 +8207,7 @@
                 <a:ea typeface="Arial" pitchFamily="34" charset="-122"/>
                 <a:cs typeface="Arial" pitchFamily="34" charset="-120"/>
               </a:rPr>
-              <a:t> (IAST: pañca-aṅga; lit. "five limbs") — the traditional Indian almanac listing five astronomical quantities for each day.</a:t>
+              <a:t> sample page used on Day 4</a:t>
             </a:r>
             <a:endParaRPr lang="en-US" sz="1200" dirty="0"/>
           </a:p>
@@ -3882,26 +8223,6 @@
               <a:buChar char="•"/>
             </a:pPr>
             <a:r>
-              <a:rPr lang="en-US" sz="1200" i="1" dirty="0">
-                <a:solidFill>
-                  <a:srgbClr val="1C2833"/>
-                </a:solidFill>
-                <a:latin typeface="Arial" pitchFamily="34" charset="0"/>
-                <a:ea typeface="Arial" pitchFamily="34" charset="-122"/>
-                <a:cs typeface="Arial" pitchFamily="34" charset="-120"/>
-              </a:rPr>
-              <a:t>aṅga</a:t>
-            </a:r>
-            <a:pPr algn="l" indent="0" marL="0">
-              <a:lnSpc>
-                <a:spcPts val="1620"/>
-              </a:lnSpc>
-              <a:spcAft>
-                <a:spcPts val="300"/>
-              </a:spcAft>
-              <a:buNone/>
-            </a:pPr>
-            <a:r>
               <a:rPr lang="en-US" sz="1200" dirty="0">
                 <a:solidFill>
                   <a:srgbClr val="1C2833"/>
@@ -3910,7 +8231,7 @@
                 <a:ea typeface="Arial" pitchFamily="34" charset="-122"/>
                 <a:cs typeface="Arial" pitchFamily="34" charset="-120"/>
               </a:rPr>
-              <a:t> (IAST: aṅga; lit. "limb, part") — one of the five components.</a:t>
+              <a:t>Board with a 5-row table ready</a:t>
             </a:r>
             <a:endParaRPr lang="en-US" sz="1200" dirty="0"/>
           </a:p>
@@ -3926,26 +8247,6 @@
               <a:buChar char="•"/>
             </a:pPr>
             <a:r>
-              <a:rPr lang="en-US" sz="1200" i="1" dirty="0">
-                <a:solidFill>
-                  <a:srgbClr val="1C2833"/>
-                </a:solidFill>
-                <a:latin typeface="Arial" pitchFamily="34" charset="0"/>
-                <a:ea typeface="Arial" pitchFamily="34" charset="-122"/>
-                <a:cs typeface="Arial" pitchFamily="34" charset="-120"/>
-              </a:rPr>
-              <a:t>vāra</a:t>
-            </a:r>
-            <a:pPr algn="l" indent="0" marL="0">
-              <a:lnSpc>
-                <a:spcPts val="1620"/>
-              </a:lnSpc>
-              <a:spcAft>
-                <a:spcPts val="300"/>
-              </a:spcAft>
-              <a:buNone/>
-            </a:pPr>
-            <a:r>
               <a:rPr lang="en-US" sz="1200" dirty="0">
                 <a:solidFill>
                   <a:srgbClr val="1C2833"/>
@@ -3954,95 +8255,7 @@
                 <a:ea typeface="Arial" pitchFamily="34" charset="-122"/>
                 <a:cs typeface="Arial" pitchFamily="34" charset="-120"/>
               </a:rPr>
-              <a:t> (IAST: vāra; lit. "day of the week, occasion") — the weekday.</a:t>
-            </a:r>
-            <a:endParaRPr lang="en-US" sz="1200" dirty="0"/>
-          </a:p>
-          <a:p>
-            <a:pPr algn="l" marL="342900" indent="-342900">
-              <a:lnSpc>
-                <a:spcPts val="1620"/>
-              </a:lnSpc>
-              <a:spcAft>
-                <a:spcPts val="300"/>
-              </a:spcAft>
-              <a:buSzPct val="100000"/>
-              <a:buChar char="•"/>
-            </a:pPr>
-            <a:r>
-              <a:rPr lang="en-US" sz="1200" i="1" dirty="0">
-                <a:solidFill>
-                  <a:srgbClr val="1C2833"/>
-                </a:solidFill>
-                <a:latin typeface="Arial" pitchFamily="34" charset="0"/>
-                <a:ea typeface="Arial" pitchFamily="34" charset="-122"/>
-                <a:cs typeface="Arial" pitchFamily="34" charset="-120"/>
-              </a:rPr>
-              <a:t>yoga</a:t>
-            </a:r>
-            <a:pPr algn="l" indent="0" marL="0">
-              <a:lnSpc>
-                <a:spcPts val="1620"/>
-              </a:lnSpc>
-              <a:spcAft>
-                <a:spcPts val="300"/>
-              </a:spcAft>
-              <a:buNone/>
-            </a:pPr>
-            <a:r>
-              <a:rPr lang="en-US" sz="1200" dirty="0">
-                <a:solidFill>
-                  <a:srgbClr val="1C2833"/>
-                </a:solidFill>
-                <a:latin typeface="Arial" pitchFamily="34" charset="0"/>
-                <a:ea typeface="Arial" pitchFamily="34" charset="-122"/>
-                <a:cs typeface="Arial" pitchFamily="34" charset="-120"/>
-              </a:rPr>
-              <a:t> (IAST: yoga; lit. "joining, combination") — here, one of 27 astronomical divisions based on the sum of Sun and Moon longitudes. (Distinct from yoga as in Patañjali's discipline — same word, different application.)</a:t>
-            </a:r>
-            <a:endParaRPr lang="en-US" sz="1200" dirty="0"/>
-          </a:p>
-          <a:p>
-            <a:pPr algn="l" marL="342900" indent="-342900">
-              <a:lnSpc>
-                <a:spcPts val="1620"/>
-              </a:lnSpc>
-              <a:spcAft>
-                <a:spcPts val="300"/>
-              </a:spcAft>
-              <a:buSzPct val="100000"/>
-              <a:buChar char="•"/>
-            </a:pPr>
-            <a:r>
-              <a:rPr lang="en-US" sz="1200" i="1" dirty="0">
-                <a:solidFill>
-                  <a:srgbClr val="1C2833"/>
-                </a:solidFill>
-                <a:latin typeface="Arial" pitchFamily="34" charset="0"/>
-                <a:ea typeface="Arial" pitchFamily="34" charset="-122"/>
-                <a:cs typeface="Arial" pitchFamily="34" charset="-120"/>
-              </a:rPr>
-              <a:t>karaṇa</a:t>
-            </a:r>
-            <a:pPr algn="l" indent="0" marL="0">
-              <a:lnSpc>
-                <a:spcPts val="1620"/>
-              </a:lnSpc>
-              <a:spcAft>
-                <a:spcPts val="300"/>
-              </a:spcAft>
-              <a:buNone/>
-            </a:pPr>
-            <a:r>
-              <a:rPr lang="en-US" sz="1200" dirty="0">
-                <a:solidFill>
-                  <a:srgbClr val="1C2833"/>
-                </a:solidFill>
-                <a:latin typeface="Arial" pitchFamily="34" charset="0"/>
-                <a:ea typeface="Arial" pitchFamily="34" charset="-122"/>
-                <a:cs typeface="Arial" pitchFamily="34" charset="-120"/>
-              </a:rPr>
-              <a:t> (IAST: karaṇa; lit. "doing, half-portion") — a half-tithi. There are 60 karaṇas in a synodic month.</a:t>
+              <a:t>Notebooks</a:t>
             </a:r>
             <a:endParaRPr lang="en-US" sz="1200" dirty="0"/>
           </a:p>
@@ -4200,7 +8413,7 @@
                 <a:ea typeface="Georgia" pitchFamily="34" charset="-122"/>
                 <a:cs typeface="Georgia" pitchFamily="34" charset="-120"/>
               </a:rPr>
-              <a:t>Lesson flow</a:t>
+              <a:t>Vocabulary introduced today</a:t>
             </a:r>
             <a:endParaRPr lang="en-US" sz="1800" dirty="0"/>
           </a:p>
@@ -4209,6 +8422,248 @@
       <p:sp>
         <p:nvSpPr>
           <p:cNvPr id="4" name="Text 2"/>
+          <p:cNvSpPr/>
+          <p:nvPr/>
+        </p:nvSpPr>
+        <p:spPr>
+          <a:xfrm>
+            <a:off x="634901" y="883593"/>
+            <a:ext cx="8102798" cy="1668363"/>
+          </a:xfrm>
+          <a:prstGeom prst="rect">
+            <a:avLst/>
+          </a:prstGeom>
+          <a:noFill/>
+          <a:ln/>
+        </p:spPr>
+        <p:txBody>
+          <a:bodyPr wrap="square" lIns="0" tIns="0" rIns="0" bIns="0" rtlCol="0" anchor="t"/>
+          <a:lstStyle/>
+          <a:p>
+            <a:pPr algn="l" marL="342900" indent="-342900">
+              <a:lnSpc>
+                <a:spcPts val="1620"/>
+              </a:lnSpc>
+              <a:spcAft>
+                <a:spcPts val="300"/>
+              </a:spcAft>
+              <a:buSzPct val="100000"/>
+              <a:buChar char="•"/>
+            </a:pPr>
+            <a:r>
+              <a:rPr lang="en-US" sz="1200" i="1" dirty="0">
+                <a:solidFill>
+                  <a:srgbClr val="1C2833"/>
+                </a:solidFill>
+                <a:latin typeface="Arial" pitchFamily="34" charset="0"/>
+                <a:ea typeface="Arial" pitchFamily="34" charset="-122"/>
+                <a:cs typeface="Arial" pitchFamily="34" charset="-120"/>
+              </a:rPr>
+              <a:t>pañcāṅga</a:t>
+            </a:r>
+            <a:pPr algn="l" indent="0" marL="0">
+              <a:lnSpc>
+                <a:spcPts val="1620"/>
+              </a:lnSpc>
+              <a:spcAft>
+                <a:spcPts val="300"/>
+              </a:spcAft>
+              <a:buNone/>
+            </a:pPr>
+            <a:r>
+              <a:rPr lang="en-US" sz="1200" dirty="0">
+                <a:solidFill>
+                  <a:srgbClr val="1C2833"/>
+                </a:solidFill>
+                <a:latin typeface="Arial" pitchFamily="34" charset="0"/>
+                <a:ea typeface="Arial" pitchFamily="34" charset="-122"/>
+                <a:cs typeface="Arial" pitchFamily="34" charset="-120"/>
+              </a:rPr>
+              <a:t> (IAST: pañca-aṅga; lit. "five limbs") — the traditional Indian almanac listing five astronomical quantities for each day.</a:t>
+            </a:r>
+            <a:endParaRPr lang="en-US" sz="1200" dirty="0"/>
+          </a:p>
+          <a:p>
+            <a:pPr algn="l" marL="342900" indent="-342900">
+              <a:lnSpc>
+                <a:spcPts val="1620"/>
+              </a:lnSpc>
+              <a:spcAft>
+                <a:spcPts val="300"/>
+              </a:spcAft>
+              <a:buSzPct val="100000"/>
+              <a:buChar char="•"/>
+            </a:pPr>
+            <a:r>
+              <a:rPr lang="en-US" sz="1200" i="1" dirty="0">
+                <a:solidFill>
+                  <a:srgbClr val="1C2833"/>
+                </a:solidFill>
+                <a:latin typeface="Arial" pitchFamily="34" charset="0"/>
+                <a:ea typeface="Arial" pitchFamily="34" charset="-122"/>
+                <a:cs typeface="Arial" pitchFamily="34" charset="-120"/>
+              </a:rPr>
+              <a:t>aṅga</a:t>
+            </a:r>
+            <a:pPr algn="l" indent="0" marL="0">
+              <a:lnSpc>
+                <a:spcPts val="1620"/>
+              </a:lnSpc>
+              <a:spcAft>
+                <a:spcPts val="300"/>
+              </a:spcAft>
+              <a:buNone/>
+            </a:pPr>
+            <a:r>
+              <a:rPr lang="en-US" sz="1200" dirty="0">
+                <a:solidFill>
+                  <a:srgbClr val="1C2833"/>
+                </a:solidFill>
+                <a:latin typeface="Arial" pitchFamily="34" charset="0"/>
+                <a:ea typeface="Arial" pitchFamily="34" charset="-122"/>
+                <a:cs typeface="Arial" pitchFamily="34" charset="-120"/>
+              </a:rPr>
+              <a:t> (IAST: aṅga; lit. "limb, part") — one of the five components.</a:t>
+            </a:r>
+            <a:endParaRPr lang="en-US" sz="1200" dirty="0"/>
+          </a:p>
+          <a:p>
+            <a:pPr algn="l" marL="342900" indent="-342900">
+              <a:lnSpc>
+                <a:spcPts val="1620"/>
+              </a:lnSpc>
+              <a:spcAft>
+                <a:spcPts val="300"/>
+              </a:spcAft>
+              <a:buSzPct val="100000"/>
+              <a:buChar char="•"/>
+            </a:pPr>
+            <a:r>
+              <a:rPr lang="en-US" sz="1200" i="1" dirty="0">
+                <a:solidFill>
+                  <a:srgbClr val="1C2833"/>
+                </a:solidFill>
+                <a:latin typeface="Arial" pitchFamily="34" charset="0"/>
+                <a:ea typeface="Arial" pitchFamily="34" charset="-122"/>
+                <a:cs typeface="Arial" pitchFamily="34" charset="-120"/>
+              </a:rPr>
+              <a:t>vāra</a:t>
+            </a:r>
+            <a:pPr algn="l" indent="0" marL="0">
+              <a:lnSpc>
+                <a:spcPts val="1620"/>
+              </a:lnSpc>
+              <a:spcAft>
+                <a:spcPts val="300"/>
+              </a:spcAft>
+              <a:buNone/>
+            </a:pPr>
+            <a:r>
+              <a:rPr lang="en-US" sz="1200" dirty="0">
+                <a:solidFill>
+                  <a:srgbClr val="1C2833"/>
+                </a:solidFill>
+                <a:latin typeface="Arial" pitchFamily="34" charset="0"/>
+                <a:ea typeface="Arial" pitchFamily="34" charset="-122"/>
+                <a:cs typeface="Arial" pitchFamily="34" charset="-120"/>
+              </a:rPr>
+              <a:t> (IAST: vāra; lit. "day of the week, occasion") — the weekday.</a:t>
+            </a:r>
+            <a:endParaRPr lang="en-US" sz="1200" dirty="0"/>
+          </a:p>
+          <a:p>
+            <a:pPr algn="l" marL="342900" indent="-342900">
+              <a:lnSpc>
+                <a:spcPts val="1620"/>
+              </a:lnSpc>
+              <a:spcAft>
+                <a:spcPts val="300"/>
+              </a:spcAft>
+              <a:buSzPct val="100000"/>
+              <a:buChar char="•"/>
+            </a:pPr>
+            <a:r>
+              <a:rPr lang="en-US" sz="1200" i="1" dirty="0">
+                <a:solidFill>
+                  <a:srgbClr val="1C2833"/>
+                </a:solidFill>
+                <a:latin typeface="Arial" pitchFamily="34" charset="0"/>
+                <a:ea typeface="Arial" pitchFamily="34" charset="-122"/>
+                <a:cs typeface="Arial" pitchFamily="34" charset="-120"/>
+              </a:rPr>
+              <a:t>yoga</a:t>
+            </a:r>
+            <a:pPr algn="l" indent="0" marL="0">
+              <a:lnSpc>
+                <a:spcPts val="1620"/>
+              </a:lnSpc>
+              <a:spcAft>
+                <a:spcPts val="300"/>
+              </a:spcAft>
+              <a:buNone/>
+            </a:pPr>
+            <a:r>
+              <a:rPr lang="en-US" sz="1200" dirty="0">
+                <a:solidFill>
+                  <a:srgbClr val="1C2833"/>
+                </a:solidFill>
+                <a:latin typeface="Arial" pitchFamily="34" charset="0"/>
+                <a:ea typeface="Arial" pitchFamily="34" charset="-122"/>
+                <a:cs typeface="Arial" pitchFamily="34" charset="-120"/>
+              </a:rPr>
+              <a:t> (IAST: yoga; lit. "joining, combination") — here, one of 27 astronomical divisions based on the sum of Sun and Moon longitudes. (Distinct from yoga as in Patañjali's discipline — same word, different application.)</a:t>
+            </a:r>
+            <a:endParaRPr lang="en-US" sz="1200" dirty="0"/>
+          </a:p>
+          <a:p>
+            <a:pPr algn="l" marL="342900" indent="-342900">
+              <a:lnSpc>
+                <a:spcPts val="1620"/>
+              </a:lnSpc>
+              <a:spcAft>
+                <a:spcPts val="300"/>
+              </a:spcAft>
+              <a:buSzPct val="100000"/>
+              <a:buChar char="•"/>
+            </a:pPr>
+            <a:r>
+              <a:rPr lang="en-US" sz="1200" i="1" dirty="0">
+                <a:solidFill>
+                  <a:srgbClr val="1C2833"/>
+                </a:solidFill>
+                <a:latin typeface="Arial" pitchFamily="34" charset="0"/>
+                <a:ea typeface="Arial" pitchFamily="34" charset="-122"/>
+                <a:cs typeface="Arial" pitchFamily="34" charset="-120"/>
+              </a:rPr>
+              <a:t>karaṇa</a:t>
+            </a:r>
+            <a:pPr algn="l" indent="0" marL="0">
+              <a:lnSpc>
+                <a:spcPts val="1620"/>
+              </a:lnSpc>
+              <a:spcAft>
+                <a:spcPts val="300"/>
+              </a:spcAft>
+              <a:buNone/>
+            </a:pPr>
+            <a:r>
+              <a:rPr lang="en-US" sz="1200" dirty="0">
+                <a:solidFill>
+                  <a:srgbClr val="1C2833"/>
+                </a:solidFill>
+                <a:latin typeface="Arial" pitchFamily="34" charset="0"/>
+                <a:ea typeface="Arial" pitchFamily="34" charset="-122"/>
+                <a:cs typeface="Arial" pitchFamily="34" charset="-120"/>
+              </a:rPr>
+              <a:t> (IAST: karaṇa; lit. "doing, half-portion") — a half-tithi. There are 60 karaṇas in a synodic month.</a:t>
+            </a:r>
+            <a:endParaRPr lang="en-US" sz="1200" dirty="0"/>
+          </a:p>
+        </p:txBody>
+      </p:sp>
+      <p:sp>
+        <p:nvSpPr>
+          <p:cNvPr id="5" name="Text 3"/>
           <p:cNvSpPr/>
           <p:nvPr/>
         </p:nvSpPr>
@@ -4358,7 +8813,7 @@
                 <a:ea typeface="Georgia" pitchFamily="34" charset="-122"/>
                 <a:cs typeface="Georgia" pitchFamily="34" charset="-120"/>
               </a:rPr>
-              <a:t>Warm-up (5 min)</a:t>
+              <a:t>Lesson flow</a:t>
             </a:r>
             <a:endParaRPr lang="en-US" sz="1800" dirty="0"/>
           </a:p>
@@ -4367,146 +8822,6 @@
       <p:sp>
         <p:nvSpPr>
           <p:cNvPr id="4" name="Text 2"/>
-          <p:cNvSpPr/>
-          <p:nvPr/>
-        </p:nvSpPr>
-        <p:spPr>
-          <a:xfrm>
-            <a:off x="406301" y="870942"/>
-            <a:ext cx="8498026" cy="213271"/>
-          </a:xfrm>
-          <a:prstGeom prst="rect">
-            <a:avLst/>
-          </a:prstGeom>
-          <a:noFill/>
-          <a:ln/>
-        </p:spPr>
-        <p:txBody>
-          <a:bodyPr wrap="square" lIns="0" tIns="0" rIns="0" bIns="0" rtlCol="0" anchor="t"/>
-          <a:lstStyle/>
-          <a:p>
-            <a:pPr algn="l" indent="0" marL="0">
-              <a:lnSpc>
-                <a:spcPts val="1680"/>
-              </a:lnSpc>
-              <a:spcBef>
-                <a:spcPts val="300"/>
-              </a:spcBef>
-              <a:spcAft>
-                <a:spcPts val="300"/>
-              </a:spcAft>
-              <a:buNone/>
-            </a:pPr>
-            <a:r>
-              <a:rPr lang="en-US" sz="1200" dirty="0">
-                <a:solidFill>
-                  <a:srgbClr val="1C2833"/>
-                </a:solidFill>
-                <a:latin typeface="Arial" pitchFamily="34" charset="0"/>
-                <a:ea typeface="Arial" pitchFamily="34" charset="-122"/>
-                <a:cs typeface="Arial" pitchFamily="34" charset="-120"/>
-              </a:rPr>
-              <a:t>– Daily prompt: </a:t>
-            </a:r>
-            <a:pPr algn="l" indent="0" marL="0">
-              <a:lnSpc>
-                <a:spcPts val="1680"/>
-              </a:lnSpc>
-              <a:spcBef>
-                <a:spcPts val="300"/>
-              </a:spcBef>
-              <a:spcAft>
-                <a:spcPts val="300"/>
-              </a:spcAft>
-              <a:buNone/>
-            </a:pPr>
-            <a:r>
-              <a:rPr lang="en-US" sz="1200" i="1" dirty="0">
-                <a:solidFill>
-                  <a:srgbClr val="1C2833"/>
-                </a:solidFill>
-                <a:latin typeface="Arial" pitchFamily="34" charset="0"/>
-                <a:ea typeface="Arial" pitchFamily="34" charset="-122"/>
-                <a:cs typeface="Arial" pitchFamily="34" charset="-120"/>
-              </a:rPr>
-              <a:t>"Did you see the Moon last night? What tithi?"</a:t>
-            </a:r>
-            <a:pPr algn="l" indent="0" marL="0">
-              <a:lnSpc>
-                <a:spcPts val="1680"/>
-              </a:lnSpc>
-              <a:spcBef>
-                <a:spcPts val="300"/>
-              </a:spcBef>
-              <a:spcAft>
-                <a:spcPts val="300"/>
-              </a:spcAft>
-              <a:buNone/>
-            </a:pPr>
-            <a:r>
-              <a:rPr lang="en-US" sz="1200" dirty="0">
-                <a:solidFill>
-                  <a:srgbClr val="1C2833"/>
-                </a:solidFill>
-                <a:latin typeface="Arial" pitchFamily="34" charset="0"/>
-                <a:ea typeface="Arial" pitchFamily="34" charset="-122"/>
-                <a:cs typeface="Arial" pitchFamily="34" charset="-120"/>
-              </a:rPr>
-              <a:t> — 2 students share.</a:t>
-            </a:r>
-            <a:endParaRPr lang="en-US" sz="1200" dirty="0"/>
-          </a:p>
-        </p:txBody>
-      </p:sp>
-      <p:sp>
-        <p:nvSpPr>
-          <p:cNvPr id="5" name="Text 3"/>
-          <p:cNvSpPr/>
-          <p:nvPr/>
-        </p:nvSpPr>
-        <p:spPr>
-          <a:xfrm>
-            <a:off x="634901" y="1173063"/>
-            <a:ext cx="8102798" cy="487561"/>
-          </a:xfrm>
-          <a:prstGeom prst="rect">
-            <a:avLst/>
-          </a:prstGeom>
-          <a:noFill/>
-          <a:ln/>
-        </p:spPr>
-        <p:txBody>
-          <a:bodyPr wrap="square" lIns="0" tIns="0" rIns="0" bIns="0" rtlCol="0" anchor="t"/>
-          <a:lstStyle/>
-          <a:p>
-            <a:pPr algn="l" marL="342900" indent="-342900">
-              <a:lnSpc>
-                <a:spcPts val="1620"/>
-              </a:lnSpc>
-              <a:spcAft>
-                <a:spcPts val="300"/>
-              </a:spcAft>
-              <a:buSzPct val="100000"/>
-              <a:buChar char="•"/>
-            </a:pPr>
-            <a:r>
-              <a:rPr lang="en-US" sz="1200" i="1" dirty="0">
-                <a:solidFill>
-                  <a:srgbClr val="1C2833"/>
-                </a:solidFill>
-                <a:latin typeface="Arial" pitchFamily="34" charset="0"/>
-                <a:ea typeface="Arial" pitchFamily="34" charset="-122"/>
-                <a:cs typeface="Arial" pitchFamily="34" charset="-120"/>
-              </a:rPr>
-              <a:t>"So far, we've spent five days on ONE limb of the pañcāṅga — the tithi. The pañcāṅga has FOUR more limbs. Today: a tour."</a:t>
-            </a:r>
-            <a:endParaRPr lang="en-US" sz="1200" dirty="0"/>
-          </a:p>
-        </p:txBody>
-      </p:sp>
-      <p:sp>
-        <p:nvSpPr>
-          <p:cNvPr id="6" name="Text 4"/>
           <p:cNvSpPr/>
           <p:nvPr/>
         </p:nvSpPr>
@@ -4656,7 +8971,7 @@
                 <a:ea typeface="Georgia" pitchFamily="34" charset="-122"/>
                 <a:cs typeface="Georgia" pitchFamily="34" charset="-120"/>
               </a:rPr>
-              <a:t>Activity (10 min) — Read the pañcāṅga</a:t>
+              <a:t>Warm-up (5 min)</a:t>
             </a:r>
             <a:endParaRPr lang="en-US" sz="1800" dirty="0"/>
           </a:p>
@@ -4670,8 +8985,8 @@
         </p:nvSpPr>
         <p:spPr>
           <a:xfrm>
-            <a:off x="406301" y="870942"/>
-            <a:ext cx="8498026" cy="213271"/>
+            <a:off x="634901" y="883593"/>
+            <a:ext cx="8102798" cy="731341"/>
           </a:xfrm>
           <a:prstGeom prst="rect">
             <a:avLst/>
@@ -4683,100 +8998,6 @@
           <a:bodyPr wrap="square" lIns="0" tIns="0" rIns="0" bIns="0" rtlCol="0" anchor="t"/>
           <a:lstStyle/>
           <a:p>
-            <a:pPr algn="l" indent="0" marL="0">
-              <a:lnSpc>
-                <a:spcPts val="1680"/>
-              </a:lnSpc>
-              <a:spcBef>
-                <a:spcPts val="300"/>
-              </a:spcBef>
-              <a:spcAft>
-                <a:spcPts val="300"/>
-              </a:spcAft>
-              <a:buNone/>
-            </a:pPr>
-            <a:r>
-              <a:rPr lang="en-US" sz="1200" dirty="0">
-                <a:solidFill>
-                  <a:srgbClr val="1C2833"/>
-                </a:solidFill>
-                <a:latin typeface="Arial" pitchFamily="34" charset="0"/>
-                <a:ea typeface="Arial" pitchFamily="34" charset="-122"/>
-                <a:cs typeface="Arial" pitchFamily="34" charset="-120"/>
-              </a:rPr>
-              <a:t>In pairs, students take yesterday's </a:t>
-            </a:r>
-            <a:pPr algn="l" indent="0" marL="0">
-              <a:lnSpc>
-                <a:spcPts val="1680"/>
-              </a:lnSpc>
-              <a:spcBef>
-                <a:spcPts val="300"/>
-              </a:spcBef>
-              <a:spcAft>
-                <a:spcPts val="300"/>
-              </a:spcAft>
-              <a:buNone/>
-            </a:pPr>
-            <a:r>
-              <a:rPr lang="en-US" sz="1200" i="1" dirty="0">
-                <a:solidFill>
-                  <a:srgbClr val="1C2833"/>
-                </a:solidFill>
-                <a:latin typeface="Arial" pitchFamily="34" charset="0"/>
-                <a:ea typeface="Arial" pitchFamily="34" charset="-122"/>
-                <a:cs typeface="Arial" pitchFamily="34" charset="-120"/>
-              </a:rPr>
-              <a:t>pañcāṅga</a:t>
-            </a:r>
-            <a:pPr algn="l" indent="0" marL="0">
-              <a:lnSpc>
-                <a:spcPts val="1680"/>
-              </a:lnSpc>
-              <a:spcBef>
-                <a:spcPts val="300"/>
-              </a:spcBef>
-              <a:spcAft>
-                <a:spcPts val="300"/>
-              </a:spcAft>
-              <a:buNone/>
-            </a:pPr>
-            <a:r>
-              <a:rPr lang="en-US" sz="1200" dirty="0">
-                <a:solidFill>
-                  <a:srgbClr val="1C2833"/>
-                </a:solidFill>
-                <a:latin typeface="Arial" pitchFamily="34" charset="0"/>
-                <a:ea typeface="Arial" pitchFamily="34" charset="-122"/>
-                <a:cs typeface="Arial" pitchFamily="34" charset="-120"/>
-              </a:rPr>
-              <a:t> page and find:</a:t>
-            </a:r>
-            <a:endParaRPr lang="en-US" sz="1200" dirty="0"/>
-          </a:p>
-        </p:txBody>
-      </p:sp>
-      <p:sp>
-        <p:nvSpPr>
-          <p:cNvPr id="5" name="Text 3"/>
-          <p:cNvSpPr/>
-          <p:nvPr/>
-        </p:nvSpPr>
-        <p:spPr>
-          <a:xfrm>
-            <a:off x="634901" y="1173063"/>
-            <a:ext cx="8102798" cy="1257002"/>
-          </a:xfrm>
-          <a:prstGeom prst="rect">
-            <a:avLst/>
-          </a:prstGeom>
-          <a:noFill/>
-          <a:ln/>
-        </p:spPr>
-        <p:txBody>
-          <a:bodyPr wrap="square" lIns="0" tIns="0" rIns="0" bIns="0" rtlCol="0" anchor="t"/>
-          <a:lstStyle/>
-          <a:p>
             <a:pPr algn="l" marL="342900" indent="-342900">
               <a:lnSpc>
                 <a:spcPts val="1620"/>
@@ -4796,7 +9017,47 @@
                 <a:ea typeface="Arial" pitchFamily="34" charset="-122"/>
                 <a:cs typeface="Arial" pitchFamily="34" charset="-120"/>
               </a:rPr>
-              <a:t>Today's date row.</a:t>
+              <a:t>Daily prompt: </a:t>
+            </a:r>
+            <a:pPr algn="l" indent="0" marL="0">
+              <a:lnSpc>
+                <a:spcPts val="1620"/>
+              </a:lnSpc>
+              <a:spcAft>
+                <a:spcPts val="300"/>
+              </a:spcAft>
+              <a:buNone/>
+            </a:pPr>
+            <a:r>
+              <a:rPr lang="en-US" sz="1200" i="1" dirty="0">
+                <a:solidFill>
+                  <a:srgbClr val="1C2833"/>
+                </a:solidFill>
+                <a:latin typeface="Arial" pitchFamily="34" charset="0"/>
+                <a:ea typeface="Arial" pitchFamily="34" charset="-122"/>
+                <a:cs typeface="Arial" pitchFamily="34" charset="-120"/>
+              </a:rPr>
+              <a:t>"Did you see the Moon last night? What tithi?"</a:t>
+            </a:r>
+            <a:pPr algn="l" indent="0" marL="0">
+              <a:lnSpc>
+                <a:spcPts val="1620"/>
+              </a:lnSpc>
+              <a:spcAft>
+                <a:spcPts val="300"/>
+              </a:spcAft>
+              <a:buNone/>
+            </a:pPr>
+            <a:r>
+              <a:rPr lang="en-US" sz="1200" dirty="0">
+                <a:solidFill>
+                  <a:srgbClr val="1C2833"/>
+                </a:solidFill>
+                <a:latin typeface="Arial" pitchFamily="34" charset="0"/>
+                <a:ea typeface="Arial" pitchFamily="34" charset="-122"/>
+                <a:cs typeface="Arial" pitchFamily="34" charset="-120"/>
+              </a:rPr>
+              <a:t> — 2 students share.</a:t>
             </a:r>
             <a:endParaRPr lang="en-US" sz="1200" dirty="0"/>
           </a:p>
@@ -4812,166 +9073,23 @@
               <a:buChar char="•"/>
             </a:pPr>
             <a:r>
-              <a:rPr lang="en-US" sz="1200" dirty="0">
-                <a:solidFill>
-                  <a:srgbClr val="1C2833"/>
-                </a:solidFill>
-                <a:latin typeface="Arial" pitchFamily="34" charset="0"/>
-                <a:ea typeface="Arial" pitchFamily="34" charset="-122"/>
-                <a:cs typeface="Arial" pitchFamily="34" charset="-120"/>
-              </a:rPr>
-              <a:t>The tithi (already familiar).</a:t>
+              <a:rPr lang="en-US" sz="1200" i="1" dirty="0">
+                <a:solidFill>
+                  <a:srgbClr val="1C2833"/>
+                </a:solidFill>
+                <a:latin typeface="Arial" pitchFamily="34" charset="0"/>
+                <a:ea typeface="Arial" pitchFamily="34" charset="-122"/>
+                <a:cs typeface="Arial" pitchFamily="34" charset="-120"/>
+              </a:rPr>
+              <a:t>"So far, we've spent five days on ONE limb of the pañcāṅga — the tithi. The pañcāṅga has FOUR more limbs. Today: a tour."</a:t>
             </a:r>
             <a:endParaRPr lang="en-US" sz="1200" dirty="0"/>
           </a:p>
-          <a:p>
-            <a:pPr algn="l" marL="342900" indent="-342900">
-              <a:lnSpc>
-                <a:spcPts val="1620"/>
-              </a:lnSpc>
-              <a:spcAft>
-                <a:spcPts val="300"/>
-              </a:spcAft>
-              <a:buSzPct val="100000"/>
-              <a:buChar char="•"/>
-            </a:pPr>
-            <a:r>
-              <a:rPr lang="en-US" sz="1200" dirty="0">
-                <a:solidFill>
-                  <a:srgbClr val="1C2833"/>
-                </a:solidFill>
-                <a:latin typeface="Arial" pitchFamily="34" charset="0"/>
-                <a:ea typeface="Arial" pitchFamily="34" charset="-122"/>
-                <a:cs typeface="Arial" pitchFamily="34" charset="-120"/>
-              </a:rPr>
-              <a:t>The vāra (compare with the English weekday — does it match?).</a:t>
-            </a:r>
-            <a:endParaRPr lang="en-US" sz="1200" dirty="0"/>
-          </a:p>
-          <a:p>
-            <a:pPr algn="l" marL="342900" indent="-342900">
-              <a:lnSpc>
-                <a:spcPts val="1620"/>
-              </a:lnSpc>
-              <a:spcAft>
-                <a:spcPts val="300"/>
-              </a:spcAft>
-              <a:buSzPct val="100000"/>
-              <a:buChar char="•"/>
-            </a:pPr>
-            <a:r>
-              <a:rPr lang="en-US" sz="1200" dirty="0">
-                <a:solidFill>
-                  <a:srgbClr val="1C2833"/>
-                </a:solidFill>
-                <a:latin typeface="Arial" pitchFamily="34" charset="0"/>
-                <a:ea typeface="Arial" pitchFamily="34" charset="-122"/>
-                <a:cs typeface="Arial" pitchFamily="34" charset="-120"/>
-              </a:rPr>
-              <a:t>The nakṣatra. Try to pronounce it.</a:t>
-            </a:r>
-            <a:endParaRPr lang="en-US" sz="1200" dirty="0"/>
-          </a:p>
-          <a:p>
-            <a:pPr algn="l" marL="342900" indent="-342900">
-              <a:lnSpc>
-                <a:spcPts val="1620"/>
-              </a:lnSpc>
-              <a:spcAft>
-                <a:spcPts val="300"/>
-              </a:spcAft>
-              <a:buSzPct val="100000"/>
-              <a:buChar char="•"/>
-            </a:pPr>
-            <a:r>
-              <a:rPr lang="en-US" sz="1200" dirty="0">
-                <a:solidFill>
-                  <a:srgbClr val="1C2833"/>
-                </a:solidFill>
-                <a:latin typeface="Arial" pitchFamily="34" charset="0"/>
-                <a:ea typeface="Arial" pitchFamily="34" charset="-122"/>
-                <a:cs typeface="Arial" pitchFamily="34" charset="-120"/>
-              </a:rPr>
-              <a:t>The yoga and karaṇa names (these are new — just read them, no need to compute).</a:t>
-            </a:r>
-            <a:endParaRPr lang="en-US" sz="1200" dirty="0"/>
-          </a:p>
-        </p:txBody>
-      </p:sp>
-      <p:sp>
-        <p:nvSpPr>
-          <p:cNvPr id="6" name="Text 4"/>
-          <p:cNvSpPr/>
-          <p:nvPr/>
-        </p:nvSpPr>
-        <p:spPr>
-          <a:xfrm>
-            <a:off x="406301" y="2518916"/>
-            <a:ext cx="8498026" cy="426541"/>
-          </a:xfrm>
-          <a:prstGeom prst="rect">
-            <a:avLst/>
-          </a:prstGeom>
-          <a:noFill/>
-          <a:ln/>
-        </p:spPr>
-        <p:txBody>
-          <a:bodyPr wrap="square" lIns="0" tIns="0" rIns="0" bIns="0" rtlCol="0" anchor="t"/>
-          <a:lstStyle/>
-          <a:p>
-            <a:pPr algn="l" indent="0" marL="0">
-              <a:lnSpc>
-                <a:spcPts val="1680"/>
-              </a:lnSpc>
-              <a:spcBef>
-                <a:spcPts val="300"/>
-              </a:spcBef>
-              <a:spcAft>
-                <a:spcPts val="300"/>
-              </a:spcAft>
-              <a:buNone/>
-            </a:pPr>
-            <a:r>
-              <a:rPr lang="en-US" sz="1200" dirty="0">
-                <a:solidFill>
-                  <a:srgbClr val="1C2833"/>
-                </a:solidFill>
-                <a:latin typeface="Arial" pitchFamily="34" charset="0"/>
-                <a:ea typeface="Arial" pitchFamily="34" charset="-122"/>
-                <a:cs typeface="Arial" pitchFamily="34" charset="-120"/>
-              </a:rPr>
-              <a:t>Each pair writes one sentence: </a:t>
-            </a:r>
-            <a:pPr algn="l" indent="0" marL="0">
-              <a:lnSpc>
-                <a:spcPts val="1680"/>
-              </a:lnSpc>
-              <a:spcBef>
-                <a:spcPts val="300"/>
-              </a:spcBef>
-              <a:spcAft>
-                <a:spcPts val="300"/>
-              </a:spcAft>
-              <a:buNone/>
-            </a:pPr>
-            <a:r>
-              <a:rPr lang="en-US" sz="1200" i="1" dirty="0">
-                <a:solidFill>
-                  <a:srgbClr val="1C2833"/>
-                </a:solidFill>
-                <a:latin typeface="Arial" pitchFamily="34" charset="0"/>
-                <a:ea typeface="Arial" pitchFamily="34" charset="-122"/>
-                <a:cs typeface="Arial" pitchFamily="34" charset="-120"/>
-              </a:rPr>
-              <a:t>"Today, [date], the Moon is in [nakṣatra] nakṣatra, it is [tithi] of the [pakṣa] pakṣa, and the vāra is [day]."</a:t>
-            </a:r>
-            <a:endParaRPr lang="en-US" sz="1200" dirty="0"/>
-          </a:p>
-        </p:txBody>
-      </p:sp>
-      <p:sp>
-        <p:nvSpPr>
-          <p:cNvPr id="7" name="Text 5"/>
+        </p:txBody>
+      </p:sp>
+      <p:sp>
+        <p:nvSpPr>
+          <p:cNvPr id="5" name="Text 3"/>
           <p:cNvSpPr/>
           <p:nvPr/>
         </p:nvSpPr>
@@ -5121,7 +9239,7 @@
                 <a:ea typeface="Georgia" pitchFamily="34" charset="-122"/>
                 <a:cs typeface="Georgia" pitchFamily="34" charset="-120"/>
               </a:rPr>
-              <a:t>Wrap-up (5 min)</a:t>
+              <a:t>Core (25 min)</a:t>
             </a:r>
             <a:endParaRPr lang="en-US" sz="1800" dirty="0"/>
           </a:p>
@@ -5135,7 +9253,73 @@
         </p:nvSpPr>
         <p:spPr>
           <a:xfrm>
-            <a:off x="406301" y="870942"/>
+            <a:off x="634901" y="883593"/>
+            <a:ext cx="8102798" cy="281880"/>
+          </a:xfrm>
+          <a:prstGeom prst="rect">
+            <a:avLst/>
+          </a:prstGeom>
+          <a:noFill/>
+          <a:ln/>
+        </p:spPr>
+        <p:txBody>
+          <a:bodyPr wrap="square" lIns="0" tIns="0" rIns="0" bIns="0" rtlCol="0" anchor="t"/>
+          <a:lstStyle/>
+          <a:p>
+            <a:pPr algn="l" marL="342900" indent="-342900">
+              <a:lnSpc>
+                <a:spcPts val="1620"/>
+              </a:lnSpc>
+              <a:spcAft>
+                <a:spcPts val="300"/>
+              </a:spcAft>
+              <a:buSzPct val="100000"/>
+              <a:buChar char="•"/>
+            </a:pPr>
+            <a:r>
+              <a:rPr lang="en-US" sz="1200" b="1" dirty="0">
+                <a:solidFill>
+                  <a:srgbClr val="1C2833"/>
+                </a:solidFill>
+                <a:latin typeface="Arial" pitchFamily="34" charset="0"/>
+                <a:ea typeface="Arial" pitchFamily="34" charset="-122"/>
+                <a:cs typeface="Arial" pitchFamily="34" charset="-120"/>
+              </a:rPr>
+              <a:t>The five limbs.</a:t>
+            </a:r>
+            <a:pPr algn="l" indent="0" marL="0">
+              <a:lnSpc>
+                <a:spcPts val="1620"/>
+              </a:lnSpc>
+              <a:spcAft>
+                <a:spcPts val="300"/>
+              </a:spcAft>
+              <a:buNone/>
+            </a:pPr>
+            <a:r>
+              <a:rPr lang="en-US" sz="1200" dirty="0">
+                <a:solidFill>
+                  <a:srgbClr val="1C2833"/>
+                </a:solidFill>
+                <a:latin typeface="Arial" pitchFamily="34" charset="0"/>
+                <a:ea typeface="Arial" pitchFamily="34" charset="-122"/>
+                <a:cs typeface="Arial" pitchFamily="34" charset="-120"/>
+              </a:rPr>
+              <a:t> Write on the board:</a:t>
+            </a:r>
+            <a:endParaRPr lang="en-US" sz="1200" dirty="0"/>
+          </a:p>
+        </p:txBody>
+      </p:sp>
+      <p:sp>
+        <p:nvSpPr>
+          <p:cNvPr id="5" name="Text 3"/>
+          <p:cNvSpPr/>
+          <p:nvPr/>
+        </p:nvSpPr>
+        <p:spPr>
+          <a:xfrm>
+            <a:off x="406301" y="1254323"/>
             <a:ext cx="8498026" cy="213271"/>
           </a:xfrm>
           <a:prstGeom prst="rect">
@@ -5161,92 +9345,6 @@
               <a:buNone/>
             </a:pPr>
             <a:r>
-              <a:rPr lang="en-US" sz="1200" dirty="0">
-                <a:solidFill>
-                  <a:srgbClr val="1C2833"/>
-                </a:solidFill>
-                <a:latin typeface="Arial" pitchFamily="34" charset="0"/>
-                <a:ea typeface="Arial" pitchFamily="34" charset="-122"/>
-                <a:cs typeface="Arial" pitchFamily="34" charset="-120"/>
-              </a:rPr>
-              <a:t>– Read aloud 2–3 students' sentences. The class reciprocates with the meanings ("Mars day," "Saturn day," etc.).</a:t>
-            </a:r>
-            <a:endParaRPr lang="en-US" sz="1200" dirty="0"/>
-          </a:p>
-        </p:txBody>
-      </p:sp>
-      <p:sp>
-        <p:nvSpPr>
-          <p:cNvPr id="5" name="Text 3"/>
-          <p:cNvSpPr/>
-          <p:nvPr/>
-        </p:nvSpPr>
-        <p:spPr>
-          <a:xfrm>
-            <a:off x="634901" y="1173063"/>
-            <a:ext cx="8102798" cy="487561"/>
-          </a:xfrm>
-          <a:prstGeom prst="rect">
-            <a:avLst/>
-          </a:prstGeom>
-          <a:noFill/>
-          <a:ln/>
-        </p:spPr>
-        <p:txBody>
-          <a:bodyPr wrap="square" lIns="0" tIns="0" rIns="0" bIns="0" rtlCol="0" anchor="t"/>
-          <a:lstStyle/>
-          <a:p>
-            <a:pPr algn="l" marL="342900" indent="-342900">
-              <a:lnSpc>
-                <a:spcPts val="1620"/>
-              </a:lnSpc>
-              <a:spcAft>
-                <a:spcPts val="300"/>
-              </a:spcAft>
-              <a:buSzPct val="100000"/>
-              <a:buChar char="•"/>
-            </a:pPr>
-            <a:r>
-              <a:rPr lang="en-US" sz="1200" b="1" dirty="0">
-                <a:solidFill>
-                  <a:srgbClr val="1C2833"/>
-                </a:solidFill>
-                <a:latin typeface="Arial" pitchFamily="34" charset="0"/>
-                <a:ea typeface="Arial" pitchFamily="34" charset="-122"/>
-                <a:cs typeface="Arial" pitchFamily="34" charset="-120"/>
-              </a:rPr>
-              <a:t>Preview Day 7:</a:t>
-            </a:r>
-            <a:pPr algn="l" indent="0" marL="0">
-              <a:lnSpc>
-                <a:spcPts val="1620"/>
-              </a:lnSpc>
-              <a:spcAft>
-                <a:spcPts val="300"/>
-              </a:spcAft>
-              <a:buNone/>
-            </a:pPr>
-            <a:r>
-              <a:rPr lang="en-US" sz="1200" dirty="0">
-                <a:solidFill>
-                  <a:srgbClr val="1C2833"/>
-                </a:solidFill>
-                <a:latin typeface="Arial" pitchFamily="34" charset="0"/>
-                <a:ea typeface="Arial" pitchFamily="34" charset="-122"/>
-                <a:cs typeface="Arial" pitchFamily="34" charset="-120"/>
-              </a:rPr>
-              <a:t> </a:t>
-            </a:r>
-            <a:pPr algn="l" indent="0" marL="0">
-              <a:lnSpc>
-                <a:spcPts val="1620"/>
-              </a:lnSpc>
-              <a:spcAft>
-                <a:spcPts val="300"/>
-              </a:spcAft>
-              <a:buNone/>
-            </a:pPr>
-            <a:r>
               <a:rPr lang="en-US" sz="1200" i="1" dirty="0">
                 <a:solidFill>
                   <a:srgbClr val="1C2833"/>
@@ -5255,7 +9353,7 @@
                 <a:ea typeface="Arial" pitchFamily="34" charset="-122"/>
                 <a:cs typeface="Arial" pitchFamily="34" charset="-120"/>
               </a:rPr>
-              <a:t>"Tomorrow, the big question — why do eclipses happen on amāvasyā and pūrṇimā, but not every month?"</a:t>
+              <a:t>Each row: # · Limb · What it tracks · Number of options.</a:t>
             </a:r>
             <a:endParaRPr lang="en-US" sz="1200" dirty="0"/>
           </a:p>
@@ -5413,7 +9511,7 @@
                 <a:ea typeface="Georgia" pitchFamily="34" charset="-122"/>
                 <a:cs typeface="Georgia" pitchFamily="34" charset="-120"/>
               </a:rPr>
-              <a:t>Student-facing content</a:t>
+              <a:t>Core (25 min) (cont.)</a:t>
             </a:r>
             <a:endParaRPr lang="en-US" sz="1800" dirty="0"/>
           </a:p>
@@ -5427,61 +9525,8 @@
         </p:nvSpPr>
         <p:spPr>
           <a:xfrm>
-            <a:off x="406301" y="883593"/>
-            <a:ext cx="8331398" cy="1843088"/>
-          </a:xfrm>
-          <a:prstGeom prst="rect">
-            <a:avLst/>
-          </a:prstGeom>
-          <a:solidFill>
-            <a:srgbClr val="F4F8F9"/>
-          </a:solidFill>
-          <a:ln/>
-        </p:spPr>
-        <p:txBody>
-          <a:bodyPr wrap="square" rtlCol="0" anchor="ctr"/>
-          <a:lstStyle/>
-          <a:p>
-            <a:pPr indent="0" marL="0">
-              <a:buNone/>
-            </a:pPr>
-            <a:endParaRPr lang="en-US" dirty="0"/>
-          </a:p>
-        </p:txBody>
-      </p:sp>
-      <p:sp>
-        <p:nvSpPr>
-          <p:cNvPr id="5" name="Shape 3"/>
-          <p:cNvSpPr/>
-          <p:nvPr/>
-        </p:nvSpPr>
-        <p:spPr>
-          <a:xfrm>
-            <a:off x="434876" y="883593"/>
-            <a:ext cx="0" cy="1843088"/>
-          </a:xfrm>
-          <a:prstGeom prst="line">
-            <a:avLst/>
-          </a:prstGeom>
-          <a:noFill/>
-          <a:ln w="57150">
-            <a:solidFill>
-              <a:srgbClr val="FE4447"/>
-            </a:solidFill>
-            <a:prstDash val="solid"/>
-          </a:ln>
-        </p:spPr>
-      </p:sp>
-      <p:sp>
-        <p:nvSpPr>
-          <p:cNvPr id="6" name="Text 4"/>
-          <p:cNvSpPr/>
-          <p:nvPr/>
-        </p:nvSpPr>
-        <p:spPr>
-          <a:xfrm>
-            <a:off x="692051" y="1074093"/>
-            <a:ext cx="7973389" cy="230981"/>
+            <a:off x="634901" y="883593"/>
+            <a:ext cx="8102798" cy="1257002"/>
           </a:xfrm>
           <a:prstGeom prst="rect">
             <a:avLst/>
@@ -5493,362 +9538,430 @@
           <a:bodyPr wrap="square" lIns="0" tIns="0" rIns="0" bIns="0" rtlCol="0" anchor="t"/>
           <a:lstStyle/>
           <a:p>
-            <a:pPr algn="l" indent="0" marL="0">
-              <a:lnSpc>
-                <a:spcPts val="1820"/>
-              </a:lnSpc>
-              <a:spcBef>
-                <a:spcPts val="300"/>
-              </a:spcBef>
-              <a:spcAft>
-                <a:spcPts val="300"/>
-              </a:spcAft>
-              <a:buNone/>
-            </a:pPr>
-            <a:r>
-              <a:rPr lang="en-US" sz="1300" b="1" i="1" dirty="0">
-                <a:solidFill>
-                  <a:srgbClr val="1C2833"/>
-                </a:solidFill>
-                <a:latin typeface="Georgia" pitchFamily="34" charset="0"/>
-                <a:ea typeface="Georgia" pitchFamily="34" charset="-122"/>
-                <a:cs typeface="Georgia" pitchFamily="34" charset="-120"/>
-              </a:rPr>
-              <a:t>A pañcāṅga has five limbs. Each tracks a different astronomical fact.</a:t>
-            </a:r>
-            <a:endParaRPr lang="en-US" sz="1300" dirty="0"/>
-          </a:p>
-        </p:txBody>
-      </p:sp>
-      <p:sp>
-        <p:nvSpPr>
-          <p:cNvPr id="7" name="Text 5"/>
-          <p:cNvSpPr/>
-          <p:nvPr/>
-        </p:nvSpPr>
-        <p:spPr>
-          <a:xfrm>
-            <a:off x="692051" y="1343174"/>
-            <a:ext cx="7973389" cy="692944"/>
-          </a:xfrm>
-          <a:prstGeom prst="rect">
-            <a:avLst/>
-          </a:prstGeom>
-          <a:noFill/>
-          <a:ln/>
-        </p:spPr>
-        <p:txBody>
-          <a:bodyPr wrap="square" lIns="0" tIns="0" rIns="0" bIns="0" rtlCol="0" anchor="t"/>
-          <a:lstStyle/>
-          <a:p>
-            <a:pPr algn="l" indent="0" marL="0">
-              <a:lnSpc>
-                <a:spcPts val="1820"/>
-              </a:lnSpc>
-              <a:spcBef>
-                <a:spcPts val="300"/>
-              </a:spcBef>
-              <a:spcAft>
-                <a:spcPts val="300"/>
-              </a:spcAft>
-              <a:buNone/>
-            </a:pPr>
-            <a:r>
-              <a:rPr lang="en-US" sz="1300" dirty="0">
-                <a:solidFill>
-                  <a:srgbClr val="1C2833"/>
-                </a:solidFill>
-                <a:latin typeface="Georgia" pitchFamily="34" charset="0"/>
-                <a:ea typeface="Georgia" pitchFamily="34" charset="-122"/>
-                <a:cs typeface="Georgia" pitchFamily="34" charset="-120"/>
-              </a:rPr>
-              <a:t>| Limb | What it tracks | |------|----------------| | </a:t>
-            </a:r>
-            <a:pPr algn="l" indent="0" marL="0">
-              <a:lnSpc>
-                <a:spcPts val="1820"/>
-              </a:lnSpc>
-              <a:spcBef>
-                <a:spcPts val="300"/>
-              </a:spcBef>
-              <a:spcAft>
-                <a:spcPts val="300"/>
-              </a:spcAft>
-              <a:buNone/>
-            </a:pPr>
-            <a:r>
-              <a:rPr lang="en-US" sz="1300" i="1" dirty="0">
-                <a:solidFill>
-                  <a:srgbClr val="1C2833"/>
-                </a:solidFill>
-                <a:latin typeface="Georgia" pitchFamily="34" charset="0"/>
-                <a:ea typeface="Georgia" pitchFamily="34" charset="-122"/>
-                <a:cs typeface="Georgia" pitchFamily="34" charset="-120"/>
+            <a:pPr algn="l" marL="342900" indent="-342900">
+              <a:lnSpc>
+                <a:spcPts val="1620"/>
+              </a:lnSpc>
+              <a:spcAft>
+                <a:spcPts val="300"/>
+              </a:spcAft>
+              <a:buSzPct val="100000"/>
+              <a:buChar char="•"/>
+            </a:pPr>
+            <a:r>
+              <a:rPr lang="en-US" sz="1200" b="1" dirty="0">
+                <a:solidFill>
+                  <a:srgbClr val="1C2833"/>
+                </a:solidFill>
+                <a:latin typeface="Arial" pitchFamily="34" charset="0"/>
+                <a:ea typeface="Arial" pitchFamily="34" charset="-122"/>
+                <a:cs typeface="Arial" pitchFamily="34" charset="-120"/>
+              </a:rPr>
+              <a:t>1</a:t>
+            </a:r>
+            <a:pPr algn="l" indent="0" marL="0">
+              <a:lnSpc>
+                <a:spcPts val="1620"/>
+              </a:lnSpc>
+              <a:spcAft>
+                <a:spcPts val="300"/>
+              </a:spcAft>
+              <a:buNone/>
+            </a:pPr>
+            <a:r>
+              <a:rPr lang="en-US" sz="1200" dirty="0">
+                <a:solidFill>
+                  <a:srgbClr val="1C2833"/>
+                </a:solidFill>
+                <a:latin typeface="Arial" pitchFamily="34" charset="0"/>
+                <a:ea typeface="Arial" pitchFamily="34" charset="-122"/>
+                <a:cs typeface="Arial" pitchFamily="34" charset="-120"/>
+              </a:rPr>
+              <a:t> — </a:t>
+            </a:r>
+            <a:pPr algn="l" indent="0" marL="0">
+              <a:lnSpc>
+                <a:spcPts val="1620"/>
+              </a:lnSpc>
+              <a:spcAft>
+                <a:spcPts val="300"/>
+              </a:spcAft>
+              <a:buNone/>
+            </a:pPr>
+            <a:r>
+              <a:rPr lang="en-US" sz="1200" i="1" dirty="0">
+                <a:solidFill>
+                  <a:srgbClr val="1C2833"/>
+                </a:solidFill>
+                <a:latin typeface="Arial" pitchFamily="34" charset="0"/>
+                <a:ea typeface="Arial" pitchFamily="34" charset="-122"/>
+                <a:cs typeface="Arial" pitchFamily="34" charset="-120"/>
               </a:rPr>
               <a:t>tithi</a:t>
             </a:r>
             <a:pPr algn="l" indent="0" marL="0">
               <a:lnSpc>
-                <a:spcPts val="1820"/>
-              </a:lnSpc>
-              <a:spcBef>
-                <a:spcPts val="300"/>
-              </a:spcBef>
-              <a:spcAft>
-                <a:spcPts val="300"/>
-              </a:spcAft>
-              <a:buNone/>
-            </a:pPr>
-            <a:r>
-              <a:rPr lang="en-US" sz="1300" dirty="0">
-                <a:solidFill>
-                  <a:srgbClr val="1C2833"/>
-                </a:solidFill>
-                <a:latin typeface="Georgia" pitchFamily="34" charset="0"/>
-                <a:ea typeface="Georgia" pitchFamily="34" charset="-122"/>
-                <a:cs typeface="Georgia" pitchFamily="34" charset="-120"/>
-              </a:rPr>
-              <a:t> | Moon's elongation from the Sun (1 of 30) | | </a:t>
-            </a:r>
-            <a:pPr algn="l" indent="0" marL="0">
-              <a:lnSpc>
-                <a:spcPts val="1820"/>
-              </a:lnSpc>
-              <a:spcBef>
-                <a:spcPts val="300"/>
-              </a:spcBef>
-              <a:spcAft>
-                <a:spcPts val="300"/>
-              </a:spcAft>
-              <a:buNone/>
-            </a:pPr>
-            <a:r>
-              <a:rPr lang="en-US" sz="1300" i="1" dirty="0">
-                <a:solidFill>
-                  <a:srgbClr val="1C2833"/>
-                </a:solidFill>
-                <a:latin typeface="Georgia" pitchFamily="34" charset="0"/>
-                <a:ea typeface="Georgia" pitchFamily="34" charset="-122"/>
-                <a:cs typeface="Georgia" pitchFamily="34" charset="-120"/>
+                <a:spcPts val="1620"/>
+              </a:lnSpc>
+              <a:spcAft>
+                <a:spcPts val="300"/>
+              </a:spcAft>
+              <a:buNone/>
+            </a:pPr>
+            <a:r>
+              <a:rPr lang="en-US" sz="1200" dirty="0">
+                <a:solidFill>
+                  <a:srgbClr val="1C2833"/>
+                </a:solidFill>
+                <a:latin typeface="Arial" pitchFamily="34" charset="0"/>
+                <a:ea typeface="Arial" pitchFamily="34" charset="-122"/>
+                <a:cs typeface="Arial" pitchFamily="34" charset="-120"/>
+              </a:rPr>
+              <a:t> · Moon's elongation from Sun · 30 per month (covered Days 3–4)</a:t>
+            </a:r>
+            <a:endParaRPr lang="en-US" sz="1200" dirty="0"/>
+          </a:p>
+          <a:p>
+            <a:pPr algn="l" marL="342900" indent="-342900">
+              <a:lnSpc>
+                <a:spcPts val="1620"/>
+              </a:lnSpc>
+              <a:spcAft>
+                <a:spcPts val="300"/>
+              </a:spcAft>
+              <a:buSzPct val="100000"/>
+              <a:buChar char="•"/>
+            </a:pPr>
+            <a:r>
+              <a:rPr lang="en-US" sz="1200" b="1" dirty="0">
+                <a:solidFill>
+                  <a:srgbClr val="1C2833"/>
+                </a:solidFill>
+                <a:latin typeface="Arial" pitchFamily="34" charset="0"/>
+                <a:ea typeface="Arial" pitchFamily="34" charset="-122"/>
+                <a:cs typeface="Arial" pitchFamily="34" charset="-120"/>
+              </a:rPr>
+              <a:t>2</a:t>
+            </a:r>
+            <a:pPr algn="l" indent="0" marL="0">
+              <a:lnSpc>
+                <a:spcPts val="1620"/>
+              </a:lnSpc>
+              <a:spcAft>
+                <a:spcPts val="300"/>
+              </a:spcAft>
+              <a:buNone/>
+            </a:pPr>
+            <a:r>
+              <a:rPr lang="en-US" sz="1200" dirty="0">
+                <a:solidFill>
+                  <a:srgbClr val="1C2833"/>
+                </a:solidFill>
+                <a:latin typeface="Arial" pitchFamily="34" charset="0"/>
+                <a:ea typeface="Arial" pitchFamily="34" charset="-122"/>
+                <a:cs typeface="Arial" pitchFamily="34" charset="-120"/>
+              </a:rPr>
+              <a:t> — </a:t>
+            </a:r>
+            <a:pPr algn="l" indent="0" marL="0">
+              <a:lnSpc>
+                <a:spcPts val="1620"/>
+              </a:lnSpc>
+              <a:spcAft>
+                <a:spcPts val="300"/>
+              </a:spcAft>
+              <a:buNone/>
+            </a:pPr>
+            <a:r>
+              <a:rPr lang="en-US" sz="1200" i="1" dirty="0">
+                <a:solidFill>
+                  <a:srgbClr val="1C2833"/>
+                </a:solidFill>
+                <a:latin typeface="Arial" pitchFamily="34" charset="0"/>
+                <a:ea typeface="Arial" pitchFamily="34" charset="-122"/>
+                <a:cs typeface="Arial" pitchFamily="34" charset="-120"/>
               </a:rPr>
               <a:t>vāra</a:t>
             </a:r>
             <a:pPr algn="l" indent="0" marL="0">
               <a:lnSpc>
-                <a:spcPts val="1820"/>
-              </a:lnSpc>
-              <a:spcBef>
-                <a:spcPts val="300"/>
-              </a:spcBef>
-              <a:spcAft>
-                <a:spcPts val="300"/>
-              </a:spcAft>
-              <a:buNone/>
-            </a:pPr>
-            <a:r>
-              <a:rPr lang="en-US" sz="1300" dirty="0">
-                <a:solidFill>
-                  <a:srgbClr val="1C2833"/>
-                </a:solidFill>
-                <a:latin typeface="Georgia" pitchFamily="34" charset="0"/>
-                <a:ea typeface="Georgia" pitchFamily="34" charset="-122"/>
-                <a:cs typeface="Georgia" pitchFamily="34" charset="-120"/>
-              </a:rPr>
-              <a:t> | day of the week (1 of 7) | | </a:t>
-            </a:r>
-            <a:pPr algn="l" indent="0" marL="0">
-              <a:lnSpc>
-                <a:spcPts val="1820"/>
-              </a:lnSpc>
-              <a:spcBef>
-                <a:spcPts val="300"/>
-              </a:spcBef>
-              <a:spcAft>
-                <a:spcPts val="300"/>
-              </a:spcAft>
-              <a:buNone/>
-            </a:pPr>
-            <a:r>
-              <a:rPr lang="en-US" sz="1300" i="1" dirty="0">
-                <a:solidFill>
-                  <a:srgbClr val="1C2833"/>
-                </a:solidFill>
-                <a:latin typeface="Georgia" pitchFamily="34" charset="0"/>
-                <a:ea typeface="Georgia" pitchFamily="34" charset="-122"/>
-                <a:cs typeface="Georgia" pitchFamily="34" charset="-120"/>
+                <a:spcPts val="1620"/>
+              </a:lnSpc>
+              <a:spcAft>
+                <a:spcPts val="300"/>
+              </a:spcAft>
+              <a:buNone/>
+            </a:pPr>
+            <a:r>
+              <a:rPr lang="en-US" sz="1200" dirty="0">
+                <a:solidFill>
+                  <a:srgbClr val="1C2833"/>
+                </a:solidFill>
+                <a:latin typeface="Arial" pitchFamily="34" charset="0"/>
+                <a:ea typeface="Arial" pitchFamily="34" charset="-122"/>
+                <a:cs typeface="Arial" pitchFamily="34" charset="-120"/>
+              </a:rPr>
+              <a:t> · day of the week · 7</a:t>
+            </a:r>
+            <a:endParaRPr lang="en-US" sz="1200" dirty="0"/>
+          </a:p>
+          <a:p>
+            <a:pPr algn="l" marL="342900" indent="-342900">
+              <a:lnSpc>
+                <a:spcPts val="1620"/>
+              </a:lnSpc>
+              <a:spcAft>
+                <a:spcPts val="300"/>
+              </a:spcAft>
+              <a:buSzPct val="100000"/>
+              <a:buChar char="•"/>
+            </a:pPr>
+            <a:r>
+              <a:rPr lang="en-US" sz="1200" b="1" dirty="0">
+                <a:solidFill>
+                  <a:srgbClr val="1C2833"/>
+                </a:solidFill>
+                <a:latin typeface="Arial" pitchFamily="34" charset="0"/>
+                <a:ea typeface="Arial" pitchFamily="34" charset="-122"/>
+                <a:cs typeface="Arial" pitchFamily="34" charset="-120"/>
+              </a:rPr>
+              <a:t>3</a:t>
+            </a:r>
+            <a:pPr algn="l" indent="0" marL="0">
+              <a:lnSpc>
+                <a:spcPts val="1620"/>
+              </a:lnSpc>
+              <a:spcAft>
+                <a:spcPts val="300"/>
+              </a:spcAft>
+              <a:buNone/>
+            </a:pPr>
+            <a:r>
+              <a:rPr lang="en-US" sz="1200" dirty="0">
+                <a:solidFill>
+                  <a:srgbClr val="1C2833"/>
+                </a:solidFill>
+                <a:latin typeface="Arial" pitchFamily="34" charset="0"/>
+                <a:ea typeface="Arial" pitchFamily="34" charset="-122"/>
+                <a:cs typeface="Arial" pitchFamily="34" charset="-120"/>
+              </a:rPr>
+              <a:t> — </a:t>
+            </a:r>
+            <a:pPr algn="l" indent="0" marL="0">
+              <a:lnSpc>
+                <a:spcPts val="1620"/>
+              </a:lnSpc>
+              <a:spcAft>
+                <a:spcPts val="300"/>
+              </a:spcAft>
+              <a:buNone/>
+            </a:pPr>
+            <a:r>
+              <a:rPr lang="en-US" sz="1200" i="1" dirty="0">
+                <a:solidFill>
+                  <a:srgbClr val="1C2833"/>
+                </a:solidFill>
+                <a:latin typeface="Arial" pitchFamily="34" charset="0"/>
+                <a:ea typeface="Arial" pitchFamily="34" charset="-122"/>
+                <a:cs typeface="Arial" pitchFamily="34" charset="-120"/>
               </a:rPr>
               <a:t>nakṣatra</a:t>
             </a:r>
             <a:pPr algn="l" indent="0" marL="0">
               <a:lnSpc>
-                <a:spcPts val="1820"/>
-              </a:lnSpc>
-              <a:spcBef>
-                <a:spcPts val="300"/>
-              </a:spcBef>
-              <a:spcAft>
-                <a:spcPts val="300"/>
-              </a:spcAft>
-              <a:buNone/>
-            </a:pPr>
-            <a:r>
-              <a:rPr lang="en-US" sz="1300" dirty="0">
-                <a:solidFill>
-                  <a:srgbClr val="1C2833"/>
-                </a:solidFill>
-                <a:latin typeface="Georgia" pitchFamily="34" charset="0"/>
-                <a:ea typeface="Georgia" pitchFamily="34" charset="-122"/>
-                <a:cs typeface="Georgia" pitchFamily="34" charset="-120"/>
-              </a:rPr>
-              <a:t> | Moon's position against the stars (1 of 27) | | </a:t>
-            </a:r>
-            <a:pPr algn="l" indent="0" marL="0">
-              <a:lnSpc>
-                <a:spcPts val="1820"/>
-              </a:lnSpc>
-              <a:spcBef>
-                <a:spcPts val="300"/>
-              </a:spcBef>
-              <a:spcAft>
-                <a:spcPts val="300"/>
-              </a:spcAft>
-              <a:buNone/>
-            </a:pPr>
-            <a:r>
-              <a:rPr lang="en-US" sz="1300" i="1" dirty="0">
-                <a:solidFill>
-                  <a:srgbClr val="1C2833"/>
-                </a:solidFill>
-                <a:latin typeface="Georgia" pitchFamily="34" charset="0"/>
-                <a:ea typeface="Georgia" pitchFamily="34" charset="-122"/>
-                <a:cs typeface="Georgia" pitchFamily="34" charset="-120"/>
+                <a:spcPts val="1620"/>
+              </a:lnSpc>
+              <a:spcAft>
+                <a:spcPts val="300"/>
+              </a:spcAft>
+              <a:buNone/>
+            </a:pPr>
+            <a:r>
+              <a:rPr lang="en-US" sz="1200" dirty="0">
+                <a:solidFill>
+                  <a:srgbClr val="1C2833"/>
+                </a:solidFill>
+                <a:latin typeface="Arial" pitchFamily="34" charset="0"/>
+                <a:ea typeface="Arial" pitchFamily="34" charset="-122"/>
+                <a:cs typeface="Arial" pitchFamily="34" charset="-120"/>
+              </a:rPr>
+              <a:t> · Moon's position against the star background · 27</a:t>
+            </a:r>
+            <a:endParaRPr lang="en-US" sz="1200" dirty="0"/>
+          </a:p>
+          <a:p>
+            <a:pPr algn="l" marL="342900" indent="-342900">
+              <a:lnSpc>
+                <a:spcPts val="1620"/>
+              </a:lnSpc>
+              <a:spcAft>
+                <a:spcPts val="300"/>
+              </a:spcAft>
+              <a:buSzPct val="100000"/>
+              <a:buChar char="•"/>
+            </a:pPr>
+            <a:r>
+              <a:rPr lang="en-US" sz="1200" b="1" dirty="0">
+                <a:solidFill>
+                  <a:srgbClr val="1C2833"/>
+                </a:solidFill>
+                <a:latin typeface="Arial" pitchFamily="34" charset="0"/>
+                <a:ea typeface="Arial" pitchFamily="34" charset="-122"/>
+                <a:cs typeface="Arial" pitchFamily="34" charset="-120"/>
+              </a:rPr>
+              <a:t>4</a:t>
+            </a:r>
+            <a:pPr algn="l" indent="0" marL="0">
+              <a:lnSpc>
+                <a:spcPts val="1620"/>
+              </a:lnSpc>
+              <a:spcAft>
+                <a:spcPts val="300"/>
+              </a:spcAft>
+              <a:buNone/>
+            </a:pPr>
+            <a:r>
+              <a:rPr lang="en-US" sz="1200" dirty="0">
+                <a:solidFill>
+                  <a:srgbClr val="1C2833"/>
+                </a:solidFill>
+                <a:latin typeface="Arial" pitchFamily="34" charset="0"/>
+                <a:ea typeface="Arial" pitchFamily="34" charset="-122"/>
+                <a:cs typeface="Arial" pitchFamily="34" charset="-120"/>
+              </a:rPr>
+              <a:t> — </a:t>
+            </a:r>
+            <a:pPr algn="l" indent="0" marL="0">
+              <a:lnSpc>
+                <a:spcPts val="1620"/>
+              </a:lnSpc>
+              <a:spcAft>
+                <a:spcPts val="300"/>
+              </a:spcAft>
+              <a:buNone/>
+            </a:pPr>
+            <a:r>
+              <a:rPr lang="en-US" sz="1200" i="1" dirty="0">
+                <a:solidFill>
+                  <a:srgbClr val="1C2833"/>
+                </a:solidFill>
+                <a:latin typeface="Arial" pitchFamily="34" charset="0"/>
+                <a:ea typeface="Arial" pitchFamily="34" charset="-122"/>
+                <a:cs typeface="Arial" pitchFamily="34" charset="-120"/>
               </a:rPr>
               <a:t>yoga</a:t>
             </a:r>
             <a:pPr algn="l" indent="0" marL="0">
               <a:lnSpc>
-                <a:spcPts val="1820"/>
-              </a:lnSpc>
-              <a:spcBef>
-                <a:spcPts val="300"/>
-              </a:spcBef>
-              <a:spcAft>
-                <a:spcPts val="300"/>
-              </a:spcAft>
-              <a:buNone/>
-            </a:pPr>
-            <a:r>
-              <a:rPr lang="en-US" sz="1300" dirty="0">
-                <a:solidFill>
-                  <a:srgbClr val="1C2833"/>
-                </a:solidFill>
-                <a:latin typeface="Georgia" pitchFamily="34" charset="0"/>
-                <a:ea typeface="Georgia" pitchFamily="34" charset="-122"/>
-                <a:cs typeface="Georgia" pitchFamily="34" charset="-120"/>
-              </a:rPr>
-              <a:t> | sum of Sun + Moon longitudes (1 of 27) | | </a:t>
-            </a:r>
-            <a:pPr algn="l" indent="0" marL="0">
-              <a:lnSpc>
-                <a:spcPts val="1820"/>
-              </a:lnSpc>
-              <a:spcBef>
-                <a:spcPts val="300"/>
-              </a:spcBef>
-              <a:spcAft>
-                <a:spcPts val="300"/>
-              </a:spcAft>
-              <a:buNone/>
-            </a:pPr>
-            <a:r>
-              <a:rPr lang="en-US" sz="1300" i="1" dirty="0">
-                <a:solidFill>
-                  <a:srgbClr val="1C2833"/>
-                </a:solidFill>
-                <a:latin typeface="Georgia" pitchFamily="34" charset="0"/>
-                <a:ea typeface="Georgia" pitchFamily="34" charset="-122"/>
-                <a:cs typeface="Georgia" pitchFamily="34" charset="-120"/>
+                <a:spcPts val="1620"/>
+              </a:lnSpc>
+              <a:spcAft>
+                <a:spcPts val="300"/>
+              </a:spcAft>
+              <a:buNone/>
+            </a:pPr>
+            <a:r>
+              <a:rPr lang="en-US" sz="1200" dirty="0">
+                <a:solidFill>
+                  <a:srgbClr val="1C2833"/>
+                </a:solidFill>
+                <a:latin typeface="Arial" pitchFamily="34" charset="0"/>
+                <a:ea typeface="Arial" pitchFamily="34" charset="-122"/>
+                <a:cs typeface="Arial" pitchFamily="34" charset="-120"/>
+              </a:rPr>
+              <a:t> · sum of Sun-and-Moon ecliptic longitudes · 27</a:t>
+            </a:r>
+            <a:endParaRPr lang="en-US" sz="1200" dirty="0"/>
+          </a:p>
+          <a:p>
+            <a:pPr algn="l" marL="342900" indent="-342900">
+              <a:lnSpc>
+                <a:spcPts val="1620"/>
+              </a:lnSpc>
+              <a:spcAft>
+                <a:spcPts val="300"/>
+              </a:spcAft>
+              <a:buSzPct val="100000"/>
+              <a:buChar char="•"/>
+            </a:pPr>
+            <a:r>
+              <a:rPr lang="en-US" sz="1200" b="1" dirty="0">
+                <a:solidFill>
+                  <a:srgbClr val="1C2833"/>
+                </a:solidFill>
+                <a:latin typeface="Arial" pitchFamily="34" charset="0"/>
+                <a:ea typeface="Arial" pitchFamily="34" charset="-122"/>
+                <a:cs typeface="Arial" pitchFamily="34" charset="-120"/>
+              </a:rPr>
+              <a:t>5</a:t>
+            </a:r>
+            <a:pPr algn="l" indent="0" marL="0">
+              <a:lnSpc>
+                <a:spcPts val="1620"/>
+              </a:lnSpc>
+              <a:spcAft>
+                <a:spcPts val="300"/>
+              </a:spcAft>
+              <a:buNone/>
+            </a:pPr>
+            <a:r>
+              <a:rPr lang="en-US" sz="1200" dirty="0">
+                <a:solidFill>
+                  <a:srgbClr val="1C2833"/>
+                </a:solidFill>
+                <a:latin typeface="Arial" pitchFamily="34" charset="0"/>
+                <a:ea typeface="Arial" pitchFamily="34" charset="-122"/>
+                <a:cs typeface="Arial" pitchFamily="34" charset="-120"/>
+              </a:rPr>
+              <a:t> — </a:t>
+            </a:r>
+            <a:pPr algn="l" indent="0" marL="0">
+              <a:lnSpc>
+                <a:spcPts val="1620"/>
+              </a:lnSpc>
+              <a:spcAft>
+                <a:spcPts val="300"/>
+              </a:spcAft>
+              <a:buNone/>
+            </a:pPr>
+            <a:r>
+              <a:rPr lang="en-US" sz="1200" i="1" dirty="0">
+                <a:solidFill>
+                  <a:srgbClr val="1C2833"/>
+                </a:solidFill>
+                <a:latin typeface="Arial" pitchFamily="34" charset="0"/>
+                <a:ea typeface="Arial" pitchFamily="34" charset="-122"/>
+                <a:cs typeface="Arial" pitchFamily="34" charset="-120"/>
               </a:rPr>
               <a:t>karaṇa</a:t>
             </a:r>
             <a:pPr algn="l" indent="0" marL="0">
               <a:lnSpc>
-                <a:spcPts val="1820"/>
-              </a:lnSpc>
-              <a:spcBef>
-                <a:spcPts val="300"/>
-              </a:spcBef>
-              <a:spcAft>
-                <a:spcPts val="300"/>
-              </a:spcAft>
-              <a:buNone/>
-            </a:pPr>
-            <a:r>
-              <a:rPr lang="en-US" sz="1300" dirty="0">
-                <a:solidFill>
-                  <a:srgbClr val="1C2833"/>
-                </a:solidFill>
-                <a:latin typeface="Georgia" pitchFamily="34" charset="0"/>
-                <a:ea typeface="Georgia" pitchFamily="34" charset="-122"/>
-                <a:cs typeface="Georgia" pitchFamily="34" charset="-120"/>
-              </a:rPr>
-              <a:t> | half-tithi (1 of 11 cycling names) |</a:t>
-            </a:r>
-            <a:endParaRPr lang="en-US" sz="1300" dirty="0"/>
-          </a:p>
-        </p:txBody>
-      </p:sp>
-      <p:sp>
-        <p:nvSpPr>
-          <p:cNvPr id="8" name="Text 6"/>
-          <p:cNvSpPr/>
-          <p:nvPr/>
-        </p:nvSpPr>
-        <p:spPr>
-          <a:xfrm>
-            <a:off x="692051" y="2074218"/>
-            <a:ext cx="7973389" cy="461963"/>
-          </a:xfrm>
-          <a:prstGeom prst="rect">
-            <a:avLst/>
-          </a:prstGeom>
-          <a:noFill/>
-          <a:ln/>
-        </p:spPr>
-        <p:txBody>
-          <a:bodyPr wrap="square" lIns="0" tIns="0" rIns="0" bIns="0" rtlCol="0" anchor="t"/>
-          <a:lstStyle/>
-          <a:p>
-            <a:pPr algn="l" indent="0" marL="0">
-              <a:lnSpc>
-                <a:spcPts val="1820"/>
-              </a:lnSpc>
-              <a:spcBef>
-                <a:spcPts val="300"/>
-              </a:spcBef>
-              <a:spcAft>
-                <a:spcPts val="300"/>
-              </a:spcAft>
-              <a:buNone/>
-            </a:pPr>
-            <a:r>
-              <a:rPr lang="en-US" sz="1300" i="1" dirty="0">
-                <a:solidFill>
-                  <a:srgbClr val="1C2833"/>
-                </a:solidFill>
-                <a:latin typeface="Georgia" pitchFamily="34" charset="0"/>
-                <a:ea typeface="Georgia" pitchFamily="34" charset="-122"/>
-                <a:cs typeface="Georgia" pitchFamily="34" charset="-120"/>
-              </a:rPr>
-              <a:t>Knowing all five for a given moment is like having a snapshot of where the Sun and Moon are. A modern astronomy almanac does the same job in a different format.</a:t>
-            </a:r>
-            <a:endParaRPr lang="en-US" sz="1300" dirty="0"/>
-          </a:p>
-        </p:txBody>
-      </p:sp>
-      <p:sp>
-        <p:nvSpPr>
-          <p:cNvPr id="9" name="Text 7"/>
+                <a:spcPts val="1620"/>
+              </a:lnSpc>
+              <a:spcAft>
+                <a:spcPts val="300"/>
+              </a:spcAft>
+              <a:buNone/>
+            </a:pPr>
+            <a:r>
+              <a:rPr lang="en-US" sz="1200" dirty="0">
+                <a:solidFill>
+                  <a:srgbClr val="1C2833"/>
+                </a:solidFill>
+                <a:latin typeface="Arial" pitchFamily="34" charset="0"/>
+                <a:ea typeface="Arial" pitchFamily="34" charset="-122"/>
+                <a:cs typeface="Arial" pitchFamily="34" charset="-120"/>
+              </a:rPr>
+              <a:t> · half-tithi · 11 names cycling (because of how the 60 karaṇas of a month are named)</a:t>
+            </a:r>
+            <a:endParaRPr lang="en-US" sz="1200" dirty="0"/>
+          </a:p>
+        </p:txBody>
+      </p:sp>
+      <p:sp>
+        <p:nvSpPr>
+          <p:cNvPr id="5" name="Text 3"/>
           <p:cNvSpPr/>
           <p:nvPr/>
         </p:nvSpPr>
@@ -5998,7 +10111,7 @@
                 <a:ea typeface="Georgia" pitchFamily="34" charset="-122"/>
                 <a:cs typeface="Georgia" pitchFamily="34" charset="-120"/>
               </a:rPr>
-              <a:t>Homework</a:t>
+              <a:t>Core (25 min) (cont.)</a:t>
             </a:r>
             <a:endParaRPr lang="en-US" sz="1800" dirty="0"/>
           </a:p>
@@ -6012,8 +10125,8 @@
         </p:nvSpPr>
         <p:spPr>
           <a:xfrm>
-            <a:off x="406301" y="870942"/>
-            <a:ext cx="8498026" cy="426541"/>
+            <a:off x="634901" y="883593"/>
+            <a:ext cx="8102798" cy="281880"/>
           </a:xfrm>
           <a:prstGeom prst="rect">
             <a:avLst/>
@@ -6025,6 +10138,112 @@
           <a:bodyPr wrap="square" lIns="0" tIns="0" rIns="0" bIns="0" rtlCol="0" anchor="t"/>
           <a:lstStyle/>
           <a:p>
+            <a:pPr algn="l" marL="342900" indent="-342900">
+              <a:lnSpc>
+                <a:spcPts val="1620"/>
+              </a:lnSpc>
+              <a:spcAft>
+                <a:spcPts val="300"/>
+              </a:spcAft>
+              <a:buSzPct val="100000"/>
+              <a:buChar char="•"/>
+            </a:pPr>
+            <a:r>
+              <a:rPr lang="en-US" sz="1200" b="1" dirty="0">
+                <a:solidFill>
+                  <a:srgbClr val="1C2833"/>
+                </a:solidFill>
+                <a:latin typeface="Arial" pitchFamily="34" charset="0"/>
+                <a:ea typeface="Arial" pitchFamily="34" charset="-122"/>
+                <a:cs typeface="Arial" pitchFamily="34" charset="-120"/>
+              </a:rPr>
+              <a:t>Limb-by-limb walkthrough.</a:t>
+            </a:r>
+            <a:pPr algn="l" indent="0" marL="0">
+              <a:lnSpc>
+                <a:spcPts val="1620"/>
+              </a:lnSpc>
+              <a:spcAft>
+                <a:spcPts val="300"/>
+              </a:spcAft>
+              <a:buNone/>
+            </a:pPr>
+            <a:r>
+              <a:rPr lang="en-US" sz="1200" dirty="0">
+                <a:solidFill>
+                  <a:srgbClr val="1C2833"/>
+                </a:solidFill>
+                <a:latin typeface="Arial" pitchFamily="34" charset="0"/>
+                <a:ea typeface="Arial" pitchFamily="34" charset="-122"/>
+                <a:cs typeface="Arial" pitchFamily="34" charset="-120"/>
+              </a:rPr>
+              <a:t> Spend 3 min on each, with concrete reference to the Day 4 </a:t>
+            </a:r>
+            <a:pPr algn="l" indent="0" marL="0">
+              <a:lnSpc>
+                <a:spcPts val="1620"/>
+              </a:lnSpc>
+              <a:spcAft>
+                <a:spcPts val="300"/>
+              </a:spcAft>
+              <a:buNone/>
+            </a:pPr>
+            <a:r>
+              <a:rPr lang="en-US" sz="1200" i="1" dirty="0">
+                <a:solidFill>
+                  <a:srgbClr val="1C2833"/>
+                </a:solidFill>
+                <a:latin typeface="Arial" pitchFamily="34" charset="0"/>
+                <a:ea typeface="Arial" pitchFamily="34" charset="-122"/>
+                <a:cs typeface="Arial" pitchFamily="34" charset="-120"/>
+              </a:rPr>
+              <a:t>pañcāṅga</a:t>
+            </a:r>
+            <a:pPr algn="l" indent="0" marL="0">
+              <a:lnSpc>
+                <a:spcPts val="1620"/>
+              </a:lnSpc>
+              <a:spcAft>
+                <a:spcPts val="300"/>
+              </a:spcAft>
+              <a:buNone/>
+            </a:pPr>
+            <a:r>
+              <a:rPr lang="en-US" sz="1200" dirty="0">
+                <a:solidFill>
+                  <a:srgbClr val="1C2833"/>
+                </a:solidFill>
+                <a:latin typeface="Arial" pitchFamily="34" charset="0"/>
+                <a:ea typeface="Arial" pitchFamily="34" charset="-122"/>
+                <a:cs typeface="Arial" pitchFamily="34" charset="-120"/>
+              </a:rPr>
+              <a:t> page:</a:t>
+            </a:r>
+            <a:endParaRPr lang="en-US" sz="1200" dirty="0"/>
+          </a:p>
+        </p:txBody>
+      </p:sp>
+      <p:sp>
+        <p:nvSpPr>
+          <p:cNvPr id="5" name="Text 3"/>
+          <p:cNvSpPr/>
+          <p:nvPr/>
+        </p:nvSpPr>
+        <p:spPr>
+          <a:xfrm>
+            <a:off x="406301" y="1254323"/>
+            <a:ext cx="8498026" cy="639812"/>
+          </a:xfrm>
+          <a:prstGeom prst="rect">
+            <a:avLst/>
+          </a:prstGeom>
+          <a:noFill/>
+          <a:ln/>
+        </p:spPr>
+        <p:txBody>
+          <a:bodyPr wrap="square" lIns="0" tIns="0" rIns="0" bIns="0" rtlCol="0" anchor="t"/>
+          <a:lstStyle/>
+          <a:p>
             <a:pPr algn="l" indent="0" marL="0">
               <a:lnSpc>
                 <a:spcPts val="1680"/>
@@ -6038,6 +10257,29 @@
               <a:buNone/>
             </a:pPr>
             <a:r>
+              <a:rPr lang="en-US" sz="1200" b="1" dirty="0">
+                <a:solidFill>
+                  <a:srgbClr val="1C2833"/>
+                </a:solidFill>
+                <a:latin typeface="Arial" pitchFamily="34" charset="0"/>
+                <a:ea typeface="Arial" pitchFamily="34" charset="-122"/>
+                <a:cs typeface="Arial" pitchFamily="34" charset="-120"/>
+              </a:rPr>
+              <a:t>Vāra — the weekday (7).</a:t>
+            </a:r>
+            <a:pPr algn="l" indent="0" marL="0">
+              <a:lnSpc>
+                <a:spcPts val="1680"/>
+              </a:lnSpc>
+              <a:spcBef>
+                <a:spcPts val="300"/>
+              </a:spcBef>
+              <a:spcAft>
+                <a:spcPts val="300"/>
+              </a:spcAft>
+              <a:buNone/>
+            </a:pPr>
+            <a:r>
               <a:rPr lang="en-US" sz="1200" dirty="0">
                 <a:solidFill>
                   <a:srgbClr val="1C2833"/>
@@ -6046,7 +10288,329 @@
                 <a:ea typeface="Arial" pitchFamily="34" charset="-122"/>
                 <a:cs typeface="Arial" pitchFamily="34" charset="-120"/>
               </a:rPr>
-              <a:t>– Continue the Moon diary. – For Day 7: read NASA's published lunar phase page for the current year. Note any solar or lunar eclipses listed for this year — when, where visible. Bring 1 example.</a:t>
+              <a:t> Named after the seven classical bodies: Sun (</a:t>
+            </a:r>
+            <a:pPr algn="l" indent="0" marL="0">
+              <a:lnSpc>
+                <a:spcPts val="1680"/>
+              </a:lnSpc>
+              <a:spcBef>
+                <a:spcPts val="300"/>
+              </a:spcBef>
+              <a:spcAft>
+                <a:spcPts val="300"/>
+              </a:spcAft>
+              <a:buNone/>
+            </a:pPr>
+            <a:r>
+              <a:rPr lang="en-US" sz="1200" i="1" dirty="0">
+                <a:solidFill>
+                  <a:srgbClr val="1C2833"/>
+                </a:solidFill>
+                <a:latin typeface="Arial" pitchFamily="34" charset="0"/>
+                <a:ea typeface="Arial" pitchFamily="34" charset="-122"/>
+                <a:cs typeface="Arial" pitchFamily="34" charset="-120"/>
+              </a:rPr>
+              <a:t>Ravi</a:t>
+            </a:r>
+            <a:pPr algn="l" indent="0" marL="0">
+              <a:lnSpc>
+                <a:spcPts val="1680"/>
+              </a:lnSpc>
+              <a:spcBef>
+                <a:spcPts val="300"/>
+              </a:spcBef>
+              <a:spcAft>
+                <a:spcPts val="300"/>
+              </a:spcAft>
+              <a:buNone/>
+            </a:pPr>
+            <a:r>
+              <a:rPr lang="en-US" sz="1200" dirty="0">
+                <a:solidFill>
+                  <a:srgbClr val="1C2833"/>
+                </a:solidFill>
+                <a:latin typeface="Arial" pitchFamily="34" charset="0"/>
+                <a:ea typeface="Arial" pitchFamily="34" charset="-122"/>
+                <a:cs typeface="Arial" pitchFamily="34" charset="-120"/>
+              </a:rPr>
+              <a:t>), Moon (</a:t>
+            </a:r>
+            <a:pPr algn="l" indent="0" marL="0">
+              <a:lnSpc>
+                <a:spcPts val="1680"/>
+              </a:lnSpc>
+              <a:spcBef>
+                <a:spcPts val="300"/>
+              </a:spcBef>
+              <a:spcAft>
+                <a:spcPts val="300"/>
+              </a:spcAft>
+              <a:buNone/>
+            </a:pPr>
+            <a:r>
+              <a:rPr lang="en-US" sz="1200" i="1" dirty="0">
+                <a:solidFill>
+                  <a:srgbClr val="1C2833"/>
+                </a:solidFill>
+                <a:latin typeface="Arial" pitchFamily="34" charset="0"/>
+                <a:ea typeface="Arial" pitchFamily="34" charset="-122"/>
+                <a:cs typeface="Arial" pitchFamily="34" charset="-120"/>
+              </a:rPr>
+              <a:t>Soma / Indu</a:t>
+            </a:r>
+            <a:pPr algn="l" indent="0" marL="0">
+              <a:lnSpc>
+                <a:spcPts val="1680"/>
+              </a:lnSpc>
+              <a:spcBef>
+                <a:spcPts val="300"/>
+              </a:spcBef>
+              <a:spcAft>
+                <a:spcPts val="300"/>
+              </a:spcAft>
+              <a:buNone/>
+            </a:pPr>
+            <a:r>
+              <a:rPr lang="en-US" sz="1200" dirty="0">
+                <a:solidFill>
+                  <a:srgbClr val="1C2833"/>
+                </a:solidFill>
+                <a:latin typeface="Arial" pitchFamily="34" charset="0"/>
+                <a:ea typeface="Arial" pitchFamily="34" charset="-122"/>
+                <a:cs typeface="Arial" pitchFamily="34" charset="-120"/>
+              </a:rPr>
+              <a:t>), Mars (</a:t>
+            </a:r>
+            <a:pPr algn="l" indent="0" marL="0">
+              <a:lnSpc>
+                <a:spcPts val="1680"/>
+              </a:lnSpc>
+              <a:spcBef>
+                <a:spcPts val="300"/>
+              </a:spcBef>
+              <a:spcAft>
+                <a:spcPts val="300"/>
+              </a:spcAft>
+              <a:buNone/>
+            </a:pPr>
+            <a:r>
+              <a:rPr lang="en-US" sz="1200" i="1" dirty="0">
+                <a:solidFill>
+                  <a:srgbClr val="1C2833"/>
+                </a:solidFill>
+                <a:latin typeface="Arial" pitchFamily="34" charset="0"/>
+                <a:ea typeface="Arial" pitchFamily="34" charset="-122"/>
+                <a:cs typeface="Arial" pitchFamily="34" charset="-120"/>
+              </a:rPr>
+              <a:t>Maṅgala</a:t>
+            </a:r>
+            <a:pPr algn="l" indent="0" marL="0">
+              <a:lnSpc>
+                <a:spcPts val="1680"/>
+              </a:lnSpc>
+              <a:spcBef>
+                <a:spcPts val="300"/>
+              </a:spcBef>
+              <a:spcAft>
+                <a:spcPts val="300"/>
+              </a:spcAft>
+              <a:buNone/>
+            </a:pPr>
+            <a:r>
+              <a:rPr lang="en-US" sz="1200" dirty="0">
+                <a:solidFill>
+                  <a:srgbClr val="1C2833"/>
+                </a:solidFill>
+                <a:latin typeface="Arial" pitchFamily="34" charset="0"/>
+                <a:ea typeface="Arial" pitchFamily="34" charset="-122"/>
+                <a:cs typeface="Arial" pitchFamily="34" charset="-120"/>
+              </a:rPr>
+              <a:t>), Mercury (</a:t>
+            </a:r>
+            <a:pPr algn="l" indent="0" marL="0">
+              <a:lnSpc>
+                <a:spcPts val="1680"/>
+              </a:lnSpc>
+              <a:spcBef>
+                <a:spcPts val="300"/>
+              </a:spcBef>
+              <a:spcAft>
+                <a:spcPts val="300"/>
+              </a:spcAft>
+              <a:buNone/>
+            </a:pPr>
+            <a:r>
+              <a:rPr lang="en-US" sz="1200" i="1" dirty="0">
+                <a:solidFill>
+                  <a:srgbClr val="1C2833"/>
+                </a:solidFill>
+                <a:latin typeface="Arial" pitchFamily="34" charset="0"/>
+                <a:ea typeface="Arial" pitchFamily="34" charset="-122"/>
+                <a:cs typeface="Arial" pitchFamily="34" charset="-120"/>
+              </a:rPr>
+              <a:t>Budha</a:t>
+            </a:r>
+            <a:pPr algn="l" indent="0" marL="0">
+              <a:lnSpc>
+                <a:spcPts val="1680"/>
+              </a:lnSpc>
+              <a:spcBef>
+                <a:spcPts val="300"/>
+              </a:spcBef>
+              <a:spcAft>
+                <a:spcPts val="300"/>
+              </a:spcAft>
+              <a:buNone/>
+            </a:pPr>
+            <a:r>
+              <a:rPr lang="en-US" sz="1200" dirty="0">
+                <a:solidFill>
+                  <a:srgbClr val="1C2833"/>
+                </a:solidFill>
+                <a:latin typeface="Arial" pitchFamily="34" charset="0"/>
+                <a:ea typeface="Arial" pitchFamily="34" charset="-122"/>
+                <a:cs typeface="Arial" pitchFamily="34" charset="-120"/>
+              </a:rPr>
+              <a:t>), Jupiter (</a:t>
+            </a:r>
+            <a:pPr algn="l" indent="0" marL="0">
+              <a:lnSpc>
+                <a:spcPts val="1680"/>
+              </a:lnSpc>
+              <a:spcBef>
+                <a:spcPts val="300"/>
+              </a:spcBef>
+              <a:spcAft>
+                <a:spcPts val="300"/>
+              </a:spcAft>
+              <a:buNone/>
+            </a:pPr>
+            <a:r>
+              <a:rPr lang="en-US" sz="1200" i="1" dirty="0">
+                <a:solidFill>
+                  <a:srgbClr val="1C2833"/>
+                </a:solidFill>
+                <a:latin typeface="Arial" pitchFamily="34" charset="0"/>
+                <a:ea typeface="Arial" pitchFamily="34" charset="-122"/>
+                <a:cs typeface="Arial" pitchFamily="34" charset="-120"/>
+              </a:rPr>
+              <a:t>Guru / Bṛhaspati</a:t>
+            </a:r>
+            <a:pPr algn="l" indent="0" marL="0">
+              <a:lnSpc>
+                <a:spcPts val="1680"/>
+              </a:lnSpc>
+              <a:spcBef>
+                <a:spcPts val="300"/>
+              </a:spcBef>
+              <a:spcAft>
+                <a:spcPts val="300"/>
+              </a:spcAft>
+              <a:buNone/>
+            </a:pPr>
+            <a:r>
+              <a:rPr lang="en-US" sz="1200" dirty="0">
+                <a:solidFill>
+                  <a:srgbClr val="1C2833"/>
+                </a:solidFill>
+                <a:latin typeface="Arial" pitchFamily="34" charset="0"/>
+                <a:ea typeface="Arial" pitchFamily="34" charset="-122"/>
+                <a:cs typeface="Arial" pitchFamily="34" charset="-120"/>
+              </a:rPr>
+              <a:t>), Venus (</a:t>
+            </a:r>
+            <a:pPr algn="l" indent="0" marL="0">
+              <a:lnSpc>
+                <a:spcPts val="1680"/>
+              </a:lnSpc>
+              <a:spcBef>
+                <a:spcPts val="300"/>
+              </a:spcBef>
+              <a:spcAft>
+                <a:spcPts val="300"/>
+              </a:spcAft>
+              <a:buNone/>
+            </a:pPr>
+            <a:r>
+              <a:rPr lang="en-US" sz="1200" i="1" dirty="0">
+                <a:solidFill>
+                  <a:srgbClr val="1C2833"/>
+                </a:solidFill>
+                <a:latin typeface="Arial" pitchFamily="34" charset="0"/>
+                <a:ea typeface="Arial" pitchFamily="34" charset="-122"/>
+                <a:cs typeface="Arial" pitchFamily="34" charset="-120"/>
+              </a:rPr>
+              <a:t>Śukra</a:t>
+            </a:r>
+            <a:pPr algn="l" indent="0" marL="0">
+              <a:lnSpc>
+                <a:spcPts val="1680"/>
+              </a:lnSpc>
+              <a:spcBef>
+                <a:spcPts val="300"/>
+              </a:spcBef>
+              <a:spcAft>
+                <a:spcPts val="300"/>
+              </a:spcAft>
+              <a:buNone/>
+            </a:pPr>
+            <a:r>
+              <a:rPr lang="en-US" sz="1200" dirty="0">
+                <a:solidFill>
+                  <a:srgbClr val="1C2833"/>
+                </a:solidFill>
+                <a:latin typeface="Arial" pitchFamily="34" charset="0"/>
+                <a:ea typeface="Arial" pitchFamily="34" charset="-122"/>
+                <a:cs typeface="Arial" pitchFamily="34" charset="-120"/>
+              </a:rPr>
+              <a:t>), Saturn (</a:t>
+            </a:r>
+            <a:pPr algn="l" indent="0" marL="0">
+              <a:lnSpc>
+                <a:spcPts val="1680"/>
+              </a:lnSpc>
+              <a:spcBef>
+                <a:spcPts val="300"/>
+              </a:spcBef>
+              <a:spcAft>
+                <a:spcPts val="300"/>
+              </a:spcAft>
+              <a:buNone/>
+            </a:pPr>
+            <a:r>
+              <a:rPr lang="en-US" sz="1200" i="1" dirty="0">
+                <a:solidFill>
+                  <a:srgbClr val="1C2833"/>
+                </a:solidFill>
+                <a:latin typeface="Arial" pitchFamily="34" charset="0"/>
+                <a:ea typeface="Arial" pitchFamily="34" charset="-122"/>
+                <a:cs typeface="Arial" pitchFamily="34" charset="-120"/>
+              </a:rPr>
+              <a:t>Śani</a:t>
+            </a:r>
+            <a:pPr algn="l" indent="0" marL="0">
+              <a:lnSpc>
+                <a:spcPts val="1680"/>
+              </a:lnSpc>
+              <a:spcBef>
+                <a:spcPts val="300"/>
+              </a:spcBef>
+              <a:spcAft>
+                <a:spcPts val="300"/>
+              </a:spcAft>
+              <a:buNone/>
+            </a:pPr>
+            <a:r>
+              <a:rPr lang="en-US" sz="1200" dirty="0">
+                <a:solidFill>
+                  <a:srgbClr val="1C2833"/>
+                </a:solidFill>
+                <a:latin typeface="Arial" pitchFamily="34" charset="0"/>
+                <a:ea typeface="Arial" pitchFamily="34" charset="-122"/>
+                <a:cs typeface="Arial" pitchFamily="34" charset="-120"/>
+              </a:rPr>
+              <a:t>). English Sunday/Monday/... has the same Sun/Moon/Saturn pattern — same naming logic from the same classical-period astronomy.</a:t>
             </a:r>
             <a:endParaRPr lang="en-US" sz="1200" dirty="0"/>
           </a:p>
@@ -6054,7 +10618,7 @@
       </p:sp>
       <p:sp>
         <p:nvSpPr>
-          <p:cNvPr id="5" name="Text 3"/>
+          <p:cNvPr id="6" name="Text 4"/>
           <p:cNvSpPr/>
           <p:nvPr/>
         </p:nvSpPr>
